--- a/FinGenius_AI_Seminar_Presentation.pptx
+++ b/FinGenius_AI_Seminar_Presentation.pptx
@@ -3104,13 +3104,13 @@
         <p:spPr>
           <a:xfrm>
             <a:off x="0" y="0"/>
-            <a:ext cx="12191695" cy="4160520"/>
+            <a:ext cx="12191695" cy="6858000"/>
           </a:xfrm>
           <a:prstGeom prst="rect">
             <a:avLst/>
           </a:prstGeom>
           <a:solidFill>
-            <a:srgbClr val="003092"/>
+            <a:srgbClr val="0F1120"/>
           </a:solidFill>
           <a:ln>
             <a:noFill/>
@@ -3147,14 +3147,14 @@
         </p:nvSpPr>
         <p:spPr>
           <a:xfrm>
-            <a:off x="0" y="4160520"/>
-            <a:ext cx="12191695" cy="51206"/>
+            <a:off x="0" y="0"/>
+            <a:ext cx="12191695" cy="82296"/>
           </a:xfrm>
           <a:prstGeom prst="rect">
             <a:avLst/>
           </a:prstGeom>
           <a:solidFill>
-            <a:srgbClr val="EF7F1B"/>
+            <a:srgbClr val="6366F1"/>
           </a:solidFill>
           <a:ln>
             <a:noFill/>
@@ -3185,147 +3185,20 @@
       </p:sp>
       <p:sp>
         <p:nvSpPr>
-          <p:cNvPr id="4" name="TextBox 3"/>
-          <p:cNvSpPr txBox="1"/>
-          <p:nvPr/>
-        </p:nvSpPr>
-        <p:spPr>
-          <a:xfrm>
-            <a:off x="548640" y="1783080"/>
-            <a:ext cx="11064240" cy="322783"/>
+          <p:cNvPr id="4" name="Rectangle 3"/>
+          <p:cNvSpPr/>
+          <p:nvPr/>
+        </p:nvSpPr>
+        <p:spPr>
+          <a:xfrm>
+            <a:off x="0" y="4160520"/>
+            <a:ext cx="12191695" cy="27432"/>
           </a:xfrm>
           <a:prstGeom prst="rect">
             <a:avLst/>
           </a:prstGeom>
-          <a:noFill/>
-        </p:spPr>
-        <p:txBody>
-          <a:bodyPr wrap="square" lIns="0" rIns="0" tIns="0" bIns="0">
-            <a:spAutoFit/>
-          </a:bodyPr>
-          <a:lstStyle/>
-          <a:p>
-            <a:pPr algn="l"/>
-            <a:r>
-              <a:rPr sz="1500" b="1">
-                <a:solidFill>
-                  <a:srgbClr val="01ADEF"/>
-                </a:solidFill>
-                <a:latin typeface="Calibri"/>
-              </a:rPr>
-              <a:t>M.TECH MINI PROJECT</a:t>
-            </a:r>
-          </a:p>
-        </p:txBody>
-      </p:sp>
-      <p:sp>
-        <p:nvSpPr>
-          <p:cNvPr id="5" name="TextBox 4"/>
-          <p:cNvSpPr txBox="1"/>
-          <p:nvPr/>
-        </p:nvSpPr>
-        <p:spPr>
-          <a:xfrm>
-            <a:off x="548640" y="2148840"/>
-            <a:ext cx="11064240" cy="1417320"/>
-          </a:xfrm>
-          <a:prstGeom prst="rect">
-            <a:avLst/>
-          </a:prstGeom>
-          <a:noFill/>
-        </p:spPr>
-        <p:txBody>
-          <a:bodyPr wrap="square" lIns="0" rIns="0" tIns="0" bIns="0">
-            <a:spAutoFit/>
-          </a:bodyPr>
-          <a:lstStyle/>
-          <a:p>
-            <a:pPr algn="l">
-              <a:lnSpc>
-                <a:spcPct val="105000"/>
-              </a:lnSpc>
-            </a:pPr>
-            <a:r>
-              <a:rPr sz="3000" b="1">
-                <a:solidFill>
-                  <a:srgbClr val="FFFFFF"/>
-                </a:solidFill>
-                <a:latin typeface="Calibri"/>
-              </a:rPr>
-              <a:t>FinGenius AI - Smart Personal Finance Tracker</a:t>
-            </a:r>
-          </a:p>
-          <a:p>
-            <a:pPr algn="l">
-              <a:lnSpc>
-                <a:spcPct val="105000"/>
-              </a:lnSpc>
-            </a:pPr>
-            <a:r>
-              <a:rPr sz="3000" b="1">
-                <a:solidFill>
-                  <a:srgbClr val="FFFFFF"/>
-                </a:solidFill>
-                <a:latin typeface="Calibri"/>
-              </a:rPr>
-              <a:t>An AI Powered MERN Stack Application for Expense, Budget and Goal Management</a:t>
-            </a:r>
-          </a:p>
-        </p:txBody>
-      </p:sp>
-      <p:sp>
-        <p:nvSpPr>
-          <p:cNvPr id="6" name="TextBox 5"/>
-          <p:cNvSpPr txBox="1"/>
-          <p:nvPr/>
-        </p:nvSpPr>
-        <p:spPr>
-          <a:xfrm>
-            <a:off x="548640" y="3456432"/>
-            <a:ext cx="11064240" cy="457200"/>
-          </a:xfrm>
-          <a:prstGeom prst="rect">
-            <a:avLst/>
-          </a:prstGeom>
-          <a:noFill/>
-        </p:spPr>
-        <p:txBody>
-          <a:bodyPr wrap="square" lIns="0" rIns="0" tIns="0" bIns="0">
-            <a:spAutoFit/>
-          </a:bodyPr>
-          <a:lstStyle/>
-          <a:p>
-            <a:pPr algn="l"/>
-            <a:r>
-              <a:rPr sz="1600" b="0">
-                <a:solidFill>
-                  <a:srgbClr val="E6ECF9"/>
-                </a:solidFill>
-                <a:latin typeface="Calibri"/>
-              </a:rPr>
-              <a:t>Dashboard: Real-time Financial Overview with Gemini AI Chat Assistant</a:t>
-            </a:r>
-          </a:p>
-        </p:txBody>
-      </p:sp>
-      <p:sp>
-        <p:nvSpPr>
-          <p:cNvPr id="7" name="Rounded Rectangle 6"/>
-          <p:cNvSpPr/>
-          <p:nvPr/>
-        </p:nvSpPr>
-        <p:spPr>
-          <a:xfrm>
-            <a:off x="2194560" y="4617720"/>
-            <a:ext cx="7772400" cy="1783080"/>
-          </a:xfrm>
-          <a:prstGeom prst="roundRect">
-            <a:avLst>
-              <a:gd name="adj" fmla="val 6000"/>
-            </a:avLst>
-          </a:prstGeom>
           <a:solidFill>
-            <a:srgbClr val="F3F6FB"/>
+            <a:srgbClr val="22C55E"/>
           </a:solidFill>
           <a:ln>
             <a:noFill/>
@@ -3356,14 +3229,14 @@
       </p:sp>
       <p:sp>
         <p:nvSpPr>
-          <p:cNvPr id="8" name="TextBox 7"/>
+          <p:cNvPr id="5" name="TextBox 4"/>
           <p:cNvSpPr txBox="1"/>
           <p:nvPr/>
         </p:nvSpPr>
         <p:spPr>
           <a:xfrm>
-            <a:off x="2514600" y="4754880"/>
-            <a:ext cx="7132320" cy="365760"/>
+            <a:off x="548640" y="1554480"/>
+            <a:ext cx="11064240" cy="322783"/>
           </a:xfrm>
           <a:prstGeom prst="rect">
             <a:avLst/>
@@ -3378,27 +3251,27 @@
           <a:p>
             <a:pPr algn="l"/>
             <a:r>
-              <a:rPr sz="1200" b="1">
-                <a:solidFill>
-                  <a:srgbClr val="5A6273"/>
-                </a:solidFill>
-                <a:latin typeface="Calibri"/>
-              </a:rPr>
-              <a:t>Presented by</a:t>
-            </a:r>
-          </a:p>
-        </p:txBody>
-      </p:sp>
-      <p:sp>
-        <p:nvSpPr>
-          <p:cNvPr id="9" name="TextBox 8"/>
+              <a:rPr sz="1500" b="1">
+                <a:solidFill>
+                  <a:srgbClr val="F59E0B"/>
+                </a:solidFill>
+                <a:latin typeface="Calibri"/>
+              </a:rPr>
+              <a:t>M.TECH MINI PROJECT</a:t>
+            </a:r>
+          </a:p>
+        </p:txBody>
+      </p:sp>
+      <p:sp>
+        <p:nvSpPr>
+          <p:cNvPr id="6" name="TextBox 5"/>
           <p:cNvSpPr txBox="1"/>
           <p:nvPr/>
         </p:nvSpPr>
         <p:spPr>
           <a:xfrm>
-            <a:off x="2514600" y="5047488"/>
-            <a:ext cx="7132320" cy="384048"/>
+            <a:off x="548640" y="1920240"/>
+            <a:ext cx="11064240" cy="1417320"/>
           </a:xfrm>
           <a:prstGeom prst="rect">
             <a:avLst/>
@@ -3411,29 +3284,49 @@
           </a:bodyPr>
           <a:lstStyle/>
           <a:p>
-            <a:pPr algn="l"/>
-            <a:r>
-              <a:rPr sz="1900" b="1">
-                <a:solidFill>
-                  <a:srgbClr val="003092"/>
-                </a:solidFill>
-                <a:latin typeface="Calibri"/>
-              </a:rPr>
-              <a:t>[Student Name]  |  Reg. No. [Register Number]</a:t>
-            </a:r>
-          </a:p>
-        </p:txBody>
-      </p:sp>
-      <p:sp>
-        <p:nvSpPr>
-          <p:cNvPr id="10" name="TextBox 9"/>
+            <a:pPr algn="l">
+              <a:lnSpc>
+                <a:spcPct val="110000"/>
+              </a:lnSpc>
+            </a:pPr>
+            <a:r>
+              <a:rPr sz="4000" b="1">
+                <a:solidFill>
+                  <a:srgbClr val="F1F3FF"/>
+                </a:solidFill>
+                <a:latin typeface="Calibri"/>
+              </a:rPr>
+              <a:t>FinGenius AI</a:t>
+            </a:r>
+          </a:p>
+          <a:p>
+            <a:pPr algn="l">
+              <a:lnSpc>
+                <a:spcPct val="110000"/>
+              </a:lnSpc>
+            </a:pPr>
+            <a:r>
+              <a:rPr sz="2200" b="1">
+                <a:solidFill>
+                  <a:srgbClr val="C7CCF5"/>
+                </a:solidFill>
+                <a:latin typeface="Calibri"/>
+              </a:rPr>
+              <a:t>Smart Personal Finance Tracker Powered by Gemini AI</a:t>
+            </a:r>
+          </a:p>
+        </p:txBody>
+      </p:sp>
+      <p:sp>
+        <p:nvSpPr>
+          <p:cNvPr id="7" name="TextBox 6"/>
           <p:cNvSpPr txBox="1"/>
           <p:nvPr/>
         </p:nvSpPr>
         <p:spPr>
           <a:xfrm>
-            <a:off x="2514600" y="5468112"/>
-            <a:ext cx="7132320" cy="308152"/>
+            <a:off x="548640" y="3337560"/>
+            <a:ext cx="11064240" cy="457200"/>
           </a:xfrm>
           <a:prstGeom prst="rect">
             <a:avLst/>
@@ -3448,27 +3341,75 @@
           <a:p>
             <a:pPr algn="l"/>
             <a:r>
-              <a:rPr sz="1400" b="0">
-                <a:solidFill>
-                  <a:srgbClr val="202433"/>
-                </a:solidFill>
-                <a:latin typeface="Calibri"/>
-              </a:rPr>
-              <a:t>M.Tech, Computer Science Engineering</a:t>
-            </a:r>
-          </a:p>
-        </p:txBody>
-      </p:sp>
-      <p:sp>
-        <p:nvSpPr>
-          <p:cNvPr id="11" name="TextBox 10"/>
+              <a:rPr sz="1500" b="0">
+                <a:solidFill>
+                  <a:srgbClr val="9CA3C7"/>
+                </a:solidFill>
+                <a:latin typeface="Calibri"/>
+              </a:rPr>
+              <a:t>MERN Stack  •  Budgets  •  Goals  •  Analytics  •  AI Chat  •  Receipt OCR  •  Voice Entry</a:t>
+            </a:r>
+          </a:p>
+        </p:txBody>
+      </p:sp>
+      <p:sp>
+        <p:nvSpPr>
+          <p:cNvPr id="8" name="Rounded Rectangle 7"/>
+          <p:cNvSpPr/>
+          <p:nvPr/>
+        </p:nvSpPr>
+        <p:spPr>
+          <a:xfrm>
+            <a:off x="2194560" y="4617720"/>
+            <a:ext cx="7772400" cy="1783080"/>
+          </a:xfrm>
+          <a:prstGeom prst="roundRect">
+            <a:avLst>
+              <a:gd name="adj" fmla="val 5000"/>
+            </a:avLst>
+          </a:prstGeom>
+          <a:solidFill>
+            <a:srgbClr val="1A1D33"/>
+          </a:solidFill>
+          <a:ln w="12700">
+            <a:solidFill>
+              <a:srgbClr val="353A5C"/>
+            </a:solidFill>
+          </a:ln>
+          <a:effectLst/>
+        </p:spPr>
+        <p:style>
+          <a:lnRef idx="1">
+            <a:schemeClr val="accent1"/>
+          </a:lnRef>
+          <a:fillRef idx="3">
+            <a:schemeClr val="accent1"/>
+          </a:fillRef>
+          <a:effectRef idx="2">
+            <a:schemeClr val="accent1"/>
+          </a:effectRef>
+          <a:fontRef idx="minor">
+            <a:schemeClr val="lt1"/>
+          </a:fontRef>
+        </p:style>
+        <p:txBody>
+          <a:bodyPr rtlCol="0" anchor="ctr"/>
+          <a:lstStyle/>
+          <a:p>
+            <a:pPr algn="ctr"/>
+          </a:p>
+        </p:txBody>
+      </p:sp>
+      <p:sp>
+        <p:nvSpPr>
+          <p:cNvPr id="9" name="TextBox 8"/>
           <p:cNvSpPr txBox="1"/>
           <p:nvPr/>
         </p:nvSpPr>
         <p:spPr>
           <a:xfrm>
-            <a:off x="2514600" y="5760720"/>
-            <a:ext cx="7132320" cy="292608"/>
+            <a:off x="2514600" y="4754880"/>
+            <a:ext cx="7132320" cy="365760"/>
           </a:xfrm>
           <a:prstGeom prst="rect">
             <a:avLst/>
@@ -3483,27 +3424,27 @@
           <a:p>
             <a:pPr algn="l"/>
             <a:r>
-              <a:rPr sz="1300" b="0">
-                <a:solidFill>
-                  <a:srgbClr val="5A6273"/>
-                </a:solidFill>
-                <a:latin typeface="Calibri"/>
-              </a:rPr>
-              <a:t>Department of Computer Science and Engineering</a:t>
-            </a:r>
-          </a:p>
-        </p:txBody>
-      </p:sp>
-      <p:sp>
-        <p:nvSpPr>
-          <p:cNvPr id="12" name="TextBox 11"/>
+              <a:rPr sz="1200" b="1">
+                <a:solidFill>
+                  <a:srgbClr val="F59E0B"/>
+                </a:solidFill>
+                <a:latin typeface="Calibri"/>
+              </a:rPr>
+              <a:t>Presented by</a:t>
+            </a:r>
+          </a:p>
+        </p:txBody>
+      </p:sp>
+      <p:sp>
+        <p:nvSpPr>
+          <p:cNvPr id="10" name="TextBox 9"/>
           <p:cNvSpPr txBox="1"/>
           <p:nvPr/>
         </p:nvSpPr>
         <p:spPr>
           <a:xfrm>
-            <a:off x="2514600" y="6035040"/>
-            <a:ext cx="7132320" cy="310896"/>
+            <a:off x="2514600" y="5047488"/>
+            <a:ext cx="7132320" cy="384048"/>
           </a:xfrm>
           <a:prstGeom prst="rect">
             <a:avLst/>
@@ -3518,9 +3459,114 @@
           <a:p>
             <a:pPr algn="l"/>
             <a:r>
+              <a:rPr sz="1900" b="1">
+                <a:solidFill>
+                  <a:srgbClr val="F1F3FF"/>
+                </a:solidFill>
+                <a:latin typeface="Calibri"/>
+              </a:rPr>
+              <a:t>[Student Name]  |  Reg. No. [Register Number]</a:t>
+            </a:r>
+          </a:p>
+        </p:txBody>
+      </p:sp>
+      <p:sp>
+        <p:nvSpPr>
+          <p:cNvPr id="11" name="TextBox 10"/>
+          <p:cNvSpPr txBox="1"/>
+          <p:nvPr/>
+        </p:nvSpPr>
+        <p:spPr>
+          <a:xfrm>
+            <a:off x="2514600" y="5468112"/>
+            <a:ext cx="7132320" cy="308152"/>
+          </a:xfrm>
+          <a:prstGeom prst="rect">
+            <a:avLst/>
+          </a:prstGeom>
+          <a:noFill/>
+        </p:spPr>
+        <p:txBody>
+          <a:bodyPr wrap="square" lIns="0" rIns="0" tIns="0" bIns="0">
+            <a:spAutoFit/>
+          </a:bodyPr>
+          <a:lstStyle/>
+          <a:p>
+            <a:pPr algn="l"/>
+            <a:r>
+              <a:rPr sz="1400" b="0">
+                <a:solidFill>
+                  <a:srgbClr val="9CA3C7"/>
+                </a:solidFill>
+                <a:latin typeface="Calibri"/>
+              </a:rPr>
+              <a:t>M.Tech, Computer Science Engineering</a:t>
+            </a:r>
+          </a:p>
+        </p:txBody>
+      </p:sp>
+      <p:sp>
+        <p:nvSpPr>
+          <p:cNvPr id="12" name="TextBox 11"/>
+          <p:cNvSpPr txBox="1"/>
+          <p:nvPr/>
+        </p:nvSpPr>
+        <p:spPr>
+          <a:xfrm>
+            <a:off x="2514600" y="5760720"/>
+            <a:ext cx="7132320" cy="292608"/>
+          </a:xfrm>
+          <a:prstGeom prst="rect">
+            <a:avLst/>
+          </a:prstGeom>
+          <a:noFill/>
+        </p:spPr>
+        <p:txBody>
+          <a:bodyPr wrap="square" lIns="0" rIns="0" tIns="0" bIns="0">
+            <a:spAutoFit/>
+          </a:bodyPr>
+          <a:lstStyle/>
+          <a:p>
+            <a:pPr algn="l"/>
+            <a:r>
               <a:rPr sz="1300" b="0">
                 <a:solidFill>
-                  <a:srgbClr val="5A6273"/>
+                  <a:srgbClr val="9CA3C7"/>
+                </a:solidFill>
+                <a:latin typeface="Calibri"/>
+              </a:rPr>
+              <a:t>Department of Computer Science and Engineering</a:t>
+            </a:r>
+          </a:p>
+        </p:txBody>
+      </p:sp>
+      <p:sp>
+        <p:nvSpPr>
+          <p:cNvPr id="13" name="TextBox 12"/>
+          <p:cNvSpPr txBox="1"/>
+          <p:nvPr/>
+        </p:nvSpPr>
+        <p:spPr>
+          <a:xfrm>
+            <a:off x="2514600" y="6035040"/>
+            <a:ext cx="7132320" cy="310896"/>
+          </a:xfrm>
+          <a:prstGeom prst="rect">
+            <a:avLst/>
+          </a:prstGeom>
+          <a:noFill/>
+        </p:spPr>
+        <p:txBody>
+          <a:bodyPr wrap="square" lIns="0" rIns="0" tIns="0" bIns="0">
+            <a:spAutoFit/>
+          </a:bodyPr>
+          <a:lstStyle/>
+          <a:p>
+            <a:pPr algn="l"/>
+            <a:r>
+              <a:rPr sz="1300" b="0">
+                <a:solidFill>
+                  <a:srgbClr val="9CA3C7"/>
                 </a:solidFill>
                 <a:latin typeface="Calibri"/>
               </a:rPr>
@@ -3556,13 +3602,13 @@
         <p:spPr>
           <a:xfrm>
             <a:off x="0" y="0"/>
-            <a:ext cx="12191695" cy="1051560"/>
+            <a:ext cx="12191695" cy="6858000"/>
           </a:xfrm>
           <a:prstGeom prst="rect">
             <a:avLst/>
           </a:prstGeom>
           <a:solidFill>
-            <a:srgbClr val="003092"/>
+            <a:srgbClr val="0F1120"/>
           </a:solidFill>
           <a:ln>
             <a:noFill/>
@@ -3599,14 +3645,14 @@
         </p:nvSpPr>
         <p:spPr>
           <a:xfrm>
-            <a:off x="0" y="1051560"/>
-            <a:ext cx="12191695" cy="40233"/>
+            <a:off x="0" y="0"/>
+            <a:ext cx="12191695" cy="82296"/>
           </a:xfrm>
           <a:prstGeom prst="rect">
             <a:avLst/>
           </a:prstGeom>
           <a:solidFill>
-            <a:srgbClr val="EF7F1B"/>
+            <a:srgbClr val="6366F1"/>
           </a:solidFill>
           <a:ln>
             <a:noFill/>
@@ -3643,7 +3689,7 @@
         </p:nvSpPr>
         <p:spPr>
           <a:xfrm>
-            <a:off x="502920" y="118872"/>
+            <a:off x="502920" y="320040"/>
             <a:ext cx="8686800" cy="292608"/>
           </a:xfrm>
           <a:prstGeom prst="rect">
@@ -3661,7 +3707,7 @@
             <a:r>
               <a:rPr sz="1250" b="1">
                 <a:solidFill>
-                  <a:srgbClr val="01ADEF"/>
+                  <a:srgbClr val="6366F1"/>
                 </a:solidFill>
                 <a:latin typeface="Calibri"/>
               </a:rPr>
@@ -3678,8 +3724,8 @@
         </p:nvSpPr>
         <p:spPr>
           <a:xfrm>
-            <a:off x="502920" y="384048"/>
-            <a:ext cx="8778240" cy="621792"/>
+            <a:off x="502920" y="603504"/>
+            <a:ext cx="8778240" cy="548640"/>
           </a:xfrm>
           <a:prstGeom prst="rect">
             <a:avLst/>
@@ -3694,9 +3740,9 @@
           <a:p>
             <a:pPr algn="l"/>
             <a:r>
-              <a:rPr sz="2500" b="1">
-                <a:solidFill>
-                  <a:srgbClr val="FFFFFF"/>
+              <a:rPr sz="2400" b="1">
+                <a:solidFill>
+                  <a:srgbClr val="F1F3FF"/>
                 </a:solidFill>
                 <a:latin typeface="Calibri"/>
               </a:rPr>
@@ -3713,14 +3759,14 @@
         </p:nvSpPr>
         <p:spPr>
           <a:xfrm>
-            <a:off x="0" y="6547104"/>
-            <a:ext cx="12191695" cy="310896"/>
+            <a:off x="0" y="1261872"/>
+            <a:ext cx="12191695" cy="18288"/>
           </a:xfrm>
           <a:prstGeom prst="rect">
             <a:avLst/>
           </a:prstGeom>
           <a:solidFill>
-            <a:srgbClr val="001E5C"/>
+            <a:srgbClr val="353A5C"/>
           </a:solidFill>
           <a:ln>
             <a:noFill/>
@@ -3751,92 +3797,20 @@
       </p:sp>
       <p:sp>
         <p:nvSpPr>
-          <p:cNvPr id="7" name="TextBox 6"/>
-          <p:cNvSpPr txBox="1"/>
-          <p:nvPr/>
-        </p:nvSpPr>
-        <p:spPr>
-          <a:xfrm>
-            <a:off x="411480" y="6547104"/>
-            <a:ext cx="8686800" cy="238658"/>
+          <p:cNvPr id="7" name="Rectangle 6"/>
+          <p:cNvSpPr/>
+          <p:nvPr/>
+        </p:nvSpPr>
+        <p:spPr>
+          <a:xfrm>
+            <a:off x="0" y="6547104"/>
+            <a:ext cx="12191695" cy="310896"/>
           </a:xfrm>
           <a:prstGeom prst="rect">
             <a:avLst/>
           </a:prstGeom>
-          <a:noFill/>
-        </p:spPr>
-        <p:txBody>
-          <a:bodyPr wrap="square" lIns="0" rIns="0" tIns="0" bIns="0">
-            <a:spAutoFit/>
-          </a:bodyPr>
-          <a:lstStyle/>
-          <a:p>
-            <a:pPr algn="l"/>
-            <a:r>
-              <a:rPr sz="950" b="0">
-                <a:solidFill>
-                  <a:srgbClr val="C9D6EE"/>
-                </a:solidFill>
-                <a:latin typeface="Calibri"/>
-              </a:rPr>
-              <a:t>M.Tech Mini Project  |  [Student Name]  |  [College Name]</a:t>
-            </a:r>
-          </a:p>
-        </p:txBody>
-      </p:sp>
-      <p:sp>
-        <p:nvSpPr>
-          <p:cNvPr id="8" name="TextBox 7"/>
-          <p:cNvSpPr txBox="1"/>
-          <p:nvPr/>
-        </p:nvSpPr>
-        <p:spPr>
-          <a:xfrm>
-            <a:off x="11094415" y="6547104"/>
-            <a:ext cx="685800" cy="310896"/>
-          </a:xfrm>
-          <a:prstGeom prst="rect">
-            <a:avLst/>
-          </a:prstGeom>
-          <a:noFill/>
-        </p:spPr>
-        <p:txBody>
-          <a:bodyPr wrap="square" lIns="0" rIns="0" tIns="0" bIns="0">
-            <a:spAutoFit/>
-          </a:bodyPr>
-          <a:lstStyle/>
-          <a:p>
-            <a:pPr algn="r"/>
-            <a:r>
-              <a:rPr sz="950" b="1">
-                <a:solidFill>
-                  <a:srgbClr val="FFFFFF"/>
-                </a:solidFill>
-                <a:latin typeface="Calibri"/>
-              </a:rPr>
-              <a:t>1</a:t>
-            </a:r>
-          </a:p>
-        </p:txBody>
-      </p:sp>
-      <p:sp>
-        <p:nvSpPr>
-          <p:cNvPr id="9" name="Rounded Rectangle 8"/>
-          <p:cNvSpPr/>
-          <p:nvPr/>
-        </p:nvSpPr>
-        <p:spPr>
-          <a:xfrm>
-            <a:off x="502920" y="1325880"/>
-            <a:ext cx="5623560" cy="4892040"/>
-          </a:xfrm>
-          <a:prstGeom prst="roundRect">
-            <a:avLst>
-              <a:gd name="adj" fmla="val 6000"/>
-            </a:avLst>
-          </a:prstGeom>
           <a:solidFill>
-            <a:srgbClr val="F3F6FB"/>
+            <a:srgbClr val="090A16"/>
           </a:solidFill>
           <a:ln>
             <a:noFill/>
@@ -3867,14 +3841,14 @@
       </p:sp>
       <p:sp>
         <p:nvSpPr>
-          <p:cNvPr id="10" name="TextBox 9"/>
+          <p:cNvPr id="8" name="TextBox 7"/>
           <p:cNvSpPr txBox="1"/>
           <p:nvPr/>
         </p:nvSpPr>
         <p:spPr>
           <a:xfrm>
-            <a:off x="777240" y="1481328"/>
-            <a:ext cx="5120640" cy="365760"/>
+            <a:off x="411480" y="6547104"/>
+            <a:ext cx="8686800" cy="238658"/>
           </a:xfrm>
           <a:prstGeom prst="rect">
             <a:avLst/>
@@ -3889,14 +3863,97 @@
           <a:p>
             <a:pPr algn="l"/>
             <a:r>
-              <a:rPr sz="1700" b="1">
-                <a:solidFill>
-                  <a:srgbClr val="003092"/>
-                </a:solidFill>
-                <a:latin typeface="Calibri"/>
-              </a:rPr>
-              <a:t>The Problem</a:t>
-            </a:r>
+              <a:rPr sz="950" b="0">
+                <a:solidFill>
+                  <a:srgbClr val="9CA3C7"/>
+                </a:solidFill>
+                <a:latin typeface="Calibri"/>
+              </a:rPr>
+              <a:t>FinGenius AI  •  M.Tech Mini Project  •  [Student Name]  •  [College Name]</a:t>
+            </a:r>
+          </a:p>
+        </p:txBody>
+      </p:sp>
+      <p:sp>
+        <p:nvSpPr>
+          <p:cNvPr id="9" name="TextBox 8"/>
+          <p:cNvSpPr txBox="1"/>
+          <p:nvPr/>
+        </p:nvSpPr>
+        <p:spPr>
+          <a:xfrm>
+            <a:off x="11094415" y="6547104"/>
+            <a:ext cx="685800" cy="310896"/>
+          </a:xfrm>
+          <a:prstGeom prst="rect">
+            <a:avLst/>
+          </a:prstGeom>
+          <a:noFill/>
+        </p:spPr>
+        <p:txBody>
+          <a:bodyPr wrap="square" lIns="0" rIns="0" tIns="0" bIns="0">
+            <a:spAutoFit/>
+          </a:bodyPr>
+          <a:lstStyle/>
+          <a:p>
+            <a:pPr algn="r"/>
+            <a:r>
+              <a:rPr sz="950" b="1">
+                <a:solidFill>
+                  <a:srgbClr val="6366F1"/>
+                </a:solidFill>
+                <a:latin typeface="Calibri"/>
+              </a:rPr>
+              <a:t>1</a:t>
+            </a:r>
+          </a:p>
+        </p:txBody>
+      </p:sp>
+      <p:sp>
+        <p:nvSpPr>
+          <p:cNvPr id="10" name="Rounded Rectangle 9"/>
+          <p:cNvSpPr/>
+          <p:nvPr/>
+        </p:nvSpPr>
+        <p:spPr>
+          <a:xfrm>
+            <a:off x="502920" y="1417320"/>
+            <a:ext cx="5623560" cy="4800600"/>
+          </a:xfrm>
+          <a:prstGeom prst="roundRect">
+            <a:avLst>
+              <a:gd name="adj" fmla="val 5000"/>
+            </a:avLst>
+          </a:prstGeom>
+          <a:solidFill>
+            <a:srgbClr val="1A1D33"/>
+          </a:solidFill>
+          <a:ln w="12700">
+            <a:solidFill>
+              <a:srgbClr val="353A5C"/>
+            </a:solidFill>
+          </a:ln>
+          <a:effectLst/>
+        </p:spPr>
+        <p:style>
+          <a:lnRef idx="1">
+            <a:schemeClr val="accent1"/>
+          </a:lnRef>
+          <a:fillRef idx="3">
+            <a:schemeClr val="accent1"/>
+          </a:fillRef>
+          <a:effectRef idx="2">
+            <a:schemeClr val="accent1"/>
+          </a:effectRef>
+          <a:fontRef idx="minor">
+            <a:schemeClr val="lt1"/>
+          </a:fontRef>
+        </p:style>
+        <p:txBody>
+          <a:bodyPr rtlCol="0" anchor="ctr"/>
+          <a:lstStyle/>
+          <a:p>
+            <a:pPr algn="ctr"/>
           </a:p>
         </p:txBody>
       </p:sp>
@@ -3908,7 +3965,42 @@
         </p:nvSpPr>
         <p:spPr>
           <a:xfrm>
-            <a:off x="777240" y="1920240"/>
+            <a:off x="777240" y="1572768"/>
+            <a:ext cx="5120640" cy="365760"/>
+          </a:xfrm>
+          <a:prstGeom prst="rect">
+            <a:avLst/>
+          </a:prstGeom>
+          <a:noFill/>
+        </p:spPr>
+        <p:txBody>
+          <a:bodyPr wrap="square" lIns="0" rIns="0" tIns="0" bIns="0">
+            <a:spAutoFit/>
+          </a:bodyPr>
+          <a:lstStyle/>
+          <a:p>
+            <a:pPr algn="l"/>
+            <a:r>
+              <a:rPr sz="1700" b="1">
+                <a:solidFill>
+                  <a:srgbClr val="F59E0B"/>
+                </a:solidFill>
+                <a:latin typeface="Calibri"/>
+              </a:rPr>
+              <a:t>The Problem</a:t>
+            </a:r>
+          </a:p>
+        </p:txBody>
+      </p:sp>
+      <p:sp>
+        <p:nvSpPr>
+          <p:cNvPr id="12" name="TextBox 11"/>
+          <p:cNvSpPr txBox="1"/>
+          <p:nvPr/>
+        </p:nvSpPr>
+        <p:spPr>
+          <a:xfrm>
+            <a:off x="777240" y="2011680"/>
             <a:ext cx="5120640" cy="4114800"/>
           </a:xfrm>
           <a:prstGeom prst="rect">
@@ -3930,7 +4022,7 @@
             <a:r>
               <a:rPr sz="1300" b="1">
                 <a:solidFill>
-                  <a:srgbClr val="003092"/>
+                  <a:srgbClr val="F59E0B"/>
                 </a:solidFill>
                 <a:latin typeface="Calibri"/>
               </a:rPr>
@@ -3939,7 +4031,7 @@
             <a:r>
               <a:rPr sz="1300" b="1">
                 <a:solidFill>
-                  <a:srgbClr val="202433"/>
+                  <a:srgbClr val="F1F3FF"/>
                 </a:solidFill>
                 <a:latin typeface="Calibri"/>
               </a:rPr>
@@ -3948,7 +4040,7 @@
             <a:r>
               <a:rPr sz="1300" b="0">
                 <a:solidFill>
-                  <a:srgbClr val="202433"/>
+                  <a:srgbClr val="9CA3C7"/>
                 </a:solidFill>
                 <a:latin typeface="Calibri"/>
               </a:rPr>
@@ -3964,7 +4056,7 @@
             <a:r>
               <a:rPr sz="1300" b="1">
                 <a:solidFill>
-                  <a:srgbClr val="003092"/>
+                  <a:srgbClr val="F59E0B"/>
                 </a:solidFill>
                 <a:latin typeface="Calibri"/>
               </a:rPr>
@@ -3973,7 +4065,7 @@
             <a:r>
               <a:rPr sz="1300" b="1">
                 <a:solidFill>
-                  <a:srgbClr val="202433"/>
+                  <a:srgbClr val="F1F3FF"/>
                 </a:solidFill>
                 <a:latin typeface="Calibri"/>
               </a:rPr>
@@ -3982,7 +4074,7 @@
             <a:r>
               <a:rPr sz="1300" b="0">
                 <a:solidFill>
-                  <a:srgbClr val="202433"/>
+                  <a:srgbClr val="9CA3C7"/>
                 </a:solidFill>
                 <a:latin typeface="Calibri"/>
               </a:rPr>
@@ -3998,7 +4090,7 @@
             <a:r>
               <a:rPr sz="1300" b="1">
                 <a:solidFill>
-                  <a:srgbClr val="003092"/>
+                  <a:srgbClr val="F59E0B"/>
                 </a:solidFill>
                 <a:latin typeface="Calibri"/>
               </a:rPr>
@@ -4007,7 +4099,7 @@
             <a:r>
               <a:rPr sz="1300" b="1">
                 <a:solidFill>
-                  <a:srgbClr val="202433"/>
+                  <a:srgbClr val="F1F3FF"/>
                 </a:solidFill>
                 <a:latin typeface="Calibri"/>
               </a:rPr>
@@ -4016,7 +4108,7 @@
             <a:r>
               <a:rPr sz="1300" b="0">
                 <a:solidFill>
-                  <a:srgbClr val="202433"/>
+                  <a:srgbClr val="9CA3C7"/>
                 </a:solidFill>
                 <a:latin typeface="Calibri"/>
               </a:rPr>
@@ -4032,7 +4124,7 @@
             <a:r>
               <a:rPr sz="1300" b="1">
                 <a:solidFill>
-                  <a:srgbClr val="003092"/>
+                  <a:srgbClr val="F59E0B"/>
                 </a:solidFill>
                 <a:latin typeface="Calibri"/>
               </a:rPr>
@@ -4041,7 +4133,7 @@
             <a:r>
               <a:rPr sz="1300" b="1">
                 <a:solidFill>
-                  <a:srgbClr val="202433"/>
+                  <a:srgbClr val="F1F3FF"/>
                 </a:solidFill>
                 <a:latin typeface="Calibri"/>
               </a:rPr>
@@ -4050,7 +4142,7 @@
             <a:r>
               <a:rPr sz="1300" b="0">
                 <a:solidFill>
-                  <a:srgbClr val="202433"/>
+                  <a:srgbClr val="9CA3C7"/>
                 </a:solidFill>
                 <a:latin typeface="Calibri"/>
               </a:rPr>
@@ -4066,7 +4158,7 @@
             <a:r>
               <a:rPr sz="1300" b="1">
                 <a:solidFill>
-                  <a:srgbClr val="003092"/>
+                  <a:srgbClr val="F59E0B"/>
                 </a:solidFill>
                 <a:latin typeface="Calibri"/>
               </a:rPr>
@@ -4075,7 +4167,7 @@
             <a:r>
               <a:rPr sz="1300" b="1">
                 <a:solidFill>
-                  <a:srgbClr val="202433"/>
+                  <a:srgbClr val="F1F3FF"/>
                 </a:solidFill>
                 <a:latin typeface="Calibri"/>
               </a:rPr>
@@ -4084,7 +4176,7 @@
             <a:r>
               <a:rPr sz="1300" b="0">
                 <a:solidFill>
-                  <a:srgbClr val="202433"/>
+                  <a:srgbClr val="9CA3C7"/>
                 </a:solidFill>
                 <a:latin typeface="Calibri"/>
               </a:rPr>
@@ -4095,25 +4187,27 @@
       </p:sp>
       <p:sp>
         <p:nvSpPr>
-          <p:cNvPr id="12" name="Rounded Rectangle 11"/>
+          <p:cNvPr id="13" name="Rounded Rectangle 12"/>
           <p:cNvSpPr/>
           <p:nvPr/>
         </p:nvSpPr>
         <p:spPr>
           <a:xfrm>
-            <a:off x="6309360" y="1325880"/>
-            <a:ext cx="5394960" cy="4892040"/>
+            <a:off x="6309360" y="1417320"/>
+            <a:ext cx="5394960" cy="4800600"/>
           </a:xfrm>
           <a:prstGeom prst="roundRect">
             <a:avLst>
-              <a:gd name="adj" fmla="val 6000"/>
+              <a:gd name="adj" fmla="val 5000"/>
             </a:avLst>
           </a:prstGeom>
           <a:solidFill>
-            <a:srgbClr val="EEF4FC"/>
+            <a:srgbClr val="1A1D33"/>
           </a:solidFill>
-          <a:ln>
-            <a:noFill/>
+          <a:ln w="12700">
+            <a:solidFill>
+              <a:srgbClr val="353A5C"/>
+            </a:solidFill>
           </a:ln>
           <a:effectLst/>
         </p:spPr>
@@ -4141,13 +4235,13 @@
       </p:sp>
       <p:sp>
         <p:nvSpPr>
-          <p:cNvPr id="13" name="TextBox 12"/>
+          <p:cNvPr id="14" name="TextBox 13"/>
           <p:cNvSpPr txBox="1"/>
           <p:nvPr/>
         </p:nvSpPr>
         <p:spPr>
           <a:xfrm>
-            <a:off x="6583680" y="1481328"/>
+            <a:off x="6583680" y="1572768"/>
             <a:ext cx="4846320" cy="365760"/>
           </a:xfrm>
           <a:prstGeom prst="rect">
@@ -4165,7 +4259,7 @@
             <a:r>
               <a:rPr sz="1700" b="1">
                 <a:solidFill>
-                  <a:srgbClr val="003092"/>
+                  <a:srgbClr val="22C55E"/>
                 </a:solidFill>
                 <a:latin typeface="Calibri"/>
               </a:rPr>
@@ -4176,13 +4270,13 @@
       </p:sp>
       <p:sp>
         <p:nvSpPr>
-          <p:cNvPr id="14" name="TextBox 13"/>
+          <p:cNvPr id="15" name="TextBox 14"/>
           <p:cNvSpPr txBox="1"/>
           <p:nvPr/>
         </p:nvSpPr>
         <p:spPr>
           <a:xfrm>
-            <a:off x="6583680" y="1920240"/>
+            <a:off x="6583680" y="2011680"/>
             <a:ext cx="4892040" cy="4114800"/>
           </a:xfrm>
           <a:prstGeom prst="rect">
@@ -4204,7 +4298,7 @@
             <a:r>
               <a:rPr sz="1300" b="1">
                 <a:solidFill>
-                  <a:srgbClr val="01ADEF"/>
+                  <a:srgbClr val="22C55E"/>
                 </a:solidFill>
                 <a:latin typeface="Calibri"/>
               </a:rPr>
@@ -4213,7 +4307,7 @@
             <a:r>
               <a:rPr sz="1300" b="1">
                 <a:solidFill>
-                  <a:srgbClr val="202433"/>
+                  <a:srgbClr val="F1F3FF"/>
                 </a:solidFill>
                 <a:latin typeface="Calibri"/>
               </a:rPr>
@@ -4222,7 +4316,7 @@
             <a:r>
               <a:rPr sz="1300" b="0">
                 <a:solidFill>
-                  <a:srgbClr val="202433"/>
+                  <a:srgbClr val="9CA3C7"/>
                 </a:solidFill>
                 <a:latin typeface="Calibri"/>
               </a:rPr>
@@ -4238,7 +4332,7 @@
             <a:r>
               <a:rPr sz="1300" b="1">
                 <a:solidFill>
-                  <a:srgbClr val="01ADEF"/>
+                  <a:srgbClr val="22C55E"/>
                 </a:solidFill>
                 <a:latin typeface="Calibri"/>
               </a:rPr>
@@ -4247,7 +4341,7 @@
             <a:r>
               <a:rPr sz="1300" b="1">
                 <a:solidFill>
-                  <a:srgbClr val="202433"/>
+                  <a:srgbClr val="F1F3FF"/>
                 </a:solidFill>
                 <a:latin typeface="Calibri"/>
               </a:rPr>
@@ -4256,7 +4350,7 @@
             <a:r>
               <a:rPr sz="1300" b="0">
                 <a:solidFill>
-                  <a:srgbClr val="202433"/>
+                  <a:srgbClr val="9CA3C7"/>
                 </a:solidFill>
                 <a:latin typeface="Calibri"/>
               </a:rPr>
@@ -4272,7 +4366,7 @@
             <a:r>
               <a:rPr sz="1300" b="1">
                 <a:solidFill>
-                  <a:srgbClr val="01ADEF"/>
+                  <a:srgbClr val="22C55E"/>
                 </a:solidFill>
                 <a:latin typeface="Calibri"/>
               </a:rPr>
@@ -4281,7 +4375,7 @@
             <a:r>
               <a:rPr sz="1300" b="1">
                 <a:solidFill>
-                  <a:srgbClr val="202433"/>
+                  <a:srgbClr val="F1F3FF"/>
                 </a:solidFill>
                 <a:latin typeface="Calibri"/>
               </a:rPr>
@@ -4290,7 +4384,7 @@
             <a:r>
               <a:rPr sz="1300" b="0">
                 <a:solidFill>
-                  <a:srgbClr val="202433"/>
+                  <a:srgbClr val="9CA3C7"/>
                 </a:solidFill>
                 <a:latin typeface="Calibri"/>
               </a:rPr>
@@ -4306,7 +4400,7 @@
             <a:r>
               <a:rPr sz="1300" b="1">
                 <a:solidFill>
-                  <a:srgbClr val="01ADEF"/>
+                  <a:srgbClr val="22C55E"/>
                 </a:solidFill>
                 <a:latin typeface="Calibri"/>
               </a:rPr>
@@ -4315,7 +4409,7 @@
             <a:r>
               <a:rPr sz="1300" b="1">
                 <a:solidFill>
-                  <a:srgbClr val="202433"/>
+                  <a:srgbClr val="F1F3FF"/>
                 </a:solidFill>
                 <a:latin typeface="Calibri"/>
               </a:rPr>
@@ -4324,7 +4418,7 @@
             <a:r>
               <a:rPr sz="1300" b="0">
                 <a:solidFill>
-                  <a:srgbClr val="202433"/>
+                  <a:srgbClr val="9CA3C7"/>
                 </a:solidFill>
                 <a:latin typeface="Calibri"/>
               </a:rPr>
@@ -4340,7 +4434,7 @@
             <a:r>
               <a:rPr sz="1300" b="1">
                 <a:solidFill>
-                  <a:srgbClr val="01ADEF"/>
+                  <a:srgbClr val="22C55E"/>
                 </a:solidFill>
                 <a:latin typeface="Calibri"/>
               </a:rPr>
@@ -4349,7 +4443,7 @@
             <a:r>
               <a:rPr sz="1300" b="1">
                 <a:solidFill>
-                  <a:srgbClr val="202433"/>
+                  <a:srgbClr val="F1F3FF"/>
                 </a:solidFill>
                 <a:latin typeface="Calibri"/>
               </a:rPr>
@@ -4358,7 +4452,7 @@
             <a:r>
               <a:rPr sz="1300" b="0">
                 <a:solidFill>
-                  <a:srgbClr val="202433"/>
+                  <a:srgbClr val="9CA3C7"/>
                 </a:solidFill>
                 <a:latin typeface="Calibri"/>
               </a:rPr>
@@ -4394,13 +4488,13 @@
         <p:spPr>
           <a:xfrm>
             <a:off x="0" y="0"/>
-            <a:ext cx="12191695" cy="1051560"/>
+            <a:ext cx="12191695" cy="6858000"/>
           </a:xfrm>
           <a:prstGeom prst="rect">
             <a:avLst/>
           </a:prstGeom>
           <a:solidFill>
-            <a:srgbClr val="003092"/>
+            <a:srgbClr val="0F1120"/>
           </a:solidFill>
           <a:ln>
             <a:noFill/>
@@ -4437,14 +4531,14 @@
         </p:nvSpPr>
         <p:spPr>
           <a:xfrm>
-            <a:off x="0" y="1051560"/>
-            <a:ext cx="12191695" cy="40233"/>
+            <a:off x="0" y="0"/>
+            <a:ext cx="12191695" cy="82296"/>
           </a:xfrm>
           <a:prstGeom prst="rect">
             <a:avLst/>
           </a:prstGeom>
           <a:solidFill>
-            <a:srgbClr val="EF7F1B"/>
+            <a:srgbClr val="22C55E"/>
           </a:solidFill>
           <a:ln>
             <a:noFill/>
@@ -4481,7 +4575,7 @@
         </p:nvSpPr>
         <p:spPr>
           <a:xfrm>
-            <a:off x="502920" y="118872"/>
+            <a:off x="502920" y="320040"/>
             <a:ext cx="8686800" cy="292608"/>
           </a:xfrm>
           <a:prstGeom prst="rect">
@@ -4499,7 +4593,7 @@
             <a:r>
               <a:rPr sz="1250" b="1">
                 <a:solidFill>
-                  <a:srgbClr val="01ADEF"/>
+                  <a:srgbClr val="22C55E"/>
                 </a:solidFill>
                 <a:latin typeface="Calibri"/>
               </a:rPr>
@@ -4516,8 +4610,8 @@
         </p:nvSpPr>
         <p:spPr>
           <a:xfrm>
-            <a:off x="502920" y="384048"/>
-            <a:ext cx="8778240" cy="621792"/>
+            <a:off x="502920" y="603504"/>
+            <a:ext cx="8778240" cy="548640"/>
           </a:xfrm>
           <a:prstGeom prst="rect">
             <a:avLst/>
@@ -4532,9 +4626,9 @@
           <a:p>
             <a:pPr algn="l"/>
             <a:r>
-              <a:rPr sz="2500" b="1">
-                <a:solidFill>
-                  <a:srgbClr val="FFFFFF"/>
+              <a:rPr sz="2400" b="1">
+                <a:solidFill>
+                  <a:srgbClr val="F1F3FF"/>
                 </a:solidFill>
                 <a:latin typeface="Calibri"/>
               </a:rPr>
@@ -4551,14 +4645,14 @@
         </p:nvSpPr>
         <p:spPr>
           <a:xfrm>
-            <a:off x="0" y="6547104"/>
-            <a:ext cx="12191695" cy="310896"/>
+            <a:off x="0" y="1261872"/>
+            <a:ext cx="12191695" cy="18288"/>
           </a:xfrm>
           <a:prstGeom prst="rect">
             <a:avLst/>
           </a:prstGeom>
           <a:solidFill>
-            <a:srgbClr val="001E5C"/>
+            <a:srgbClr val="353A5C"/>
           </a:solidFill>
           <a:ln>
             <a:noFill/>
@@ -4589,92 +4683,20 @@
       </p:sp>
       <p:sp>
         <p:nvSpPr>
-          <p:cNvPr id="7" name="TextBox 6"/>
-          <p:cNvSpPr txBox="1"/>
-          <p:nvPr/>
-        </p:nvSpPr>
-        <p:spPr>
-          <a:xfrm>
-            <a:off x="411480" y="6547104"/>
-            <a:ext cx="8686800" cy="238658"/>
+          <p:cNvPr id="7" name="Rectangle 6"/>
+          <p:cNvSpPr/>
+          <p:nvPr/>
+        </p:nvSpPr>
+        <p:spPr>
+          <a:xfrm>
+            <a:off x="0" y="6547104"/>
+            <a:ext cx="12191695" cy="310896"/>
           </a:xfrm>
           <a:prstGeom prst="rect">
             <a:avLst/>
           </a:prstGeom>
-          <a:noFill/>
-        </p:spPr>
-        <p:txBody>
-          <a:bodyPr wrap="square" lIns="0" rIns="0" tIns="0" bIns="0">
-            <a:spAutoFit/>
-          </a:bodyPr>
-          <a:lstStyle/>
-          <a:p>
-            <a:pPr algn="l"/>
-            <a:r>
-              <a:rPr sz="950" b="0">
-                <a:solidFill>
-                  <a:srgbClr val="C9D6EE"/>
-                </a:solidFill>
-                <a:latin typeface="Calibri"/>
-              </a:rPr>
-              <a:t>M.Tech Mini Project  |  [Student Name]  |  [College Name]</a:t>
-            </a:r>
-          </a:p>
-        </p:txBody>
-      </p:sp>
-      <p:sp>
-        <p:nvSpPr>
-          <p:cNvPr id="8" name="TextBox 7"/>
-          <p:cNvSpPr txBox="1"/>
-          <p:nvPr/>
-        </p:nvSpPr>
-        <p:spPr>
-          <a:xfrm>
-            <a:off x="11094415" y="6547104"/>
-            <a:ext cx="685800" cy="310896"/>
-          </a:xfrm>
-          <a:prstGeom prst="rect">
-            <a:avLst/>
-          </a:prstGeom>
-          <a:noFill/>
-        </p:spPr>
-        <p:txBody>
-          <a:bodyPr wrap="square" lIns="0" rIns="0" tIns="0" bIns="0">
-            <a:spAutoFit/>
-          </a:bodyPr>
-          <a:lstStyle/>
-          <a:p>
-            <a:pPr algn="r"/>
-            <a:r>
-              <a:rPr sz="950" b="1">
-                <a:solidFill>
-                  <a:srgbClr val="FFFFFF"/>
-                </a:solidFill>
-                <a:latin typeface="Calibri"/>
-              </a:rPr>
-              <a:t>2</a:t>
-            </a:r>
-          </a:p>
-        </p:txBody>
-      </p:sp>
-      <p:sp>
-        <p:nvSpPr>
-          <p:cNvPr id="9" name="Rounded Rectangle 8"/>
-          <p:cNvSpPr/>
-          <p:nvPr/>
-        </p:nvSpPr>
-        <p:spPr>
-          <a:xfrm>
-            <a:off x="457200" y="1325880"/>
-            <a:ext cx="5532120" cy="384048"/>
-          </a:xfrm>
-          <a:prstGeom prst="roundRect">
-            <a:avLst>
-              <a:gd name="adj" fmla="val 20000"/>
-            </a:avLst>
-          </a:prstGeom>
           <a:solidFill>
-            <a:srgbClr val="003092"/>
+            <a:srgbClr val="090A16"/>
           </a:solidFill>
           <a:ln>
             <a:noFill/>
@@ -4700,14 +4722,75 @@
           <a:lstStyle/>
           <a:p>
             <a:pPr algn="ctr"/>
-            <a:r>
-              <a:rPr sz="1300" b="1">
-                <a:solidFill>
-                  <a:srgbClr val="FFFFFF"/>
-                </a:solidFill>
-                <a:latin typeface="Calibri"/>
-              </a:rPr>
-              <a:t>CLIENT SIDE - React.js Frontend</a:t>
+          </a:p>
+        </p:txBody>
+      </p:sp>
+      <p:sp>
+        <p:nvSpPr>
+          <p:cNvPr id="8" name="TextBox 7"/>
+          <p:cNvSpPr txBox="1"/>
+          <p:nvPr/>
+        </p:nvSpPr>
+        <p:spPr>
+          <a:xfrm>
+            <a:off x="411480" y="6547104"/>
+            <a:ext cx="8686800" cy="238658"/>
+          </a:xfrm>
+          <a:prstGeom prst="rect">
+            <a:avLst/>
+          </a:prstGeom>
+          <a:noFill/>
+        </p:spPr>
+        <p:txBody>
+          <a:bodyPr wrap="square" lIns="0" rIns="0" tIns="0" bIns="0">
+            <a:spAutoFit/>
+          </a:bodyPr>
+          <a:lstStyle/>
+          <a:p>
+            <a:pPr algn="l"/>
+            <a:r>
+              <a:rPr sz="950" b="0">
+                <a:solidFill>
+                  <a:srgbClr val="9CA3C7"/>
+                </a:solidFill>
+                <a:latin typeface="Calibri"/>
+              </a:rPr>
+              <a:t>FinGenius AI  •  M.Tech Mini Project  •  [Student Name]  •  [College Name]</a:t>
+            </a:r>
+          </a:p>
+        </p:txBody>
+      </p:sp>
+      <p:sp>
+        <p:nvSpPr>
+          <p:cNvPr id="9" name="TextBox 8"/>
+          <p:cNvSpPr txBox="1"/>
+          <p:nvPr/>
+        </p:nvSpPr>
+        <p:spPr>
+          <a:xfrm>
+            <a:off x="11094415" y="6547104"/>
+            <a:ext cx="685800" cy="310896"/>
+          </a:xfrm>
+          <a:prstGeom prst="rect">
+            <a:avLst/>
+          </a:prstGeom>
+          <a:noFill/>
+        </p:spPr>
+        <p:txBody>
+          <a:bodyPr wrap="square" lIns="0" rIns="0" tIns="0" bIns="0">
+            <a:spAutoFit/>
+          </a:bodyPr>
+          <a:lstStyle/>
+          <a:p>
+            <a:pPr algn="r"/>
+            <a:r>
+              <a:rPr sz="950" b="1">
+                <a:solidFill>
+                  <a:srgbClr val="22C55E"/>
+                </a:solidFill>
+                <a:latin typeface="Calibri"/>
+              </a:rPr>
+              <a:t>2</a:t>
             </a:r>
           </a:p>
         </p:txBody>
@@ -4720,16 +4803,16 @@
         </p:nvSpPr>
         <p:spPr>
           <a:xfrm>
-            <a:off x="457200" y="1783080"/>
-            <a:ext cx="5532120" cy="4617720"/>
+            <a:off x="457200" y="1371600"/>
+            <a:ext cx="5532120" cy="365760"/>
           </a:xfrm>
           <a:prstGeom prst="roundRect">
             <a:avLst>
-              <a:gd name="adj" fmla="val 6000"/>
+              <a:gd name="adj" fmla="val 40000"/>
             </a:avLst>
           </a:prstGeom>
           <a:solidFill>
-            <a:srgbClr val="FFFFFF"/>
+            <a:srgbClr val="6366F1"/>
           </a:solidFill>
           <a:ln>
             <a:noFill/>
@@ -4755,19 +4838,76 @@
           <a:lstStyle/>
           <a:p>
             <a:pPr algn="ctr"/>
-          </a:p>
-        </p:txBody>
-      </p:sp>
-      <p:sp>
-        <p:nvSpPr>
-          <p:cNvPr id="11" name="TextBox 10"/>
+            <a:r>
+              <a:rPr sz="1300" b="1">
+                <a:solidFill>
+                  <a:srgbClr val="FFFFFF"/>
+                </a:solidFill>
+                <a:latin typeface="Calibri"/>
+              </a:rPr>
+              <a:t>CLIENT SIDE  •  React.js Frontend</a:t>
+            </a:r>
+          </a:p>
+        </p:txBody>
+      </p:sp>
+      <p:sp>
+        <p:nvSpPr>
+          <p:cNvPr id="11" name="Rounded Rectangle 10"/>
+          <p:cNvSpPr/>
+          <p:nvPr/>
+        </p:nvSpPr>
+        <p:spPr>
+          <a:xfrm>
+            <a:off x="457200" y="1828800"/>
+            <a:ext cx="5532120" cy="4526280"/>
+          </a:xfrm>
+          <a:prstGeom prst="roundRect">
+            <a:avLst>
+              <a:gd name="adj" fmla="val 5000"/>
+            </a:avLst>
+          </a:prstGeom>
+          <a:solidFill>
+            <a:srgbClr val="1A1D33"/>
+          </a:solidFill>
+          <a:ln w="12700">
+            <a:solidFill>
+              <a:srgbClr val="353A5C"/>
+            </a:solidFill>
+          </a:ln>
+          <a:effectLst/>
+        </p:spPr>
+        <p:style>
+          <a:lnRef idx="1">
+            <a:schemeClr val="accent1"/>
+          </a:lnRef>
+          <a:fillRef idx="3">
+            <a:schemeClr val="accent1"/>
+          </a:fillRef>
+          <a:effectRef idx="2">
+            <a:schemeClr val="accent1"/>
+          </a:effectRef>
+          <a:fontRef idx="minor">
+            <a:schemeClr val="lt1"/>
+          </a:fontRef>
+        </p:style>
+        <p:txBody>
+          <a:bodyPr rtlCol="0" anchor="ctr"/>
+          <a:lstStyle/>
+          <a:p>
+            <a:pPr algn="ctr"/>
+          </a:p>
+        </p:txBody>
+      </p:sp>
+      <p:sp>
+        <p:nvSpPr>
+          <p:cNvPr id="12" name="TextBox 11"/>
           <p:cNvSpPr txBox="1"/>
           <p:nvPr/>
         </p:nvSpPr>
         <p:spPr>
           <a:xfrm>
-            <a:off x="777240" y="2057400"/>
-            <a:ext cx="4937760" cy="4206240"/>
+            <a:off x="777240" y="2103120"/>
+            <a:ext cx="4937760" cy="4114800"/>
           </a:xfrm>
           <a:prstGeom prst="rect">
             <a:avLst/>
@@ -4788,7 +4928,7 @@
             <a:r>
               <a:rPr sz="1250" b="1">
                 <a:solidFill>
-                  <a:srgbClr val="003092"/>
+                  <a:srgbClr val="6366F1"/>
                 </a:solidFill>
                 <a:latin typeface="Calibri"/>
               </a:rPr>
@@ -4797,7 +4937,7 @@
             <a:r>
               <a:rPr sz="1250" b="1">
                 <a:solidFill>
-                  <a:srgbClr val="202433"/>
+                  <a:srgbClr val="F1F3FF"/>
                 </a:solidFill>
                 <a:latin typeface="Calibri"/>
               </a:rPr>
@@ -4806,7 +4946,7 @@
             <a:r>
               <a:rPr sz="1250" b="0">
                 <a:solidFill>
-                  <a:srgbClr val="202433"/>
+                  <a:srgbClr val="9CA3C7"/>
                 </a:solidFill>
                 <a:latin typeface="Calibri"/>
               </a:rPr>
@@ -4822,7 +4962,7 @@
             <a:r>
               <a:rPr sz="1250" b="1">
                 <a:solidFill>
-                  <a:srgbClr val="003092"/>
+                  <a:srgbClr val="6366F1"/>
                 </a:solidFill>
                 <a:latin typeface="Calibri"/>
               </a:rPr>
@@ -4831,7 +4971,7 @@
             <a:r>
               <a:rPr sz="1250" b="1">
                 <a:solidFill>
-                  <a:srgbClr val="202433"/>
+                  <a:srgbClr val="F1F3FF"/>
                 </a:solidFill>
                 <a:latin typeface="Calibri"/>
               </a:rPr>
@@ -4840,7 +4980,7 @@
             <a:r>
               <a:rPr sz="1250" b="0">
                 <a:solidFill>
-                  <a:srgbClr val="202433"/>
+                  <a:srgbClr val="9CA3C7"/>
                 </a:solidFill>
                 <a:latin typeface="Calibri"/>
               </a:rPr>
@@ -4856,7 +4996,7 @@
             <a:r>
               <a:rPr sz="1250" b="1">
                 <a:solidFill>
-                  <a:srgbClr val="003092"/>
+                  <a:srgbClr val="6366F1"/>
                 </a:solidFill>
                 <a:latin typeface="Calibri"/>
               </a:rPr>
@@ -4865,7 +5005,7 @@
             <a:r>
               <a:rPr sz="1250" b="1">
                 <a:solidFill>
-                  <a:srgbClr val="202433"/>
+                  <a:srgbClr val="F1F3FF"/>
                 </a:solidFill>
                 <a:latin typeface="Calibri"/>
               </a:rPr>
@@ -4874,7 +5014,7 @@
             <a:r>
               <a:rPr sz="1250" b="0">
                 <a:solidFill>
-                  <a:srgbClr val="202433"/>
+                  <a:srgbClr val="9CA3C7"/>
                 </a:solidFill>
                 <a:latin typeface="Calibri"/>
               </a:rPr>
@@ -4890,7 +5030,7 @@
             <a:r>
               <a:rPr sz="1250" b="1">
                 <a:solidFill>
-                  <a:srgbClr val="003092"/>
+                  <a:srgbClr val="6366F1"/>
                 </a:solidFill>
                 <a:latin typeface="Calibri"/>
               </a:rPr>
@@ -4899,7 +5039,7 @@
             <a:r>
               <a:rPr sz="1250" b="1">
                 <a:solidFill>
-                  <a:srgbClr val="202433"/>
+                  <a:srgbClr val="F1F3FF"/>
                 </a:solidFill>
                 <a:latin typeface="Calibri"/>
               </a:rPr>
@@ -4908,7 +5048,7 @@
             <a:r>
               <a:rPr sz="1250" b="0">
                 <a:solidFill>
-                  <a:srgbClr val="202433"/>
+                  <a:srgbClr val="9CA3C7"/>
                 </a:solidFill>
                 <a:latin typeface="Calibri"/>
               </a:rPr>
@@ -4924,7 +5064,7 @@
             <a:r>
               <a:rPr sz="1250" b="1">
                 <a:solidFill>
-                  <a:srgbClr val="003092"/>
+                  <a:srgbClr val="6366F1"/>
                 </a:solidFill>
                 <a:latin typeface="Calibri"/>
               </a:rPr>
@@ -4933,7 +5073,7 @@
             <a:r>
               <a:rPr sz="1250" b="1">
                 <a:solidFill>
-                  <a:srgbClr val="202433"/>
+                  <a:srgbClr val="F1F3FF"/>
                 </a:solidFill>
                 <a:latin typeface="Calibri"/>
               </a:rPr>
@@ -4942,7 +5082,7 @@
             <a:r>
               <a:rPr sz="1250" b="0">
                 <a:solidFill>
-                  <a:srgbClr val="202433"/>
+                  <a:srgbClr val="9CA3C7"/>
                 </a:solidFill>
                 <a:latin typeface="Calibri"/>
               </a:rPr>
@@ -4958,7 +5098,7 @@
             <a:r>
               <a:rPr sz="1250" b="1">
                 <a:solidFill>
-                  <a:srgbClr val="003092"/>
+                  <a:srgbClr val="6366F1"/>
                 </a:solidFill>
                 <a:latin typeface="Calibri"/>
               </a:rPr>
@@ -4967,7 +5107,7 @@
             <a:r>
               <a:rPr sz="1250" b="1">
                 <a:solidFill>
-                  <a:srgbClr val="202433"/>
+                  <a:srgbClr val="F1F3FF"/>
                 </a:solidFill>
                 <a:latin typeface="Calibri"/>
               </a:rPr>
@@ -4976,7 +5116,7 @@
             <a:r>
               <a:rPr sz="1250" b="0">
                 <a:solidFill>
-                  <a:srgbClr val="202433"/>
+                  <a:srgbClr val="9CA3C7"/>
                 </a:solidFill>
                 <a:latin typeface="Calibri"/>
               </a:rPr>
@@ -4992,7 +5132,7 @@
             <a:r>
               <a:rPr sz="1250" b="1">
                 <a:solidFill>
-                  <a:srgbClr val="003092"/>
+                  <a:srgbClr val="6366F1"/>
                 </a:solidFill>
                 <a:latin typeface="Calibri"/>
               </a:rPr>
@@ -5001,7 +5141,7 @@
             <a:r>
               <a:rPr sz="1250" b="1">
                 <a:solidFill>
-                  <a:srgbClr val="202433"/>
+                  <a:srgbClr val="F1F3FF"/>
                 </a:solidFill>
                 <a:latin typeface="Calibri"/>
               </a:rPr>
@@ -5010,7 +5150,7 @@
             <a:r>
               <a:rPr sz="1250" b="0">
                 <a:solidFill>
-                  <a:srgbClr val="202433"/>
+                  <a:srgbClr val="9CA3C7"/>
                 </a:solidFill>
                 <a:latin typeface="Calibri"/>
               </a:rPr>
@@ -5021,22 +5161,22 @@
       </p:sp>
       <p:sp>
         <p:nvSpPr>
-          <p:cNvPr id="12" name="Rounded Rectangle 11"/>
+          <p:cNvPr id="13" name="Rounded Rectangle 12"/>
           <p:cNvSpPr/>
           <p:nvPr/>
         </p:nvSpPr>
         <p:spPr>
           <a:xfrm>
-            <a:off x="6172200" y="1325880"/>
-            <a:ext cx="5532120" cy="384048"/>
+            <a:off x="6172200" y="1371600"/>
+            <a:ext cx="5532120" cy="365760"/>
           </a:xfrm>
           <a:prstGeom prst="roundRect">
             <a:avLst>
-              <a:gd name="adj" fmla="val 20000"/>
+              <a:gd name="adj" fmla="val 40000"/>
             </a:avLst>
           </a:prstGeom>
           <a:solidFill>
-            <a:srgbClr val="EF7F1B"/>
+            <a:srgbClr val="22C55E"/>
           </a:solidFill>
           <a:ln>
             <a:noFill/>
@@ -5069,32 +5209,34 @@
                 </a:solidFill>
                 <a:latin typeface="Calibri"/>
               </a:rPr>
-              <a:t>SERVER SIDE - Node.js Backend</a:t>
-            </a:r>
-          </a:p>
-        </p:txBody>
-      </p:sp>
-      <p:sp>
-        <p:nvSpPr>
-          <p:cNvPr id="13" name="Rounded Rectangle 12"/>
+              <a:t>SERVER SIDE  •  Node.js Backend</a:t>
+            </a:r>
+          </a:p>
+        </p:txBody>
+      </p:sp>
+      <p:sp>
+        <p:nvSpPr>
+          <p:cNvPr id="14" name="Rounded Rectangle 13"/>
           <p:cNvSpPr/>
           <p:nvPr/>
         </p:nvSpPr>
         <p:spPr>
           <a:xfrm>
-            <a:off x="6172200" y="1783080"/>
-            <a:ext cx="5532120" cy="4617720"/>
+            <a:off x="6172200" y="1828800"/>
+            <a:ext cx="5532120" cy="4526280"/>
           </a:xfrm>
           <a:prstGeom prst="roundRect">
             <a:avLst>
-              <a:gd name="adj" fmla="val 6000"/>
+              <a:gd name="adj" fmla="val 5000"/>
             </a:avLst>
           </a:prstGeom>
           <a:solidFill>
-            <a:srgbClr val="FFFFFF"/>
+            <a:srgbClr val="1A1D33"/>
           </a:solidFill>
-          <a:ln>
-            <a:noFill/>
+          <a:ln w="12700">
+            <a:solidFill>
+              <a:srgbClr val="353A5C"/>
+            </a:solidFill>
           </a:ln>
           <a:effectLst/>
         </p:spPr>
@@ -5122,14 +5264,14 @@
       </p:sp>
       <p:sp>
         <p:nvSpPr>
-          <p:cNvPr id="14" name="TextBox 13"/>
+          <p:cNvPr id="15" name="TextBox 14"/>
           <p:cNvSpPr txBox="1"/>
           <p:nvPr/>
         </p:nvSpPr>
         <p:spPr>
           <a:xfrm>
-            <a:off x="6492240" y="2057400"/>
-            <a:ext cx="4937760" cy="4206240"/>
+            <a:off x="6492240" y="2103120"/>
+            <a:ext cx="4937760" cy="4114800"/>
           </a:xfrm>
           <a:prstGeom prst="rect">
             <a:avLst/>
@@ -5150,7 +5292,7 @@
             <a:r>
               <a:rPr sz="1250" b="1">
                 <a:solidFill>
-                  <a:srgbClr val="EF7F1B"/>
+                  <a:srgbClr val="22C55E"/>
                 </a:solidFill>
                 <a:latin typeface="Calibri"/>
               </a:rPr>
@@ -5159,7 +5301,7 @@
             <a:r>
               <a:rPr sz="1250" b="1">
                 <a:solidFill>
-                  <a:srgbClr val="202433"/>
+                  <a:srgbClr val="F1F3FF"/>
                 </a:solidFill>
                 <a:latin typeface="Calibri"/>
               </a:rPr>
@@ -5168,7 +5310,7 @@
             <a:r>
               <a:rPr sz="1250" b="0">
                 <a:solidFill>
-                  <a:srgbClr val="202433"/>
+                  <a:srgbClr val="9CA3C7"/>
                 </a:solidFill>
                 <a:latin typeface="Calibri"/>
               </a:rPr>
@@ -5184,7 +5326,7 @@
             <a:r>
               <a:rPr sz="1250" b="1">
                 <a:solidFill>
-                  <a:srgbClr val="EF7F1B"/>
+                  <a:srgbClr val="22C55E"/>
                 </a:solidFill>
                 <a:latin typeface="Calibri"/>
               </a:rPr>
@@ -5193,7 +5335,7 @@
             <a:r>
               <a:rPr sz="1250" b="1">
                 <a:solidFill>
-                  <a:srgbClr val="202433"/>
+                  <a:srgbClr val="F1F3FF"/>
                 </a:solidFill>
                 <a:latin typeface="Calibri"/>
               </a:rPr>
@@ -5202,7 +5344,7 @@
             <a:r>
               <a:rPr sz="1250" b="0">
                 <a:solidFill>
-                  <a:srgbClr val="202433"/>
+                  <a:srgbClr val="9CA3C7"/>
                 </a:solidFill>
                 <a:latin typeface="Calibri"/>
               </a:rPr>
@@ -5218,7 +5360,7 @@
             <a:r>
               <a:rPr sz="1250" b="1">
                 <a:solidFill>
-                  <a:srgbClr val="EF7F1B"/>
+                  <a:srgbClr val="22C55E"/>
                 </a:solidFill>
                 <a:latin typeface="Calibri"/>
               </a:rPr>
@@ -5227,7 +5369,7 @@
             <a:r>
               <a:rPr sz="1250" b="1">
                 <a:solidFill>
-                  <a:srgbClr val="202433"/>
+                  <a:srgbClr val="F1F3FF"/>
                 </a:solidFill>
                 <a:latin typeface="Calibri"/>
               </a:rPr>
@@ -5236,7 +5378,7 @@
             <a:r>
               <a:rPr sz="1250" b="0">
                 <a:solidFill>
-                  <a:srgbClr val="202433"/>
+                  <a:srgbClr val="9CA3C7"/>
                 </a:solidFill>
                 <a:latin typeface="Calibri"/>
               </a:rPr>
@@ -5252,7 +5394,7 @@
             <a:r>
               <a:rPr sz="1250" b="1">
                 <a:solidFill>
-                  <a:srgbClr val="EF7F1B"/>
+                  <a:srgbClr val="22C55E"/>
                 </a:solidFill>
                 <a:latin typeface="Calibri"/>
               </a:rPr>
@@ -5261,7 +5403,7 @@
             <a:r>
               <a:rPr sz="1250" b="1">
                 <a:solidFill>
-                  <a:srgbClr val="202433"/>
+                  <a:srgbClr val="F1F3FF"/>
                 </a:solidFill>
                 <a:latin typeface="Calibri"/>
               </a:rPr>
@@ -5270,7 +5412,7 @@
             <a:r>
               <a:rPr sz="1250" b="0">
                 <a:solidFill>
-                  <a:srgbClr val="202433"/>
+                  <a:srgbClr val="9CA3C7"/>
                 </a:solidFill>
                 <a:latin typeface="Calibri"/>
               </a:rPr>
@@ -5286,7 +5428,7 @@
             <a:r>
               <a:rPr sz="1250" b="1">
                 <a:solidFill>
-                  <a:srgbClr val="EF7F1B"/>
+                  <a:srgbClr val="22C55E"/>
                 </a:solidFill>
                 <a:latin typeface="Calibri"/>
               </a:rPr>
@@ -5295,7 +5437,7 @@
             <a:r>
               <a:rPr sz="1250" b="1">
                 <a:solidFill>
-                  <a:srgbClr val="202433"/>
+                  <a:srgbClr val="F1F3FF"/>
                 </a:solidFill>
                 <a:latin typeface="Calibri"/>
               </a:rPr>
@@ -5304,7 +5446,7 @@
             <a:r>
               <a:rPr sz="1250" b="0">
                 <a:solidFill>
-                  <a:srgbClr val="202433"/>
+                  <a:srgbClr val="9CA3C7"/>
                 </a:solidFill>
                 <a:latin typeface="Calibri"/>
               </a:rPr>
@@ -5320,7 +5462,7 @@
             <a:r>
               <a:rPr sz="1250" b="1">
                 <a:solidFill>
-                  <a:srgbClr val="EF7F1B"/>
+                  <a:srgbClr val="22C55E"/>
                 </a:solidFill>
                 <a:latin typeface="Calibri"/>
               </a:rPr>
@@ -5329,7 +5471,7 @@
             <a:r>
               <a:rPr sz="1250" b="1">
                 <a:solidFill>
-                  <a:srgbClr val="202433"/>
+                  <a:srgbClr val="F1F3FF"/>
                 </a:solidFill>
                 <a:latin typeface="Calibri"/>
               </a:rPr>
@@ -5338,7 +5480,7 @@
             <a:r>
               <a:rPr sz="1250" b="0">
                 <a:solidFill>
-                  <a:srgbClr val="202433"/>
+                  <a:srgbClr val="9CA3C7"/>
                 </a:solidFill>
                 <a:latin typeface="Calibri"/>
               </a:rPr>
@@ -5354,7 +5496,7 @@
             <a:r>
               <a:rPr sz="1250" b="1">
                 <a:solidFill>
-                  <a:srgbClr val="EF7F1B"/>
+                  <a:srgbClr val="22C55E"/>
                 </a:solidFill>
                 <a:latin typeface="Calibri"/>
               </a:rPr>
@@ -5363,7 +5505,7 @@
             <a:r>
               <a:rPr sz="1250" b="1">
                 <a:solidFill>
-                  <a:srgbClr val="202433"/>
+                  <a:srgbClr val="F1F3FF"/>
                 </a:solidFill>
                 <a:latin typeface="Calibri"/>
               </a:rPr>
@@ -5372,7 +5514,7 @@
             <a:r>
               <a:rPr sz="1250" b="0">
                 <a:solidFill>
-                  <a:srgbClr val="202433"/>
+                  <a:srgbClr val="9CA3C7"/>
                 </a:solidFill>
                 <a:latin typeface="Calibri"/>
               </a:rPr>
@@ -5408,13 +5550,13 @@
         <p:spPr>
           <a:xfrm>
             <a:off x="0" y="0"/>
-            <a:ext cx="12191695" cy="1051560"/>
+            <a:ext cx="12191695" cy="6858000"/>
           </a:xfrm>
           <a:prstGeom prst="rect">
             <a:avLst/>
           </a:prstGeom>
           <a:solidFill>
-            <a:srgbClr val="003092"/>
+            <a:srgbClr val="0F1120"/>
           </a:solidFill>
           <a:ln>
             <a:noFill/>
@@ -5451,14 +5593,14 @@
         </p:nvSpPr>
         <p:spPr>
           <a:xfrm>
-            <a:off x="0" y="1051560"/>
-            <a:ext cx="12191695" cy="40233"/>
+            <a:off x="0" y="0"/>
+            <a:ext cx="12191695" cy="82296"/>
           </a:xfrm>
           <a:prstGeom prst="rect">
             <a:avLst/>
           </a:prstGeom>
           <a:solidFill>
-            <a:srgbClr val="EF7F1B"/>
+            <a:srgbClr val="F59E0B"/>
           </a:solidFill>
           <a:ln>
             <a:noFill/>
@@ -5495,7 +5637,7 @@
         </p:nvSpPr>
         <p:spPr>
           <a:xfrm>
-            <a:off x="502920" y="118872"/>
+            <a:off x="502920" y="320040"/>
             <a:ext cx="8686800" cy="292608"/>
           </a:xfrm>
           <a:prstGeom prst="rect">
@@ -5513,7 +5655,7 @@
             <a:r>
               <a:rPr sz="1250" b="1">
                 <a:solidFill>
-                  <a:srgbClr val="01ADEF"/>
+                  <a:srgbClr val="F59E0B"/>
                 </a:solidFill>
                 <a:latin typeface="Calibri"/>
               </a:rPr>
@@ -5530,8 +5672,8 @@
         </p:nvSpPr>
         <p:spPr>
           <a:xfrm>
-            <a:off x="502920" y="384048"/>
-            <a:ext cx="8778240" cy="621792"/>
+            <a:off x="502920" y="603504"/>
+            <a:ext cx="8778240" cy="548640"/>
           </a:xfrm>
           <a:prstGeom prst="rect">
             <a:avLst/>
@@ -5546,9 +5688,9 @@
           <a:p>
             <a:pPr algn="l"/>
             <a:r>
-              <a:rPr sz="2500" b="1">
-                <a:solidFill>
-                  <a:srgbClr val="FFFFFF"/>
+              <a:rPr sz="2400" b="1">
+                <a:solidFill>
+                  <a:srgbClr val="F1F3FF"/>
                 </a:solidFill>
                 <a:latin typeface="Calibri"/>
               </a:rPr>
@@ -5565,14 +5707,14 @@
         </p:nvSpPr>
         <p:spPr>
           <a:xfrm>
-            <a:off x="0" y="6547104"/>
-            <a:ext cx="12191695" cy="310896"/>
+            <a:off x="0" y="1261872"/>
+            <a:ext cx="12191695" cy="18288"/>
           </a:xfrm>
           <a:prstGeom prst="rect">
             <a:avLst/>
           </a:prstGeom>
           <a:solidFill>
-            <a:srgbClr val="001E5C"/>
+            <a:srgbClr val="353A5C"/>
           </a:solidFill>
           <a:ln>
             <a:noFill/>
@@ -5603,92 +5745,20 @@
       </p:sp>
       <p:sp>
         <p:nvSpPr>
-          <p:cNvPr id="7" name="TextBox 6"/>
-          <p:cNvSpPr txBox="1"/>
-          <p:nvPr/>
-        </p:nvSpPr>
-        <p:spPr>
-          <a:xfrm>
-            <a:off x="411480" y="6547104"/>
-            <a:ext cx="8686800" cy="238658"/>
+          <p:cNvPr id="7" name="Rectangle 6"/>
+          <p:cNvSpPr/>
+          <p:nvPr/>
+        </p:nvSpPr>
+        <p:spPr>
+          <a:xfrm>
+            <a:off x="0" y="6547104"/>
+            <a:ext cx="12191695" cy="310896"/>
           </a:xfrm>
           <a:prstGeom prst="rect">
             <a:avLst/>
           </a:prstGeom>
-          <a:noFill/>
-        </p:spPr>
-        <p:txBody>
-          <a:bodyPr wrap="square" lIns="0" rIns="0" tIns="0" bIns="0">
-            <a:spAutoFit/>
-          </a:bodyPr>
-          <a:lstStyle/>
-          <a:p>
-            <a:pPr algn="l"/>
-            <a:r>
-              <a:rPr sz="950" b="0">
-                <a:solidFill>
-                  <a:srgbClr val="C9D6EE"/>
-                </a:solidFill>
-                <a:latin typeface="Calibri"/>
-              </a:rPr>
-              <a:t>M.Tech Mini Project  |  [Student Name]  |  [College Name]</a:t>
-            </a:r>
-          </a:p>
-        </p:txBody>
-      </p:sp>
-      <p:sp>
-        <p:nvSpPr>
-          <p:cNvPr id="8" name="TextBox 7"/>
-          <p:cNvSpPr txBox="1"/>
-          <p:nvPr/>
-        </p:nvSpPr>
-        <p:spPr>
-          <a:xfrm>
-            <a:off x="11094415" y="6547104"/>
-            <a:ext cx="685800" cy="310896"/>
-          </a:xfrm>
-          <a:prstGeom prst="rect">
-            <a:avLst/>
-          </a:prstGeom>
-          <a:noFill/>
-        </p:spPr>
-        <p:txBody>
-          <a:bodyPr wrap="square" lIns="0" rIns="0" tIns="0" bIns="0">
-            <a:spAutoFit/>
-          </a:bodyPr>
-          <a:lstStyle/>
-          <a:p>
-            <a:pPr algn="r"/>
-            <a:r>
-              <a:rPr sz="950" b="1">
-                <a:solidFill>
-                  <a:srgbClr val="FFFFFF"/>
-                </a:solidFill>
-                <a:latin typeface="Calibri"/>
-              </a:rPr>
-              <a:t>3</a:t>
-            </a:r>
-          </a:p>
-        </p:txBody>
-      </p:sp>
-      <p:sp>
-        <p:nvSpPr>
-          <p:cNvPr id="9" name="Rounded Rectangle 8"/>
-          <p:cNvSpPr/>
-          <p:nvPr/>
-        </p:nvSpPr>
-        <p:spPr>
-          <a:xfrm>
-            <a:off x="966063" y="1298448"/>
-            <a:ext cx="1481328" cy="566928"/>
-          </a:xfrm>
-          <a:prstGeom prst="roundRect">
-            <a:avLst>
-              <a:gd name="adj" fmla="val 12000"/>
-            </a:avLst>
-          </a:prstGeom>
           <a:solidFill>
-            <a:srgbClr val="003092"/>
+            <a:srgbClr val="090A16"/>
           </a:solidFill>
           <a:ln>
             <a:noFill/>
@@ -5710,51 +5780,101 @@
           </a:fontRef>
         </p:style>
         <p:txBody>
-          <a:bodyPr rtlCol="0" anchor="ctr" wrap="square" lIns="25400" rIns="25400"/>
+          <a:bodyPr rtlCol="0" anchor="ctr"/>
           <a:lstStyle/>
           <a:p>
             <a:pPr algn="ctr"/>
-            <a:r>
-              <a:rPr sz="1150" b="1">
-                <a:solidFill>
-                  <a:srgbClr val="FFFFFF"/>
-                </a:solidFill>
-                <a:latin typeface="Calibri"/>
-              </a:rPr>
-              <a:t>Register &amp;
-Login</a:t>
-            </a:r>
-          </a:p>
-          <a:p>
-            <a:pPr algn="ctr"/>
-            <a:r>
-              <a:rPr sz="950">
-                <a:solidFill>
-                  <a:srgbClr val="E7EEFA"/>
-                </a:solidFill>
-                <a:latin typeface="Calibri"/>
-              </a:rPr>
-              <a:t>JWT + bcrypt</a:t>
-            </a:r>
-          </a:p>
-        </p:txBody>
-      </p:sp>
-      <p:sp>
-        <p:nvSpPr>
-          <p:cNvPr id="10" name="Right Arrow 9"/>
+          </a:p>
+        </p:txBody>
+      </p:sp>
+      <p:sp>
+        <p:nvSpPr>
+          <p:cNvPr id="8" name="TextBox 7"/>
+          <p:cNvSpPr txBox="1"/>
+          <p:nvPr/>
+        </p:nvSpPr>
+        <p:spPr>
+          <a:xfrm>
+            <a:off x="411480" y="6547104"/>
+            <a:ext cx="8686800" cy="238658"/>
+          </a:xfrm>
+          <a:prstGeom prst="rect">
+            <a:avLst/>
+          </a:prstGeom>
+          <a:noFill/>
+        </p:spPr>
+        <p:txBody>
+          <a:bodyPr wrap="square" lIns="0" rIns="0" tIns="0" bIns="0">
+            <a:spAutoFit/>
+          </a:bodyPr>
+          <a:lstStyle/>
+          <a:p>
+            <a:pPr algn="l"/>
+            <a:r>
+              <a:rPr sz="950" b="0">
+                <a:solidFill>
+                  <a:srgbClr val="9CA3C7"/>
+                </a:solidFill>
+                <a:latin typeface="Calibri"/>
+              </a:rPr>
+              <a:t>FinGenius AI  •  M.Tech Mini Project  •  [Student Name]  •  [College Name]</a:t>
+            </a:r>
+          </a:p>
+        </p:txBody>
+      </p:sp>
+      <p:sp>
+        <p:nvSpPr>
+          <p:cNvPr id="9" name="TextBox 8"/>
+          <p:cNvSpPr txBox="1"/>
+          <p:nvPr/>
+        </p:nvSpPr>
+        <p:spPr>
+          <a:xfrm>
+            <a:off x="11094415" y="6547104"/>
+            <a:ext cx="685800" cy="310896"/>
+          </a:xfrm>
+          <a:prstGeom prst="rect">
+            <a:avLst/>
+          </a:prstGeom>
+          <a:noFill/>
+        </p:spPr>
+        <p:txBody>
+          <a:bodyPr wrap="square" lIns="0" rIns="0" tIns="0" bIns="0">
+            <a:spAutoFit/>
+          </a:bodyPr>
+          <a:lstStyle/>
+          <a:p>
+            <a:pPr algn="r"/>
+            <a:r>
+              <a:rPr sz="950" b="1">
+                <a:solidFill>
+                  <a:srgbClr val="F59E0B"/>
+                </a:solidFill>
+                <a:latin typeface="Calibri"/>
+              </a:rPr>
+              <a:t>3</a:t>
+            </a:r>
+          </a:p>
+        </p:txBody>
+      </p:sp>
+      <p:sp>
+        <p:nvSpPr>
+          <p:cNvPr id="10" name="Rounded Rectangle 9"/>
           <p:cNvSpPr/>
           <p:nvPr/>
         </p:nvSpPr>
         <p:spPr>
           <a:xfrm>
-            <a:off x="2465679" y="1463039"/>
-            <a:ext cx="237744" cy="237744"/>
-          </a:xfrm>
-          <a:prstGeom prst="rightArrow">
-            <a:avLst/>
+            <a:off x="966063" y="1417320"/>
+            <a:ext cx="1481328" cy="566928"/>
+          </a:xfrm>
+          <a:prstGeom prst="roundRect">
+            <a:avLst>
+              <a:gd name="adj" fmla="val 50000"/>
+            </a:avLst>
           </a:prstGeom>
           <a:solidFill>
-            <a:srgbClr val="5A6273"/>
+            <a:srgbClr val="6366F1"/>
           </a:solidFill>
           <a:ln>
             <a:noFill/>
@@ -5776,31 +5896,51 @@
           </a:fontRef>
         </p:style>
         <p:txBody>
-          <a:bodyPr rtlCol="0" anchor="ctr"/>
+          <a:bodyPr rtlCol="0" anchor="ctr" wrap="square" lIns="25400" rIns="25400"/>
           <a:lstStyle/>
           <a:p>
             <a:pPr algn="ctr"/>
-          </a:p>
-        </p:txBody>
-      </p:sp>
-      <p:sp>
-        <p:nvSpPr>
-          <p:cNvPr id="11" name="Rounded Rectangle 10"/>
+            <a:r>
+              <a:rPr sz="1150" b="1">
+                <a:solidFill>
+                  <a:srgbClr val="FFFFFF"/>
+                </a:solidFill>
+                <a:latin typeface="Calibri"/>
+              </a:rPr>
+              <a:t>Register &amp;
+Login</a:t>
+            </a:r>
+          </a:p>
+          <a:p>
+            <a:pPr algn="ctr"/>
+            <a:r>
+              <a:rPr sz="950">
+                <a:solidFill>
+                  <a:srgbClr val="E4E7FF"/>
+                </a:solidFill>
+                <a:latin typeface="Calibri"/>
+              </a:rPr>
+              <a:t>JWT + bcrypt</a:t>
+            </a:r>
+          </a:p>
+        </p:txBody>
+      </p:sp>
+      <p:sp>
+        <p:nvSpPr>
+          <p:cNvPr id="11" name="Right Arrow 10"/>
           <p:cNvSpPr/>
           <p:nvPr/>
         </p:nvSpPr>
         <p:spPr>
           <a:xfrm>
-            <a:off x="2721711" y="1298448"/>
-            <a:ext cx="1481328" cy="566928"/>
-          </a:xfrm>
-          <a:prstGeom prst="roundRect">
-            <a:avLst>
-              <a:gd name="adj" fmla="val 12000"/>
-            </a:avLst>
+            <a:off x="2465679" y="1581912"/>
+            <a:ext cx="237744" cy="237744"/>
+          </a:xfrm>
+          <a:prstGeom prst="rightArrow">
+            <a:avLst/>
           </a:prstGeom>
           <a:solidFill>
-            <a:srgbClr val="01ADEF"/>
+            <a:srgbClr val="9CA3C7"/>
           </a:solidFill>
           <a:ln>
             <a:noFill/>
@@ -5822,50 +5962,31 @@
           </a:fontRef>
         </p:style>
         <p:txBody>
-          <a:bodyPr rtlCol="0" anchor="ctr" wrap="square" lIns="25400" rIns="25400"/>
+          <a:bodyPr rtlCol="0" anchor="ctr"/>
           <a:lstStyle/>
           <a:p>
             <a:pPr algn="ctr"/>
-            <a:r>
-              <a:rPr sz="1150" b="1">
-                <a:solidFill>
-                  <a:srgbClr val="FFFFFF"/>
-                </a:solidFill>
-                <a:latin typeface="Calibri"/>
-              </a:rPr>
-              <a:t>Dashboard</a:t>
-            </a:r>
-          </a:p>
-          <a:p>
-            <a:pPr algn="ctr"/>
-            <a:r>
-              <a:rPr sz="950">
-                <a:solidFill>
-                  <a:srgbClr val="E7EEFA"/>
-                </a:solidFill>
-                <a:latin typeface="Calibri"/>
-              </a:rPr>
-              <a:t>Balance overview</a:t>
-            </a:r>
-          </a:p>
-        </p:txBody>
-      </p:sp>
-      <p:sp>
-        <p:nvSpPr>
-          <p:cNvPr id="12" name="Right Arrow 11"/>
+          </a:p>
+        </p:txBody>
+      </p:sp>
+      <p:sp>
+        <p:nvSpPr>
+          <p:cNvPr id="12" name="Rounded Rectangle 11"/>
           <p:cNvSpPr/>
           <p:nvPr/>
         </p:nvSpPr>
         <p:spPr>
           <a:xfrm>
-            <a:off x="4221327" y="1463039"/>
-            <a:ext cx="237744" cy="237744"/>
-          </a:xfrm>
-          <a:prstGeom prst="rightArrow">
-            <a:avLst/>
+            <a:off x="2721711" y="1417320"/>
+            <a:ext cx="1481328" cy="566928"/>
+          </a:xfrm>
+          <a:prstGeom prst="roundRect">
+            <a:avLst>
+              <a:gd name="adj" fmla="val 50000"/>
+            </a:avLst>
           </a:prstGeom>
           <a:solidFill>
-            <a:srgbClr val="5A6273"/>
+            <a:srgbClr val="22C55E"/>
           </a:solidFill>
           <a:ln>
             <a:noFill/>
@@ -5887,31 +6008,50 @@
           </a:fontRef>
         </p:style>
         <p:txBody>
-          <a:bodyPr rtlCol="0" anchor="ctr"/>
+          <a:bodyPr rtlCol="0" anchor="ctr" wrap="square" lIns="25400" rIns="25400"/>
           <a:lstStyle/>
           <a:p>
             <a:pPr algn="ctr"/>
-          </a:p>
-        </p:txBody>
-      </p:sp>
-      <p:sp>
-        <p:nvSpPr>
-          <p:cNvPr id="13" name="Rounded Rectangle 12"/>
+            <a:r>
+              <a:rPr sz="1150" b="1">
+                <a:solidFill>
+                  <a:srgbClr val="FFFFFF"/>
+                </a:solidFill>
+                <a:latin typeface="Calibri"/>
+              </a:rPr>
+              <a:t>Dashboard</a:t>
+            </a:r>
+          </a:p>
+          <a:p>
+            <a:pPr algn="ctr"/>
+            <a:r>
+              <a:rPr sz="950">
+                <a:solidFill>
+                  <a:srgbClr val="E4E7FF"/>
+                </a:solidFill>
+                <a:latin typeface="Calibri"/>
+              </a:rPr>
+              <a:t>Balance overview</a:t>
+            </a:r>
+          </a:p>
+        </p:txBody>
+      </p:sp>
+      <p:sp>
+        <p:nvSpPr>
+          <p:cNvPr id="13" name="Right Arrow 12"/>
           <p:cNvSpPr/>
           <p:nvPr/>
         </p:nvSpPr>
         <p:spPr>
           <a:xfrm>
-            <a:off x="4477359" y="1298448"/>
-            <a:ext cx="1481328" cy="566928"/>
-          </a:xfrm>
-          <a:prstGeom prst="roundRect">
-            <a:avLst>
-              <a:gd name="adj" fmla="val 12000"/>
-            </a:avLst>
+            <a:off x="4221327" y="1581912"/>
+            <a:ext cx="237744" cy="237744"/>
+          </a:xfrm>
+          <a:prstGeom prst="rightArrow">
+            <a:avLst/>
           </a:prstGeom>
           <a:solidFill>
-            <a:srgbClr val="003092"/>
+            <a:srgbClr val="9CA3C7"/>
           </a:solidFill>
           <a:ln>
             <a:noFill/>
@@ -5933,51 +6073,31 @@
           </a:fontRef>
         </p:style>
         <p:txBody>
-          <a:bodyPr rtlCol="0" anchor="ctr" wrap="square" lIns="25400" rIns="25400"/>
+          <a:bodyPr rtlCol="0" anchor="ctr"/>
           <a:lstStyle/>
           <a:p>
             <a:pPr algn="ctr"/>
-            <a:r>
-              <a:rPr sz="1150" b="1">
-                <a:solidFill>
-                  <a:srgbClr val="FFFFFF"/>
-                </a:solidFill>
-                <a:latin typeface="Calibri"/>
-              </a:rPr>
-              <a:t>Add
-Transaction</a:t>
-            </a:r>
-          </a:p>
-          <a:p>
-            <a:pPr algn="ctr"/>
-            <a:r>
-              <a:rPr sz="950">
-                <a:solidFill>
-                  <a:srgbClr val="E7EEFA"/>
-                </a:solidFill>
-                <a:latin typeface="Calibri"/>
-              </a:rPr>
-              <a:t>Manual/OCR/Voice</a:t>
-            </a:r>
-          </a:p>
-        </p:txBody>
-      </p:sp>
-      <p:sp>
-        <p:nvSpPr>
-          <p:cNvPr id="14" name="Right Arrow 13"/>
+          </a:p>
+        </p:txBody>
+      </p:sp>
+      <p:sp>
+        <p:nvSpPr>
+          <p:cNvPr id="14" name="Rounded Rectangle 13"/>
           <p:cNvSpPr/>
           <p:nvPr/>
         </p:nvSpPr>
         <p:spPr>
           <a:xfrm>
-            <a:off x="5976975" y="1463039"/>
-            <a:ext cx="237744" cy="237744"/>
-          </a:xfrm>
-          <a:prstGeom prst="rightArrow">
-            <a:avLst/>
+            <a:off x="4477359" y="1417320"/>
+            <a:ext cx="1481328" cy="566928"/>
+          </a:xfrm>
+          <a:prstGeom prst="roundRect">
+            <a:avLst>
+              <a:gd name="adj" fmla="val 50000"/>
+            </a:avLst>
           </a:prstGeom>
           <a:solidFill>
-            <a:srgbClr val="5A6273"/>
+            <a:srgbClr val="F59E0B"/>
           </a:solidFill>
           <a:ln>
             <a:noFill/>
@@ -5999,31 +6119,51 @@
           </a:fontRef>
         </p:style>
         <p:txBody>
-          <a:bodyPr rtlCol="0" anchor="ctr"/>
+          <a:bodyPr rtlCol="0" anchor="ctr" wrap="square" lIns="25400" rIns="25400"/>
           <a:lstStyle/>
           <a:p>
             <a:pPr algn="ctr"/>
-          </a:p>
-        </p:txBody>
-      </p:sp>
-      <p:sp>
-        <p:nvSpPr>
-          <p:cNvPr id="15" name="Rounded Rectangle 14"/>
+            <a:r>
+              <a:rPr sz="1150" b="1">
+                <a:solidFill>
+                  <a:srgbClr val="FFFFFF"/>
+                </a:solidFill>
+                <a:latin typeface="Calibri"/>
+              </a:rPr>
+              <a:t>Add
+Transaction</a:t>
+            </a:r>
+          </a:p>
+          <a:p>
+            <a:pPr algn="ctr"/>
+            <a:r>
+              <a:rPr sz="950">
+                <a:solidFill>
+                  <a:srgbClr val="E4E7FF"/>
+                </a:solidFill>
+                <a:latin typeface="Calibri"/>
+              </a:rPr>
+              <a:t>Manual/OCR/Voice</a:t>
+            </a:r>
+          </a:p>
+        </p:txBody>
+      </p:sp>
+      <p:sp>
+        <p:nvSpPr>
+          <p:cNvPr id="15" name="Right Arrow 14"/>
           <p:cNvSpPr/>
           <p:nvPr/>
         </p:nvSpPr>
         <p:spPr>
           <a:xfrm>
-            <a:off x="6233007" y="1298448"/>
-            <a:ext cx="1481328" cy="566928"/>
-          </a:xfrm>
-          <a:prstGeom prst="roundRect">
-            <a:avLst>
-              <a:gd name="adj" fmla="val 12000"/>
-            </a:avLst>
+            <a:off x="5976975" y="1581912"/>
+            <a:ext cx="237744" cy="237744"/>
+          </a:xfrm>
+          <a:prstGeom prst="rightArrow">
+            <a:avLst/>
           </a:prstGeom>
           <a:solidFill>
-            <a:srgbClr val="EF7F1B"/>
+            <a:srgbClr val="9CA3C7"/>
           </a:solidFill>
           <a:ln>
             <a:noFill/>
@@ -6045,51 +6185,31 @@
           </a:fontRef>
         </p:style>
         <p:txBody>
-          <a:bodyPr rtlCol="0" anchor="ctr" wrap="square" lIns="25400" rIns="25400"/>
+          <a:bodyPr rtlCol="0" anchor="ctr"/>
           <a:lstStyle/>
           <a:p>
             <a:pPr algn="ctr"/>
-            <a:r>
-              <a:rPr sz="1150" b="1">
-                <a:solidFill>
-                  <a:srgbClr val="FFFFFF"/>
-                </a:solidFill>
-                <a:latin typeface="Calibri"/>
-              </a:rPr>
-              <a:t>Budget &amp;
-Goals</a:t>
-            </a:r>
-          </a:p>
-          <a:p>
-            <a:pPr algn="ctr"/>
-            <a:r>
-              <a:rPr sz="950">
-                <a:solidFill>
-                  <a:srgbClr val="E7EEFA"/>
-                </a:solidFill>
-                <a:latin typeface="Calibri"/>
-              </a:rPr>
-              <a:t>Category limits</a:t>
-            </a:r>
-          </a:p>
-        </p:txBody>
-      </p:sp>
-      <p:sp>
-        <p:nvSpPr>
-          <p:cNvPr id="16" name="Right Arrow 15"/>
+          </a:p>
+        </p:txBody>
+      </p:sp>
+      <p:sp>
+        <p:nvSpPr>
+          <p:cNvPr id="16" name="Rounded Rectangle 15"/>
           <p:cNvSpPr/>
           <p:nvPr/>
         </p:nvSpPr>
         <p:spPr>
           <a:xfrm>
-            <a:off x="7732623" y="1463039"/>
-            <a:ext cx="237744" cy="237744"/>
-          </a:xfrm>
-          <a:prstGeom prst="rightArrow">
-            <a:avLst/>
+            <a:off x="6233007" y="1417320"/>
+            <a:ext cx="1481328" cy="566928"/>
+          </a:xfrm>
+          <a:prstGeom prst="roundRect">
+            <a:avLst>
+              <a:gd name="adj" fmla="val 50000"/>
+            </a:avLst>
           </a:prstGeom>
           <a:solidFill>
-            <a:srgbClr val="5A6273"/>
+            <a:srgbClr val="6366F1"/>
           </a:solidFill>
           <a:ln>
             <a:noFill/>
@@ -6111,31 +6231,51 @@
           </a:fontRef>
         </p:style>
         <p:txBody>
-          <a:bodyPr rtlCol="0" anchor="ctr"/>
+          <a:bodyPr rtlCol="0" anchor="ctr" wrap="square" lIns="25400" rIns="25400"/>
           <a:lstStyle/>
           <a:p>
             <a:pPr algn="ctr"/>
-          </a:p>
-        </p:txBody>
-      </p:sp>
-      <p:sp>
-        <p:nvSpPr>
-          <p:cNvPr id="17" name="Rounded Rectangle 16"/>
+            <a:r>
+              <a:rPr sz="1150" b="1">
+                <a:solidFill>
+                  <a:srgbClr val="FFFFFF"/>
+                </a:solidFill>
+                <a:latin typeface="Calibri"/>
+              </a:rPr>
+              <a:t>Budget &amp;
+Goals</a:t>
+            </a:r>
+          </a:p>
+          <a:p>
+            <a:pPr algn="ctr"/>
+            <a:r>
+              <a:rPr sz="950">
+                <a:solidFill>
+                  <a:srgbClr val="E4E7FF"/>
+                </a:solidFill>
+                <a:latin typeface="Calibri"/>
+              </a:rPr>
+              <a:t>Category limits</a:t>
+            </a:r>
+          </a:p>
+        </p:txBody>
+      </p:sp>
+      <p:sp>
+        <p:nvSpPr>
+          <p:cNvPr id="17" name="Right Arrow 16"/>
           <p:cNvSpPr/>
           <p:nvPr/>
         </p:nvSpPr>
         <p:spPr>
           <a:xfrm>
-            <a:off x="7988655" y="1298448"/>
-            <a:ext cx="1481328" cy="566928"/>
-          </a:xfrm>
-          <a:prstGeom prst="roundRect">
-            <a:avLst>
-              <a:gd name="adj" fmla="val 12000"/>
-            </a:avLst>
+            <a:off x="7732623" y="1581912"/>
+            <a:ext cx="237744" cy="237744"/>
+          </a:xfrm>
+          <a:prstGeom prst="rightArrow">
+            <a:avLst/>
           </a:prstGeom>
           <a:solidFill>
-            <a:srgbClr val="003092"/>
+            <a:srgbClr val="9CA3C7"/>
           </a:solidFill>
           <a:ln>
             <a:noFill/>
@@ -6157,50 +6297,31 @@
           </a:fontRef>
         </p:style>
         <p:txBody>
-          <a:bodyPr rtlCol="0" anchor="ctr" wrap="square" lIns="25400" rIns="25400"/>
+          <a:bodyPr rtlCol="0" anchor="ctr"/>
           <a:lstStyle/>
           <a:p>
             <a:pPr algn="ctr"/>
-            <a:r>
-              <a:rPr sz="1150" b="1">
-                <a:solidFill>
-                  <a:srgbClr val="FFFFFF"/>
-                </a:solidFill>
-                <a:latin typeface="Calibri"/>
-              </a:rPr>
-              <a:t>Analytics</a:t>
-            </a:r>
-          </a:p>
-          <a:p>
-            <a:pPr algn="ctr"/>
-            <a:r>
-              <a:rPr sz="950">
-                <a:solidFill>
-                  <a:srgbClr val="E7EEFA"/>
-                </a:solidFill>
-                <a:latin typeface="Calibri"/>
-              </a:rPr>
-              <a:t>Recharts trends</a:t>
-            </a:r>
-          </a:p>
-        </p:txBody>
-      </p:sp>
-      <p:sp>
-        <p:nvSpPr>
-          <p:cNvPr id="18" name="Right Arrow 17"/>
+          </a:p>
+        </p:txBody>
+      </p:sp>
+      <p:sp>
+        <p:nvSpPr>
+          <p:cNvPr id="18" name="Rounded Rectangle 17"/>
           <p:cNvSpPr/>
           <p:nvPr/>
         </p:nvSpPr>
         <p:spPr>
           <a:xfrm>
-            <a:off x="9488271" y="1463039"/>
-            <a:ext cx="237744" cy="237744"/>
-          </a:xfrm>
-          <a:prstGeom prst="rightArrow">
-            <a:avLst/>
+            <a:off x="7988655" y="1417320"/>
+            <a:ext cx="1481328" cy="566928"/>
+          </a:xfrm>
+          <a:prstGeom prst="roundRect">
+            <a:avLst>
+              <a:gd name="adj" fmla="val 50000"/>
+            </a:avLst>
           </a:prstGeom>
           <a:solidFill>
-            <a:srgbClr val="5A6273"/>
+            <a:srgbClr val="22C55E"/>
           </a:solidFill>
           <a:ln>
             <a:noFill/>
@@ -6222,31 +6343,50 @@
           </a:fontRef>
         </p:style>
         <p:txBody>
-          <a:bodyPr rtlCol="0" anchor="ctr"/>
+          <a:bodyPr rtlCol="0" anchor="ctr" wrap="square" lIns="25400" rIns="25400"/>
           <a:lstStyle/>
           <a:p>
             <a:pPr algn="ctr"/>
-          </a:p>
-        </p:txBody>
-      </p:sp>
-      <p:sp>
-        <p:nvSpPr>
-          <p:cNvPr id="19" name="Rounded Rectangle 18"/>
+            <a:r>
+              <a:rPr sz="1150" b="1">
+                <a:solidFill>
+                  <a:srgbClr val="FFFFFF"/>
+                </a:solidFill>
+                <a:latin typeface="Calibri"/>
+              </a:rPr>
+              <a:t>Analytics</a:t>
+            </a:r>
+          </a:p>
+          <a:p>
+            <a:pPr algn="ctr"/>
+            <a:r>
+              <a:rPr sz="950">
+                <a:solidFill>
+                  <a:srgbClr val="E4E7FF"/>
+                </a:solidFill>
+                <a:latin typeface="Calibri"/>
+              </a:rPr>
+              <a:t>Recharts trends</a:t>
+            </a:r>
+          </a:p>
+        </p:txBody>
+      </p:sp>
+      <p:sp>
+        <p:nvSpPr>
+          <p:cNvPr id="19" name="Right Arrow 18"/>
           <p:cNvSpPr/>
           <p:nvPr/>
         </p:nvSpPr>
         <p:spPr>
           <a:xfrm>
-            <a:off x="9744303" y="1298448"/>
-            <a:ext cx="1481328" cy="566928"/>
-          </a:xfrm>
-          <a:prstGeom prst="roundRect">
-            <a:avLst>
-              <a:gd name="adj" fmla="val 12000"/>
-            </a:avLst>
+            <a:off x="9488271" y="1581912"/>
+            <a:ext cx="237744" cy="237744"/>
+          </a:xfrm>
+          <a:prstGeom prst="rightArrow">
+            <a:avLst/>
           </a:prstGeom>
           <a:solidFill>
-            <a:srgbClr val="01ADEF"/>
+            <a:srgbClr val="9CA3C7"/>
           </a:solidFill>
           <a:ln>
             <a:noFill/>
@@ -6268,6 +6408,52 @@
           </a:fontRef>
         </p:style>
         <p:txBody>
+          <a:bodyPr rtlCol="0" anchor="ctr"/>
+          <a:lstStyle/>
+          <a:p>
+            <a:pPr algn="ctr"/>
+          </a:p>
+        </p:txBody>
+      </p:sp>
+      <p:sp>
+        <p:nvSpPr>
+          <p:cNvPr id="20" name="Rounded Rectangle 19"/>
+          <p:cNvSpPr/>
+          <p:nvPr/>
+        </p:nvSpPr>
+        <p:spPr>
+          <a:xfrm>
+            <a:off x="9744303" y="1417320"/>
+            <a:ext cx="1481328" cy="566928"/>
+          </a:xfrm>
+          <a:prstGeom prst="roundRect">
+            <a:avLst>
+              <a:gd name="adj" fmla="val 50000"/>
+            </a:avLst>
+          </a:prstGeom>
+          <a:solidFill>
+            <a:srgbClr val="F59E0B"/>
+          </a:solidFill>
+          <a:ln>
+            <a:noFill/>
+          </a:ln>
+          <a:effectLst/>
+        </p:spPr>
+        <p:style>
+          <a:lnRef idx="1">
+            <a:schemeClr val="accent1"/>
+          </a:lnRef>
+          <a:fillRef idx="3">
+            <a:schemeClr val="accent1"/>
+          </a:fillRef>
+          <a:effectRef idx="2">
+            <a:schemeClr val="accent1"/>
+          </a:effectRef>
+          <a:fontRef idx="minor">
+            <a:schemeClr val="lt1"/>
+          </a:fontRef>
+        </p:style>
+        <p:txBody>
           <a:bodyPr rtlCol="0" anchor="ctr" wrap="square" lIns="25400" rIns="25400"/>
           <a:lstStyle/>
           <a:p>
@@ -6287,7 +6473,7 @@
             <a:r>
               <a:rPr sz="950">
                 <a:solidFill>
-                  <a:srgbClr val="E7EEFA"/>
+                  <a:srgbClr val="E4E7FF"/>
                 </a:solidFill>
                 <a:latin typeface="Calibri"/>
               </a:rPr>
@@ -6298,13 +6484,13 @@
       </p:sp>
       <p:sp>
         <p:nvSpPr>
-          <p:cNvPr id="20" name="TextBox 19"/>
+          <p:cNvPr id="21" name="TextBox 20"/>
           <p:cNvSpPr txBox="1"/>
           <p:nvPr/>
         </p:nvSpPr>
         <p:spPr>
           <a:xfrm>
-            <a:off x="502920" y="2148840"/>
+            <a:off x="502920" y="2331720"/>
             <a:ext cx="11247120" cy="4023360"/>
           </a:xfrm>
           <a:prstGeom prst="rect">
@@ -6313,20 +6499,29 @@
           <a:noFill/>
         </p:spPr>
         <p:txBody>
-          <a:bodyPr wrap="square" lIns="0" rIns="0" tIns="0" bIns="0">
+          <a:bodyPr wrap="square" lIns="0" rIns="0">
             <a:spAutoFit/>
           </a:bodyPr>
           <a:lstStyle/>
           <a:p>
-            <a:pPr algn="l">
-              <a:lnSpc>
-                <a:spcPct val="135000"/>
-              </a:lnSpc>
+            <a:pPr>
+              <a:spcAft>
+                <a:spcPts val="800"/>
+              </a:spcAft>
             </a:pPr>
             <a:r>
               <a:rPr sz="1400" b="1">
                 <a:solidFill>
-                  <a:srgbClr val="003092"/>
+                  <a:srgbClr val="F59E0B"/>
+                </a:solidFill>
+                <a:latin typeface="Calibri"/>
+              </a:rPr>
+              <a:t>▸  </a:t>
+            </a:r>
+            <a:r>
+              <a:rPr sz="1400" b="1">
+                <a:solidFill>
+                  <a:srgbClr val="F1F3FF"/>
                 </a:solidFill>
                 <a:latin typeface="Calibri"/>
               </a:rPr>
@@ -6335,7 +6530,7 @@
             <a:r>
               <a:rPr sz="1400" b="0">
                 <a:solidFill>
-                  <a:srgbClr val="202433"/>
+                  <a:srgbClr val="9CA3C7"/>
                 </a:solidFill>
                 <a:latin typeface="Calibri"/>
               </a:rPr>
@@ -6343,15 +6538,24 @@
             </a:r>
           </a:p>
           <a:p>
-            <a:pPr algn="l">
-              <a:lnSpc>
-                <a:spcPct val="135000"/>
-              </a:lnSpc>
+            <a:pPr>
+              <a:spcAft>
+                <a:spcPts val="800"/>
+              </a:spcAft>
             </a:pPr>
             <a:r>
               <a:rPr sz="1400" b="1">
                 <a:solidFill>
-                  <a:srgbClr val="003092"/>
+                  <a:srgbClr val="F59E0B"/>
+                </a:solidFill>
+                <a:latin typeface="Calibri"/>
+              </a:rPr>
+              <a:t>▸  </a:t>
+            </a:r>
+            <a:r>
+              <a:rPr sz="1400" b="1">
+                <a:solidFill>
+                  <a:srgbClr val="F1F3FF"/>
                 </a:solidFill>
                 <a:latin typeface="Calibri"/>
               </a:rPr>
@@ -6360,7 +6564,7 @@
             <a:r>
               <a:rPr sz="1400" b="0">
                 <a:solidFill>
-                  <a:srgbClr val="202433"/>
+                  <a:srgbClr val="9CA3C7"/>
                 </a:solidFill>
                 <a:latin typeface="Calibri"/>
               </a:rPr>
@@ -6368,15 +6572,24 @@
             </a:r>
           </a:p>
           <a:p>
-            <a:pPr algn="l">
-              <a:lnSpc>
-                <a:spcPct val="135000"/>
-              </a:lnSpc>
+            <a:pPr>
+              <a:spcAft>
+                <a:spcPts val="800"/>
+              </a:spcAft>
             </a:pPr>
             <a:r>
               <a:rPr sz="1400" b="1">
                 <a:solidFill>
-                  <a:srgbClr val="003092"/>
+                  <a:srgbClr val="F59E0B"/>
+                </a:solidFill>
+                <a:latin typeface="Calibri"/>
+              </a:rPr>
+              <a:t>▸  </a:t>
+            </a:r>
+            <a:r>
+              <a:rPr sz="1400" b="1">
+                <a:solidFill>
+                  <a:srgbClr val="F1F3FF"/>
                 </a:solidFill>
                 <a:latin typeface="Calibri"/>
               </a:rPr>
@@ -6385,7 +6598,7 @@
             <a:r>
               <a:rPr sz="1400" b="0">
                 <a:solidFill>
-                  <a:srgbClr val="202433"/>
+                  <a:srgbClr val="9CA3C7"/>
                 </a:solidFill>
                 <a:latin typeface="Calibri"/>
               </a:rPr>
@@ -6393,15 +6606,24 @@
             </a:r>
           </a:p>
           <a:p>
-            <a:pPr algn="l">
-              <a:lnSpc>
-                <a:spcPct val="135000"/>
-              </a:lnSpc>
+            <a:pPr>
+              <a:spcAft>
+                <a:spcPts val="800"/>
+              </a:spcAft>
             </a:pPr>
             <a:r>
               <a:rPr sz="1400" b="1">
                 <a:solidFill>
-                  <a:srgbClr val="003092"/>
+                  <a:srgbClr val="F59E0B"/>
+                </a:solidFill>
+                <a:latin typeface="Calibri"/>
+              </a:rPr>
+              <a:t>▸  </a:t>
+            </a:r>
+            <a:r>
+              <a:rPr sz="1400" b="1">
+                <a:solidFill>
+                  <a:srgbClr val="F1F3FF"/>
                 </a:solidFill>
                 <a:latin typeface="Calibri"/>
               </a:rPr>
@@ -6410,7 +6632,7 @@
             <a:r>
               <a:rPr sz="1400" b="0">
                 <a:solidFill>
-                  <a:srgbClr val="202433"/>
+                  <a:srgbClr val="9CA3C7"/>
                 </a:solidFill>
                 <a:latin typeface="Calibri"/>
               </a:rPr>
@@ -6418,15 +6640,24 @@
             </a:r>
           </a:p>
           <a:p>
-            <a:pPr algn="l">
-              <a:lnSpc>
-                <a:spcPct val="135000"/>
-              </a:lnSpc>
+            <a:pPr>
+              <a:spcAft>
+                <a:spcPts val="800"/>
+              </a:spcAft>
             </a:pPr>
             <a:r>
               <a:rPr sz="1400" b="1">
                 <a:solidFill>
-                  <a:srgbClr val="003092"/>
+                  <a:srgbClr val="F59E0B"/>
+                </a:solidFill>
+                <a:latin typeface="Calibri"/>
+              </a:rPr>
+              <a:t>▸  </a:t>
+            </a:r>
+            <a:r>
+              <a:rPr sz="1400" b="1">
+                <a:solidFill>
+                  <a:srgbClr val="F1F3FF"/>
                 </a:solidFill>
                 <a:latin typeface="Calibri"/>
               </a:rPr>
@@ -6435,7 +6666,7 @@
             <a:r>
               <a:rPr sz="1400" b="0">
                 <a:solidFill>
-                  <a:srgbClr val="202433"/>
+                  <a:srgbClr val="9CA3C7"/>
                 </a:solidFill>
                 <a:latin typeface="Calibri"/>
               </a:rPr>
@@ -6471,13 +6702,13 @@
         <p:spPr>
           <a:xfrm>
             <a:off x="0" y="0"/>
-            <a:ext cx="12191695" cy="1051560"/>
+            <a:ext cx="12191695" cy="6858000"/>
           </a:xfrm>
           <a:prstGeom prst="rect">
             <a:avLst/>
           </a:prstGeom>
           <a:solidFill>
-            <a:srgbClr val="003092"/>
+            <a:srgbClr val="0F1120"/>
           </a:solidFill>
           <a:ln>
             <a:noFill/>
@@ -6514,14 +6745,14 @@
         </p:nvSpPr>
         <p:spPr>
           <a:xfrm>
-            <a:off x="0" y="1051560"/>
-            <a:ext cx="12191695" cy="40233"/>
+            <a:off x="0" y="0"/>
+            <a:ext cx="12191695" cy="82296"/>
           </a:xfrm>
           <a:prstGeom prst="rect">
             <a:avLst/>
           </a:prstGeom>
           <a:solidFill>
-            <a:srgbClr val="EF7F1B"/>
+            <a:srgbClr val="6366F1"/>
           </a:solidFill>
           <a:ln>
             <a:noFill/>
@@ -6558,7 +6789,7 @@
         </p:nvSpPr>
         <p:spPr>
           <a:xfrm>
-            <a:off x="502920" y="118872"/>
+            <a:off x="502920" y="320040"/>
             <a:ext cx="8686800" cy="292608"/>
           </a:xfrm>
           <a:prstGeom prst="rect">
@@ -6576,7 +6807,7 @@
             <a:r>
               <a:rPr sz="1250" b="1">
                 <a:solidFill>
-                  <a:srgbClr val="01ADEF"/>
+                  <a:srgbClr val="6366F1"/>
                 </a:solidFill>
                 <a:latin typeface="Calibri"/>
               </a:rPr>
@@ -6593,8 +6824,8 @@
         </p:nvSpPr>
         <p:spPr>
           <a:xfrm>
-            <a:off x="502920" y="384048"/>
-            <a:ext cx="8778240" cy="621792"/>
+            <a:off x="502920" y="603504"/>
+            <a:ext cx="8778240" cy="548640"/>
           </a:xfrm>
           <a:prstGeom prst="rect">
             <a:avLst/>
@@ -6609,9 +6840,9 @@
           <a:p>
             <a:pPr algn="l"/>
             <a:r>
-              <a:rPr sz="2500" b="1">
-                <a:solidFill>
-                  <a:srgbClr val="FFFFFF"/>
+              <a:rPr sz="2400" b="1">
+                <a:solidFill>
+                  <a:srgbClr val="F1F3FF"/>
                 </a:solidFill>
                 <a:latin typeface="Calibri"/>
               </a:rPr>
@@ -6628,14 +6859,14 @@
         </p:nvSpPr>
         <p:spPr>
           <a:xfrm>
-            <a:off x="0" y="6547104"/>
-            <a:ext cx="12191695" cy="310896"/>
+            <a:off x="0" y="1261872"/>
+            <a:ext cx="12191695" cy="18288"/>
           </a:xfrm>
           <a:prstGeom prst="rect">
             <a:avLst/>
           </a:prstGeom>
           <a:solidFill>
-            <a:srgbClr val="001E5C"/>
+            <a:srgbClr val="353A5C"/>
           </a:solidFill>
           <a:ln>
             <a:noFill/>
@@ -6666,7 +6897,51 @@
       </p:sp>
       <p:sp>
         <p:nvSpPr>
-          <p:cNvPr id="7" name="TextBox 6"/>
+          <p:cNvPr id="7" name="Rectangle 6"/>
+          <p:cNvSpPr/>
+          <p:nvPr/>
+        </p:nvSpPr>
+        <p:spPr>
+          <a:xfrm>
+            <a:off x="0" y="6547104"/>
+            <a:ext cx="12191695" cy="310896"/>
+          </a:xfrm>
+          <a:prstGeom prst="rect">
+            <a:avLst/>
+          </a:prstGeom>
+          <a:solidFill>
+            <a:srgbClr val="090A16"/>
+          </a:solidFill>
+          <a:ln>
+            <a:noFill/>
+          </a:ln>
+          <a:effectLst/>
+        </p:spPr>
+        <p:style>
+          <a:lnRef idx="1">
+            <a:schemeClr val="accent1"/>
+          </a:lnRef>
+          <a:fillRef idx="3">
+            <a:schemeClr val="accent1"/>
+          </a:fillRef>
+          <a:effectRef idx="2">
+            <a:schemeClr val="accent1"/>
+          </a:effectRef>
+          <a:fontRef idx="minor">
+            <a:schemeClr val="lt1"/>
+          </a:fontRef>
+        </p:style>
+        <p:txBody>
+          <a:bodyPr rtlCol="0" anchor="ctr"/>
+          <a:lstStyle/>
+          <a:p>
+            <a:pPr algn="ctr"/>
+          </a:p>
+        </p:txBody>
+      </p:sp>
+      <p:sp>
+        <p:nvSpPr>
+          <p:cNvPr id="8" name="TextBox 7"/>
           <p:cNvSpPr txBox="1"/>
           <p:nvPr/>
         </p:nvSpPr>
@@ -6690,18 +6965,18 @@
             <a:r>
               <a:rPr sz="950" b="0">
                 <a:solidFill>
-                  <a:srgbClr val="C9D6EE"/>
-                </a:solidFill>
-                <a:latin typeface="Calibri"/>
-              </a:rPr>
-              <a:t>M.Tech Mini Project  |  [Student Name]  |  [College Name]</a:t>
-            </a:r>
-          </a:p>
-        </p:txBody>
-      </p:sp>
-      <p:sp>
-        <p:nvSpPr>
-          <p:cNvPr id="8" name="TextBox 7"/>
+                  <a:srgbClr val="9CA3C7"/>
+                </a:solidFill>
+                <a:latin typeface="Calibri"/>
+              </a:rPr>
+              <a:t>FinGenius AI  •  M.Tech Mini Project  •  [Student Name]  •  [College Name]</a:t>
+            </a:r>
+          </a:p>
+        </p:txBody>
+      </p:sp>
+      <p:sp>
+        <p:nvSpPr>
+          <p:cNvPr id="9" name="TextBox 8"/>
           <p:cNvSpPr txBox="1"/>
           <p:nvPr/>
         </p:nvSpPr>
@@ -6725,7 +7000,7 @@
             <a:r>
               <a:rPr sz="950" b="1">
                 <a:solidFill>
-                  <a:srgbClr val="FFFFFF"/>
+                  <a:srgbClr val="6366F1"/>
                 </a:solidFill>
                 <a:latin typeface="Calibri"/>
               </a:rPr>
@@ -6736,7 +7011,7 @@
       </p:sp>
       <p:sp>
         <p:nvSpPr>
-          <p:cNvPr id="9" name="TextBox 8"/>
+          <p:cNvPr id="10" name="TextBox 9"/>
           <p:cNvSpPr txBox="1"/>
           <p:nvPr/>
         </p:nvSpPr>
@@ -6760,7 +7035,7 @@
             <a:r>
               <a:rPr sz="1400" b="1">
                 <a:solidFill>
-                  <a:srgbClr val="202433"/>
+                  <a:srgbClr val="F1F3FF"/>
                 </a:solidFill>
                 <a:latin typeface="Calibri"/>
               </a:rPr>
@@ -6771,7 +7046,7 @@
       </p:sp>
       <p:graphicFrame>
         <p:nvGraphicFramePr>
-          <p:cNvPr id="10" name="Table 9"/>
+          <p:cNvPr id="11" name="Table 10"/>
           <p:cNvGraphicFramePr>
             <a:graphicFrameLocks noGrp="1"/>
           </p:cNvGraphicFramePr>
@@ -6810,7 +7085,7 @@
                   </a:txBody>
                   <a:tcPr marT="38100" marB="38100" anchor="ctr">
                     <a:solidFill>
-                      <a:srgbClr val="003092"/>
+                      <a:srgbClr val="6366F1"/>
                     </a:solidFill>
                   </a:tcPr>
                 </a:tc>
@@ -6832,7 +7107,7 @@
                   </a:txBody>
                   <a:tcPr marT="38100" marB="38100" anchor="ctr">
                     <a:solidFill>
-                      <a:srgbClr val="003092"/>
+                      <a:srgbClr val="6366F1"/>
                     </a:solidFill>
                   </a:tcPr>
                 </a:tc>
@@ -6846,7 +7121,7 @@
                       <a:r>
                         <a:rPr sz="1150">
                           <a:solidFill>
-                            <a:srgbClr val="202433"/>
+                            <a:srgbClr val="F1F3FF"/>
                           </a:solidFill>
                           <a:latin typeface="Calibri"/>
                         </a:rPr>
@@ -6856,7 +7131,7 @@
                   </a:txBody>
                   <a:tcPr marT="38100" marB="38100" anchor="ctr">
                     <a:solidFill>
-                      <a:srgbClr val="FFFFFF"/>
+                      <a:srgbClr val="1A1D33"/>
                     </a:solidFill>
                   </a:tcPr>
                 </a:tc>
@@ -6868,7 +7143,7 @@
                       <a:r>
                         <a:rPr sz="1150">
                           <a:solidFill>
-                            <a:srgbClr val="202433"/>
+                            <a:srgbClr val="F1F3FF"/>
                           </a:solidFill>
                           <a:latin typeface="Calibri"/>
                         </a:rPr>
@@ -6878,7 +7153,7 @@
                   </a:txBody>
                   <a:tcPr marT="38100" marB="38100" anchor="ctr">
                     <a:solidFill>
-                      <a:srgbClr val="FFFFFF"/>
+                      <a:srgbClr val="1A1D33"/>
                     </a:solidFill>
                   </a:tcPr>
                 </a:tc>
@@ -6892,7 +7167,7 @@
                       <a:r>
                         <a:rPr sz="1150">
                           <a:solidFill>
-                            <a:srgbClr val="202433"/>
+                            <a:srgbClr val="F1F3FF"/>
                           </a:solidFill>
                           <a:latin typeface="Calibri"/>
                         </a:rPr>
@@ -6902,7 +7177,7 @@
                   </a:txBody>
                   <a:tcPr marT="38100" marB="38100" anchor="ctr">
                     <a:solidFill>
-                      <a:srgbClr val="EEF4FC"/>
+                      <a:srgbClr val="20233F"/>
                     </a:solidFill>
                   </a:tcPr>
                 </a:tc>
@@ -6914,7 +7189,7 @@
                       <a:r>
                         <a:rPr sz="1150">
                           <a:solidFill>
-                            <a:srgbClr val="202433"/>
+                            <a:srgbClr val="F1F3FF"/>
                           </a:solidFill>
                           <a:latin typeface="Calibri"/>
                         </a:rPr>
@@ -6924,7 +7199,7 @@
                   </a:txBody>
                   <a:tcPr marT="38100" marB="38100" anchor="ctr">
                     <a:solidFill>
-                      <a:srgbClr val="EEF4FC"/>
+                      <a:srgbClr val="20233F"/>
                     </a:solidFill>
                   </a:tcPr>
                 </a:tc>
@@ -6938,7 +7213,7 @@
                       <a:r>
                         <a:rPr sz="1150">
                           <a:solidFill>
-                            <a:srgbClr val="202433"/>
+                            <a:srgbClr val="F1F3FF"/>
                           </a:solidFill>
                           <a:latin typeface="Calibri"/>
                         </a:rPr>
@@ -6948,7 +7223,7 @@
                   </a:txBody>
                   <a:tcPr marT="38100" marB="38100" anchor="ctr">
                     <a:solidFill>
-                      <a:srgbClr val="FFFFFF"/>
+                      <a:srgbClr val="1A1D33"/>
                     </a:solidFill>
                   </a:tcPr>
                 </a:tc>
@@ -6960,7 +7235,7 @@
                       <a:r>
                         <a:rPr sz="1150">
                           <a:solidFill>
-                            <a:srgbClr val="202433"/>
+                            <a:srgbClr val="F1F3FF"/>
                           </a:solidFill>
                           <a:latin typeface="Calibri"/>
                         </a:rPr>
@@ -6970,7 +7245,7 @@
                   </a:txBody>
                   <a:tcPr marT="38100" marB="38100" anchor="ctr">
                     <a:solidFill>
-                      <a:srgbClr val="FFFFFF"/>
+                      <a:srgbClr val="1A1D33"/>
                     </a:solidFill>
                   </a:tcPr>
                 </a:tc>
@@ -6984,7 +7259,7 @@
                       <a:r>
                         <a:rPr sz="1150">
                           <a:solidFill>
-                            <a:srgbClr val="202433"/>
+                            <a:srgbClr val="F1F3FF"/>
                           </a:solidFill>
                           <a:latin typeface="Calibri"/>
                         </a:rPr>
@@ -6994,7 +7269,7 @@
                   </a:txBody>
                   <a:tcPr marT="38100" marB="38100" anchor="ctr">
                     <a:solidFill>
-                      <a:srgbClr val="EEF4FC"/>
+                      <a:srgbClr val="20233F"/>
                     </a:solidFill>
                   </a:tcPr>
                 </a:tc>
@@ -7006,7 +7281,7 @@
                       <a:r>
                         <a:rPr sz="1150">
                           <a:solidFill>
-                            <a:srgbClr val="202433"/>
+                            <a:srgbClr val="F1F3FF"/>
                           </a:solidFill>
                           <a:latin typeface="Calibri"/>
                         </a:rPr>
@@ -7016,7 +7291,7 @@
                   </a:txBody>
                   <a:tcPr marT="38100" marB="38100" anchor="ctr">
                     <a:solidFill>
-                      <a:srgbClr val="EEF4FC"/>
+                      <a:srgbClr val="20233F"/>
                     </a:solidFill>
                   </a:tcPr>
                 </a:tc>
@@ -7030,7 +7305,7 @@
                       <a:r>
                         <a:rPr sz="1150">
                           <a:solidFill>
-                            <a:srgbClr val="202433"/>
+                            <a:srgbClr val="F1F3FF"/>
                           </a:solidFill>
                           <a:latin typeface="Calibri"/>
                         </a:rPr>
@@ -7040,7 +7315,7 @@
                   </a:txBody>
                   <a:tcPr marT="38100" marB="38100" anchor="ctr">
                     <a:solidFill>
-                      <a:srgbClr val="FFFFFF"/>
+                      <a:srgbClr val="1A1D33"/>
                     </a:solidFill>
                   </a:tcPr>
                 </a:tc>
@@ -7052,7 +7327,7 @@
                       <a:r>
                         <a:rPr sz="1150">
                           <a:solidFill>
-                            <a:srgbClr val="202433"/>
+                            <a:srgbClr val="F1F3FF"/>
                           </a:solidFill>
                           <a:latin typeface="Calibri"/>
                         </a:rPr>
@@ -7062,7 +7337,7 @@
                   </a:txBody>
                   <a:tcPr marT="38100" marB="38100" anchor="ctr">
                     <a:solidFill>
-                      <a:srgbClr val="FFFFFF"/>
+                      <a:srgbClr val="1A1D33"/>
                     </a:solidFill>
                   </a:tcPr>
                 </a:tc>
@@ -7076,7 +7351,7 @@
                       <a:r>
                         <a:rPr sz="1150">
                           <a:solidFill>
-                            <a:srgbClr val="202433"/>
+                            <a:srgbClr val="F1F3FF"/>
                           </a:solidFill>
                           <a:latin typeface="Calibri"/>
                         </a:rPr>
@@ -7086,7 +7361,7 @@
                   </a:txBody>
                   <a:tcPr marT="38100" marB="38100" anchor="ctr">
                     <a:solidFill>
-                      <a:srgbClr val="EEF4FC"/>
+                      <a:srgbClr val="20233F"/>
                     </a:solidFill>
                   </a:tcPr>
                 </a:tc>
@@ -7098,7 +7373,7 @@
                       <a:r>
                         <a:rPr sz="1150">
                           <a:solidFill>
-                            <a:srgbClr val="202433"/>
+                            <a:srgbClr val="F1F3FF"/>
                           </a:solidFill>
                           <a:latin typeface="Calibri"/>
                         </a:rPr>
@@ -7108,7 +7383,7 @@
                   </a:txBody>
                   <a:tcPr marT="38100" marB="38100" anchor="ctr">
                     <a:solidFill>
-                      <a:srgbClr val="EEF4FC"/>
+                      <a:srgbClr val="20233F"/>
                     </a:solidFill>
                   </a:tcPr>
                 </a:tc>
@@ -7122,7 +7397,7 @@
                       <a:r>
                         <a:rPr sz="1150">
                           <a:solidFill>
-                            <a:srgbClr val="202433"/>
+                            <a:srgbClr val="F1F3FF"/>
                           </a:solidFill>
                           <a:latin typeface="Calibri"/>
                         </a:rPr>
@@ -7132,7 +7407,7 @@
                   </a:txBody>
                   <a:tcPr marT="38100" marB="38100" anchor="ctr">
                     <a:solidFill>
-                      <a:srgbClr val="FFFFFF"/>
+                      <a:srgbClr val="1A1D33"/>
                     </a:solidFill>
                   </a:tcPr>
                 </a:tc>
@@ -7144,7 +7419,7 @@
                       <a:r>
                         <a:rPr sz="1150">
                           <a:solidFill>
-                            <a:srgbClr val="202433"/>
+                            <a:srgbClr val="F1F3FF"/>
                           </a:solidFill>
                           <a:latin typeface="Calibri"/>
                         </a:rPr>
@@ -7154,7 +7429,7 @@
                   </a:txBody>
                   <a:tcPr marT="38100" marB="38100" anchor="ctr">
                     <a:solidFill>
-                      <a:srgbClr val="FFFFFF"/>
+                      <a:srgbClr val="1A1D33"/>
                     </a:solidFill>
                   </a:tcPr>
                 </a:tc>
@@ -7168,7 +7443,7 @@
                       <a:r>
                         <a:rPr sz="1150">
                           <a:solidFill>
-                            <a:srgbClr val="202433"/>
+                            <a:srgbClr val="F1F3FF"/>
                           </a:solidFill>
                           <a:latin typeface="Calibri"/>
                         </a:rPr>
@@ -7178,7 +7453,7 @@
                   </a:txBody>
                   <a:tcPr marT="38100" marB="38100" anchor="ctr">
                     <a:solidFill>
-                      <a:srgbClr val="EEF4FC"/>
+                      <a:srgbClr val="20233F"/>
                     </a:solidFill>
                   </a:tcPr>
                 </a:tc>
@@ -7190,7 +7465,7 @@
                       <a:r>
                         <a:rPr sz="1150">
                           <a:solidFill>
-                            <a:srgbClr val="202433"/>
+                            <a:srgbClr val="F1F3FF"/>
                           </a:solidFill>
                           <a:latin typeface="Calibri"/>
                         </a:rPr>
@@ -7200,7 +7475,7 @@
                   </a:txBody>
                   <a:tcPr marT="38100" marB="38100" anchor="ctr">
                     <a:solidFill>
-                      <a:srgbClr val="EEF4FC"/>
+                      <a:srgbClr val="20233F"/>
                     </a:solidFill>
                   </a:tcPr>
                 </a:tc>
@@ -7214,7 +7489,7 @@
                       <a:r>
                         <a:rPr sz="1150">
                           <a:solidFill>
-                            <a:srgbClr val="202433"/>
+                            <a:srgbClr val="F1F3FF"/>
                           </a:solidFill>
                           <a:latin typeface="Calibri"/>
                         </a:rPr>
@@ -7224,7 +7499,7 @@
                   </a:txBody>
                   <a:tcPr marT="38100" marB="38100" anchor="ctr">
                     <a:solidFill>
-                      <a:srgbClr val="FFFFFF"/>
+                      <a:srgbClr val="1A1D33"/>
                     </a:solidFill>
                   </a:tcPr>
                 </a:tc>
@@ -7236,7 +7511,7 @@
                       <a:r>
                         <a:rPr sz="1150">
                           <a:solidFill>
-                            <a:srgbClr val="202433"/>
+                            <a:srgbClr val="F1F3FF"/>
                           </a:solidFill>
                           <a:latin typeface="Calibri"/>
                         </a:rPr>
@@ -7246,7 +7521,7 @@
                   </a:txBody>
                   <a:tcPr marT="38100" marB="38100" anchor="ctr">
                     <a:solidFill>
-                      <a:srgbClr val="FFFFFF"/>
+                      <a:srgbClr val="1A1D33"/>
                     </a:solidFill>
                   </a:tcPr>
                 </a:tc>
@@ -7257,22 +7532,70 @@
       </p:graphicFrame>
       <p:sp>
         <p:nvSpPr>
-          <p:cNvPr id="11" name="Rounded Rectangle 10"/>
+          <p:cNvPr id="12" name="Rounded Rectangle 11"/>
           <p:cNvSpPr/>
           <p:nvPr/>
         </p:nvSpPr>
         <p:spPr>
           <a:xfrm>
-            <a:off x="6492240" y="1325880"/>
-            <a:ext cx="5212080" cy="4617720"/>
+            <a:off x="6492240" y="1417320"/>
+            <a:ext cx="5212080" cy="4526280"/>
           </a:xfrm>
           <a:prstGeom prst="roundRect">
             <a:avLst>
-              <a:gd name="adj" fmla="val 6000"/>
+              <a:gd name="adj" fmla="val 5000"/>
             </a:avLst>
           </a:prstGeom>
           <a:solidFill>
-            <a:srgbClr val="FFFFFF"/>
+            <a:srgbClr val="1A1D33"/>
+          </a:solidFill>
+          <a:ln w="12700">
+            <a:solidFill>
+              <a:srgbClr val="353A5C"/>
+            </a:solidFill>
+          </a:ln>
+          <a:effectLst/>
+        </p:spPr>
+        <p:style>
+          <a:lnRef idx="1">
+            <a:schemeClr val="accent1"/>
+          </a:lnRef>
+          <a:fillRef idx="3">
+            <a:schemeClr val="accent1"/>
+          </a:fillRef>
+          <a:effectRef idx="2">
+            <a:schemeClr val="accent1"/>
+          </a:effectRef>
+          <a:fontRef idx="minor">
+            <a:schemeClr val="lt1"/>
+          </a:fontRef>
+        </p:style>
+        <p:txBody>
+          <a:bodyPr rtlCol="0" anchor="ctr"/>
+          <a:lstStyle/>
+          <a:p>
+            <a:pPr algn="ctr"/>
+          </a:p>
+        </p:txBody>
+      </p:sp>
+      <p:sp>
+        <p:nvSpPr>
+          <p:cNvPr id="13" name="Rounded Rectangle 12"/>
+          <p:cNvSpPr/>
+          <p:nvPr/>
+        </p:nvSpPr>
+        <p:spPr>
+          <a:xfrm>
+            <a:off x="6629400" y="1527048"/>
+            <a:ext cx="2331720" cy="310896"/>
+          </a:xfrm>
+          <a:prstGeom prst="roundRect">
+            <a:avLst>
+              <a:gd name="adj" fmla="val 50000"/>
+            </a:avLst>
+          </a:prstGeom>
+          <a:solidFill>
+            <a:srgbClr val="6366F1"/>
           </a:solidFill>
           <a:ln>
             <a:noFill/>
@@ -7294,56 +7617,10 @@
           </a:fontRef>
         </p:style>
         <p:txBody>
-          <a:bodyPr rtlCol="0" anchor="ctr"/>
+          <a:bodyPr rtlCol="0" anchor="ctr" lIns="50800" rIns="50800"/>
           <a:lstStyle/>
           <a:p>
             <a:pPr algn="ctr"/>
-          </a:p>
-        </p:txBody>
-      </p:sp>
-      <p:sp>
-        <p:nvSpPr>
-          <p:cNvPr id="12" name="Rounded Rectangle 11"/>
-          <p:cNvSpPr/>
-          <p:nvPr/>
-        </p:nvSpPr>
-        <p:spPr>
-          <a:xfrm>
-            <a:off x="6629400" y="1435607"/>
-            <a:ext cx="2331720" cy="310896"/>
-          </a:xfrm>
-          <a:prstGeom prst="roundRect">
-            <a:avLst>
-              <a:gd name="adj" fmla="val 25000"/>
-            </a:avLst>
-          </a:prstGeom>
-          <a:solidFill>
-            <a:srgbClr val="003092"/>
-          </a:solidFill>
-          <a:ln>
-            <a:noFill/>
-          </a:ln>
-          <a:effectLst/>
-        </p:spPr>
-        <p:style>
-          <a:lnRef idx="1">
-            <a:schemeClr val="accent1"/>
-          </a:lnRef>
-          <a:fillRef idx="3">
-            <a:schemeClr val="accent1"/>
-          </a:fillRef>
-          <a:effectRef idx="2">
-            <a:schemeClr val="accent1"/>
-          </a:effectRef>
-          <a:fontRef idx="minor">
-            <a:schemeClr val="lt1"/>
-          </a:fontRef>
-        </p:style>
-        <p:txBody>
-          <a:bodyPr rtlCol="0" anchor="ctr" lIns="50800" rIns="50800"/>
-          <a:lstStyle/>
-          <a:p>
-            <a:pPr algn="ctr"/>
             <a:r>
               <a:rPr sz="1050" b="1">
                 <a:solidFill>
@@ -7351,14 +7628,14 @@
                 </a:solidFill>
                 <a:latin typeface="Calibri"/>
               </a:rPr>
-              <a:t>Dashboard - Financial Overview</a:t>
+              <a:t>Dashboard • Financial Overview</a:t>
             </a:r>
           </a:p>
         </p:txBody>
       </p:sp>
       <p:pic>
         <p:nvPicPr>
-          <p:cNvPr id="13" name="Picture 12" descr="Screenshot 2026-07-13 205528.png"/>
+          <p:cNvPr id="14" name="Picture 13" descr="Screenshot 2026-07-13 205528.png"/>
           <p:cNvPicPr>
             <a:picLocks noChangeAspect="1"/>
           </p:cNvPicPr>
@@ -7372,7 +7649,7 @@
         </p:blipFill>
         <p:spPr>
           <a:xfrm>
-            <a:off x="6629400" y="2670812"/>
+            <a:off x="6629400" y="2716532"/>
             <a:ext cx="4937760" cy="2348478"/>
           </a:xfrm>
           <a:prstGeom prst="rect">
@@ -7407,13 +7684,13 @@
         <p:spPr>
           <a:xfrm>
             <a:off x="0" y="0"/>
-            <a:ext cx="12191695" cy="1051560"/>
+            <a:ext cx="12191695" cy="6858000"/>
           </a:xfrm>
           <a:prstGeom prst="rect">
             <a:avLst/>
           </a:prstGeom>
           <a:solidFill>
-            <a:srgbClr val="003092"/>
+            <a:srgbClr val="0F1120"/>
           </a:solidFill>
           <a:ln>
             <a:noFill/>
@@ -7450,14 +7727,14 @@
         </p:nvSpPr>
         <p:spPr>
           <a:xfrm>
-            <a:off x="0" y="1051560"/>
-            <a:ext cx="12191695" cy="40233"/>
+            <a:off x="0" y="0"/>
+            <a:ext cx="12191695" cy="82296"/>
           </a:xfrm>
           <a:prstGeom prst="rect">
             <a:avLst/>
           </a:prstGeom>
           <a:solidFill>
-            <a:srgbClr val="EF7F1B"/>
+            <a:srgbClr val="22C55E"/>
           </a:solidFill>
           <a:ln>
             <a:noFill/>
@@ -7494,7 +7771,7 @@
         </p:nvSpPr>
         <p:spPr>
           <a:xfrm>
-            <a:off x="502920" y="118872"/>
+            <a:off x="502920" y="320040"/>
             <a:ext cx="8686800" cy="292608"/>
           </a:xfrm>
           <a:prstGeom prst="rect">
@@ -7512,7 +7789,7 @@
             <a:r>
               <a:rPr sz="1250" b="1">
                 <a:solidFill>
-                  <a:srgbClr val="01ADEF"/>
+                  <a:srgbClr val="22C55E"/>
                 </a:solidFill>
                 <a:latin typeface="Calibri"/>
               </a:rPr>
@@ -7529,8 +7806,8 @@
         </p:nvSpPr>
         <p:spPr>
           <a:xfrm>
-            <a:off x="502920" y="384048"/>
-            <a:ext cx="8778240" cy="621792"/>
+            <a:off x="502920" y="603504"/>
+            <a:ext cx="8778240" cy="548640"/>
           </a:xfrm>
           <a:prstGeom prst="rect">
             <a:avLst/>
@@ -7545,9 +7822,9 @@
           <a:p>
             <a:pPr algn="l"/>
             <a:r>
-              <a:rPr sz="2500" b="1">
-                <a:solidFill>
-                  <a:srgbClr val="FFFFFF"/>
+              <a:rPr sz="2400" b="1">
+                <a:solidFill>
+                  <a:srgbClr val="F1F3FF"/>
                 </a:solidFill>
                 <a:latin typeface="Calibri"/>
               </a:rPr>
@@ -7564,14 +7841,14 @@
         </p:nvSpPr>
         <p:spPr>
           <a:xfrm>
-            <a:off x="0" y="6547104"/>
-            <a:ext cx="12191695" cy="310896"/>
+            <a:off x="0" y="1261872"/>
+            <a:ext cx="12191695" cy="18288"/>
           </a:xfrm>
           <a:prstGeom prst="rect">
             <a:avLst/>
           </a:prstGeom>
           <a:solidFill>
-            <a:srgbClr val="001E5C"/>
+            <a:srgbClr val="353A5C"/>
           </a:solidFill>
           <a:ln>
             <a:noFill/>
@@ -7602,92 +7879,20 @@
       </p:sp>
       <p:sp>
         <p:nvSpPr>
-          <p:cNvPr id="7" name="TextBox 6"/>
-          <p:cNvSpPr txBox="1"/>
-          <p:nvPr/>
-        </p:nvSpPr>
-        <p:spPr>
-          <a:xfrm>
-            <a:off x="411480" y="6547104"/>
-            <a:ext cx="8686800" cy="238658"/>
+          <p:cNvPr id="7" name="Rectangle 6"/>
+          <p:cNvSpPr/>
+          <p:nvPr/>
+        </p:nvSpPr>
+        <p:spPr>
+          <a:xfrm>
+            <a:off x="0" y="6547104"/>
+            <a:ext cx="12191695" cy="310896"/>
           </a:xfrm>
           <a:prstGeom prst="rect">
             <a:avLst/>
           </a:prstGeom>
-          <a:noFill/>
-        </p:spPr>
-        <p:txBody>
-          <a:bodyPr wrap="square" lIns="0" rIns="0" tIns="0" bIns="0">
-            <a:spAutoFit/>
-          </a:bodyPr>
-          <a:lstStyle/>
-          <a:p>
-            <a:pPr algn="l"/>
-            <a:r>
-              <a:rPr sz="950" b="0">
-                <a:solidFill>
-                  <a:srgbClr val="C9D6EE"/>
-                </a:solidFill>
-                <a:latin typeface="Calibri"/>
-              </a:rPr>
-              <a:t>M.Tech Mini Project  |  [Student Name]  |  [College Name]</a:t>
-            </a:r>
-          </a:p>
-        </p:txBody>
-      </p:sp>
-      <p:sp>
-        <p:nvSpPr>
-          <p:cNvPr id="8" name="TextBox 7"/>
-          <p:cNvSpPr txBox="1"/>
-          <p:nvPr/>
-        </p:nvSpPr>
-        <p:spPr>
-          <a:xfrm>
-            <a:off x="11094415" y="6547104"/>
-            <a:ext cx="685800" cy="310896"/>
-          </a:xfrm>
-          <a:prstGeom prst="rect">
-            <a:avLst/>
-          </a:prstGeom>
-          <a:noFill/>
-        </p:spPr>
-        <p:txBody>
-          <a:bodyPr wrap="square" lIns="0" rIns="0" tIns="0" bIns="0">
-            <a:spAutoFit/>
-          </a:bodyPr>
-          <a:lstStyle/>
-          <a:p>
-            <a:pPr algn="r"/>
-            <a:r>
-              <a:rPr sz="950" b="1">
-                <a:solidFill>
-                  <a:srgbClr val="FFFFFF"/>
-                </a:solidFill>
-                <a:latin typeface="Calibri"/>
-              </a:rPr>
-              <a:t>5</a:t>
-            </a:r>
-          </a:p>
-        </p:txBody>
-      </p:sp>
-      <p:sp>
-        <p:nvSpPr>
-          <p:cNvPr id="9" name="Rounded Rectangle 8"/>
-          <p:cNvSpPr/>
-          <p:nvPr/>
-        </p:nvSpPr>
-        <p:spPr>
-          <a:xfrm>
-            <a:off x="457200" y="1298448"/>
-            <a:ext cx="5394960" cy="4617720"/>
-          </a:xfrm>
-          <a:prstGeom prst="roundRect">
-            <a:avLst>
-              <a:gd name="adj" fmla="val 6000"/>
-            </a:avLst>
-          </a:prstGeom>
           <a:solidFill>
-            <a:srgbClr val="FFFFFF"/>
+            <a:srgbClr val="090A16"/>
           </a:solidFill>
           <a:ln>
             <a:noFill/>
@@ -7718,22 +7923,140 @@
       </p:sp>
       <p:sp>
         <p:nvSpPr>
+          <p:cNvPr id="8" name="TextBox 7"/>
+          <p:cNvSpPr txBox="1"/>
+          <p:nvPr/>
+        </p:nvSpPr>
+        <p:spPr>
+          <a:xfrm>
+            <a:off x="411480" y="6547104"/>
+            <a:ext cx="8686800" cy="238658"/>
+          </a:xfrm>
+          <a:prstGeom prst="rect">
+            <a:avLst/>
+          </a:prstGeom>
+          <a:noFill/>
+        </p:spPr>
+        <p:txBody>
+          <a:bodyPr wrap="square" lIns="0" rIns="0" tIns="0" bIns="0">
+            <a:spAutoFit/>
+          </a:bodyPr>
+          <a:lstStyle/>
+          <a:p>
+            <a:pPr algn="l"/>
+            <a:r>
+              <a:rPr sz="950" b="0">
+                <a:solidFill>
+                  <a:srgbClr val="9CA3C7"/>
+                </a:solidFill>
+                <a:latin typeface="Calibri"/>
+              </a:rPr>
+              <a:t>FinGenius AI  •  M.Tech Mini Project  •  [Student Name]  •  [College Name]</a:t>
+            </a:r>
+          </a:p>
+        </p:txBody>
+      </p:sp>
+      <p:sp>
+        <p:nvSpPr>
+          <p:cNvPr id="9" name="TextBox 8"/>
+          <p:cNvSpPr txBox="1"/>
+          <p:nvPr/>
+        </p:nvSpPr>
+        <p:spPr>
+          <a:xfrm>
+            <a:off x="11094415" y="6547104"/>
+            <a:ext cx="685800" cy="310896"/>
+          </a:xfrm>
+          <a:prstGeom prst="rect">
+            <a:avLst/>
+          </a:prstGeom>
+          <a:noFill/>
+        </p:spPr>
+        <p:txBody>
+          <a:bodyPr wrap="square" lIns="0" rIns="0" tIns="0" bIns="0">
+            <a:spAutoFit/>
+          </a:bodyPr>
+          <a:lstStyle/>
+          <a:p>
+            <a:pPr algn="r"/>
+            <a:r>
+              <a:rPr sz="950" b="1">
+                <a:solidFill>
+                  <a:srgbClr val="22C55E"/>
+                </a:solidFill>
+                <a:latin typeface="Calibri"/>
+              </a:rPr>
+              <a:t>5</a:t>
+            </a:r>
+          </a:p>
+        </p:txBody>
+      </p:sp>
+      <p:sp>
+        <p:nvSpPr>
           <p:cNvPr id="10" name="Rounded Rectangle 9"/>
           <p:cNvSpPr/>
           <p:nvPr/>
         </p:nvSpPr>
         <p:spPr>
           <a:xfrm>
-            <a:off x="594360" y="1408176"/>
-            <a:ext cx="3186684" cy="310896"/>
+            <a:off x="457200" y="1417320"/>
+            <a:ext cx="5394960" cy="4526280"/>
           </a:xfrm>
           <a:prstGeom prst="roundRect">
             <a:avLst>
-              <a:gd name="adj" fmla="val 25000"/>
+              <a:gd name="adj" fmla="val 5000"/>
             </a:avLst>
           </a:prstGeom>
           <a:solidFill>
-            <a:srgbClr val="003092"/>
+            <a:srgbClr val="1A1D33"/>
+          </a:solidFill>
+          <a:ln w="12700">
+            <a:solidFill>
+              <a:srgbClr val="353A5C"/>
+            </a:solidFill>
+          </a:ln>
+          <a:effectLst/>
+        </p:spPr>
+        <p:style>
+          <a:lnRef idx="1">
+            <a:schemeClr val="accent1"/>
+          </a:lnRef>
+          <a:fillRef idx="3">
+            <a:schemeClr val="accent1"/>
+          </a:fillRef>
+          <a:effectRef idx="2">
+            <a:schemeClr val="accent1"/>
+          </a:effectRef>
+          <a:fontRef idx="minor">
+            <a:schemeClr val="lt1"/>
+          </a:fontRef>
+        </p:style>
+        <p:txBody>
+          <a:bodyPr rtlCol="0" anchor="ctr"/>
+          <a:lstStyle/>
+          <a:p>
+            <a:pPr algn="ctr"/>
+          </a:p>
+        </p:txBody>
+      </p:sp>
+      <p:sp>
+        <p:nvSpPr>
+          <p:cNvPr id="11" name="Rounded Rectangle 10"/>
+          <p:cNvSpPr/>
+          <p:nvPr/>
+        </p:nvSpPr>
+        <p:spPr>
+          <a:xfrm>
+            <a:off x="594360" y="1527048"/>
+            <a:ext cx="3186684" cy="310896"/>
+          </a:xfrm>
+          <a:prstGeom prst="roundRect">
+            <a:avLst>
+              <a:gd name="adj" fmla="val 50000"/>
+            </a:avLst>
+          </a:prstGeom>
+          <a:solidFill>
+            <a:srgbClr val="22C55E"/>
           </a:solidFill>
           <a:ln>
             <a:noFill/>
@@ -7773,7 +8096,7 @@
       </p:sp>
       <p:pic>
         <p:nvPicPr>
-          <p:cNvPr id="11" name="Picture 10" descr="Screenshot 2026-07-13 205600.png"/>
+          <p:cNvPr id="12" name="Picture 11" descr="Screenshot 2026-07-13 205600.png"/>
           <p:cNvPicPr>
             <a:picLocks noChangeAspect="1"/>
           </p:cNvPicPr>
@@ -7787,7 +8110,7 @@
         </p:blipFill>
         <p:spPr>
           <a:xfrm>
-            <a:off x="594360" y="2589958"/>
+            <a:off x="594360" y="2663110"/>
             <a:ext cx="5120640" cy="2455322"/>
           </a:xfrm>
           <a:prstGeom prst="rect">
@@ -7797,22 +8120,70 @@
       </p:pic>
       <p:sp>
         <p:nvSpPr>
-          <p:cNvPr id="12" name="Rounded Rectangle 11"/>
+          <p:cNvPr id="13" name="Rounded Rectangle 12"/>
           <p:cNvSpPr/>
           <p:nvPr/>
         </p:nvSpPr>
         <p:spPr>
           <a:xfrm>
-            <a:off x="6309360" y="1298448"/>
-            <a:ext cx="5394960" cy="4617720"/>
+            <a:off x="6309360" y="1417320"/>
+            <a:ext cx="5394960" cy="4526280"/>
           </a:xfrm>
           <a:prstGeom prst="roundRect">
             <a:avLst>
-              <a:gd name="adj" fmla="val 6000"/>
+              <a:gd name="adj" fmla="val 5000"/>
             </a:avLst>
           </a:prstGeom>
           <a:solidFill>
-            <a:srgbClr val="FFFFFF"/>
+            <a:srgbClr val="1A1D33"/>
+          </a:solidFill>
+          <a:ln w="12700">
+            <a:solidFill>
+              <a:srgbClr val="353A5C"/>
+            </a:solidFill>
+          </a:ln>
+          <a:effectLst/>
+        </p:spPr>
+        <p:style>
+          <a:lnRef idx="1">
+            <a:schemeClr val="accent1"/>
+          </a:lnRef>
+          <a:fillRef idx="3">
+            <a:schemeClr val="accent1"/>
+          </a:fillRef>
+          <a:effectRef idx="2">
+            <a:schemeClr val="accent1"/>
+          </a:effectRef>
+          <a:fontRef idx="minor">
+            <a:schemeClr val="lt1"/>
+          </a:fontRef>
+        </p:style>
+        <p:txBody>
+          <a:bodyPr rtlCol="0" anchor="ctr"/>
+          <a:lstStyle/>
+          <a:p>
+            <a:pPr algn="ctr"/>
+          </a:p>
+        </p:txBody>
+      </p:sp>
+      <p:sp>
+        <p:nvSpPr>
+          <p:cNvPr id="14" name="Rounded Rectangle 13"/>
+          <p:cNvSpPr/>
+          <p:nvPr/>
+        </p:nvSpPr>
+        <p:spPr>
+          <a:xfrm>
+            <a:off x="6446520" y="1527048"/>
+            <a:ext cx="2642616" cy="310896"/>
+          </a:xfrm>
+          <a:prstGeom prst="roundRect">
+            <a:avLst>
+              <a:gd name="adj" fmla="val 50000"/>
+            </a:avLst>
+          </a:prstGeom>
+          <a:solidFill>
+            <a:srgbClr val="F59E0B"/>
           </a:solidFill>
           <a:ln>
             <a:noFill/>
@@ -7834,52 +8205,6 @@
           </a:fontRef>
         </p:style>
         <p:txBody>
-          <a:bodyPr rtlCol="0" anchor="ctr"/>
-          <a:lstStyle/>
-          <a:p>
-            <a:pPr algn="ctr"/>
-          </a:p>
-        </p:txBody>
-      </p:sp>
-      <p:sp>
-        <p:nvSpPr>
-          <p:cNvPr id="13" name="Rounded Rectangle 12"/>
-          <p:cNvSpPr/>
-          <p:nvPr/>
-        </p:nvSpPr>
-        <p:spPr>
-          <a:xfrm>
-            <a:off x="6446520" y="1408176"/>
-            <a:ext cx="2642616" cy="310896"/>
-          </a:xfrm>
-          <a:prstGeom prst="roundRect">
-            <a:avLst>
-              <a:gd name="adj" fmla="val 25000"/>
-            </a:avLst>
-          </a:prstGeom>
-          <a:solidFill>
-            <a:srgbClr val="EF7F1B"/>
-          </a:solidFill>
-          <a:ln>
-            <a:noFill/>
-          </a:ln>
-          <a:effectLst/>
-        </p:spPr>
-        <p:style>
-          <a:lnRef idx="1">
-            <a:schemeClr val="accent1"/>
-          </a:lnRef>
-          <a:fillRef idx="3">
-            <a:schemeClr val="accent1"/>
-          </a:fillRef>
-          <a:effectRef idx="2">
-            <a:schemeClr val="accent1"/>
-          </a:effectRef>
-          <a:fontRef idx="minor">
-            <a:schemeClr val="lt1"/>
-          </a:fontRef>
-        </p:style>
-        <p:txBody>
           <a:bodyPr rtlCol="0" anchor="ctr" lIns="50800" rIns="50800"/>
           <a:lstStyle/>
           <a:p>
@@ -7898,7 +8223,7 @@
       </p:sp>
       <p:pic>
         <p:nvPicPr>
-          <p:cNvPr id="14" name="Picture 13" descr="Screenshot 2026-07-13 205745.png"/>
+          <p:cNvPr id="15" name="Picture 14" descr="Screenshot 2026-07-13 205745.png"/>
           <p:cNvPicPr>
             <a:picLocks noChangeAspect="1"/>
           </p:cNvPicPr>
@@ -7912,7 +8237,7 @@
         </p:blipFill>
         <p:spPr>
           <a:xfrm>
-            <a:off x="6446520" y="2596047"/>
+            <a:off x="6446520" y="2669199"/>
             <a:ext cx="5120640" cy="2443145"/>
           </a:xfrm>
           <a:prstGeom prst="rect">
@@ -7947,13 +8272,13 @@
         <p:spPr>
           <a:xfrm>
             <a:off x="0" y="0"/>
-            <a:ext cx="12191695" cy="1051560"/>
+            <a:ext cx="12191695" cy="6858000"/>
           </a:xfrm>
           <a:prstGeom prst="rect">
             <a:avLst/>
           </a:prstGeom>
           <a:solidFill>
-            <a:srgbClr val="003092"/>
+            <a:srgbClr val="0F1120"/>
           </a:solidFill>
           <a:ln>
             <a:noFill/>
@@ -7990,14 +8315,14 @@
         </p:nvSpPr>
         <p:spPr>
           <a:xfrm>
-            <a:off x="0" y="1051560"/>
-            <a:ext cx="12191695" cy="40233"/>
+            <a:off x="0" y="0"/>
+            <a:ext cx="12191695" cy="82296"/>
           </a:xfrm>
           <a:prstGeom prst="rect">
             <a:avLst/>
           </a:prstGeom>
           <a:solidFill>
-            <a:srgbClr val="EF7F1B"/>
+            <a:srgbClr val="F59E0B"/>
           </a:solidFill>
           <a:ln>
             <a:noFill/>
@@ -8034,7 +8359,7 @@
         </p:nvSpPr>
         <p:spPr>
           <a:xfrm>
-            <a:off x="502920" y="118872"/>
+            <a:off x="502920" y="320040"/>
             <a:ext cx="8686800" cy="292608"/>
           </a:xfrm>
           <a:prstGeom prst="rect">
@@ -8052,7 +8377,7 @@
             <a:r>
               <a:rPr sz="1250" b="1">
                 <a:solidFill>
-                  <a:srgbClr val="01ADEF"/>
+                  <a:srgbClr val="F59E0B"/>
                 </a:solidFill>
                 <a:latin typeface="Calibri"/>
               </a:rPr>
@@ -8069,8 +8394,8 @@
         </p:nvSpPr>
         <p:spPr>
           <a:xfrm>
-            <a:off x="502920" y="384048"/>
-            <a:ext cx="8778240" cy="621792"/>
+            <a:off x="502920" y="603504"/>
+            <a:ext cx="8778240" cy="548640"/>
           </a:xfrm>
           <a:prstGeom prst="rect">
             <a:avLst/>
@@ -8085,9 +8410,9 @@
           <a:p>
             <a:pPr algn="l"/>
             <a:r>
-              <a:rPr sz="2500" b="1">
-                <a:solidFill>
-                  <a:srgbClr val="FFFFFF"/>
+              <a:rPr sz="2400" b="1">
+                <a:solidFill>
+                  <a:srgbClr val="F1F3FF"/>
                 </a:solidFill>
                 <a:latin typeface="Calibri"/>
               </a:rPr>
@@ -8104,14 +8429,14 @@
         </p:nvSpPr>
         <p:spPr>
           <a:xfrm>
-            <a:off x="0" y="6547104"/>
-            <a:ext cx="12191695" cy="310896"/>
+            <a:off x="0" y="1261872"/>
+            <a:ext cx="12191695" cy="18288"/>
           </a:xfrm>
           <a:prstGeom prst="rect">
             <a:avLst/>
           </a:prstGeom>
           <a:solidFill>
-            <a:srgbClr val="001E5C"/>
+            <a:srgbClr val="353A5C"/>
           </a:solidFill>
           <a:ln>
             <a:noFill/>
@@ -8142,7 +8467,51 @@
       </p:sp>
       <p:sp>
         <p:nvSpPr>
-          <p:cNvPr id="7" name="TextBox 6"/>
+          <p:cNvPr id="7" name="Rectangle 6"/>
+          <p:cNvSpPr/>
+          <p:nvPr/>
+        </p:nvSpPr>
+        <p:spPr>
+          <a:xfrm>
+            <a:off x="0" y="6547104"/>
+            <a:ext cx="12191695" cy="310896"/>
+          </a:xfrm>
+          <a:prstGeom prst="rect">
+            <a:avLst/>
+          </a:prstGeom>
+          <a:solidFill>
+            <a:srgbClr val="090A16"/>
+          </a:solidFill>
+          <a:ln>
+            <a:noFill/>
+          </a:ln>
+          <a:effectLst/>
+        </p:spPr>
+        <p:style>
+          <a:lnRef idx="1">
+            <a:schemeClr val="accent1"/>
+          </a:lnRef>
+          <a:fillRef idx="3">
+            <a:schemeClr val="accent1"/>
+          </a:fillRef>
+          <a:effectRef idx="2">
+            <a:schemeClr val="accent1"/>
+          </a:effectRef>
+          <a:fontRef idx="minor">
+            <a:schemeClr val="lt1"/>
+          </a:fontRef>
+        </p:style>
+        <p:txBody>
+          <a:bodyPr rtlCol="0" anchor="ctr"/>
+          <a:lstStyle/>
+          <a:p>
+            <a:pPr algn="ctr"/>
+          </a:p>
+        </p:txBody>
+      </p:sp>
+      <p:sp>
+        <p:nvSpPr>
+          <p:cNvPr id="8" name="TextBox 7"/>
           <p:cNvSpPr txBox="1"/>
           <p:nvPr/>
         </p:nvSpPr>
@@ -8166,18 +8535,18 @@
             <a:r>
               <a:rPr sz="950" b="0">
                 <a:solidFill>
-                  <a:srgbClr val="C9D6EE"/>
-                </a:solidFill>
-                <a:latin typeface="Calibri"/>
-              </a:rPr>
-              <a:t>M.Tech Mini Project  |  [Student Name]  |  [College Name]</a:t>
-            </a:r>
-          </a:p>
-        </p:txBody>
-      </p:sp>
-      <p:sp>
-        <p:nvSpPr>
-          <p:cNvPr id="8" name="TextBox 7"/>
+                  <a:srgbClr val="9CA3C7"/>
+                </a:solidFill>
+                <a:latin typeface="Calibri"/>
+              </a:rPr>
+              <a:t>FinGenius AI  •  M.Tech Mini Project  •  [Student Name]  •  [College Name]</a:t>
+            </a:r>
+          </a:p>
+        </p:txBody>
+      </p:sp>
+      <p:sp>
+        <p:nvSpPr>
+          <p:cNvPr id="9" name="TextBox 8"/>
           <p:cNvSpPr txBox="1"/>
           <p:nvPr/>
         </p:nvSpPr>
@@ -8201,7 +8570,7 @@
             <a:r>
               <a:rPr sz="950" b="1">
                 <a:solidFill>
-                  <a:srgbClr val="FFFFFF"/>
+                  <a:srgbClr val="F59E0B"/>
                 </a:solidFill>
                 <a:latin typeface="Calibri"/>
               </a:rPr>
@@ -8212,7 +8581,7 @@
       </p:sp>
       <p:sp>
         <p:nvSpPr>
-          <p:cNvPr id="9" name="TextBox 8"/>
+          <p:cNvPr id="10" name="TextBox 9"/>
           <p:cNvSpPr txBox="1"/>
           <p:nvPr/>
         </p:nvSpPr>
@@ -8236,7 +8605,7 @@
             <a:r>
               <a:rPr sz="1400" b="1">
                 <a:solidFill>
-                  <a:srgbClr val="202433"/>
+                  <a:srgbClr val="F1F3FF"/>
                 </a:solidFill>
                 <a:latin typeface="Calibri"/>
               </a:rPr>
@@ -8247,7 +8616,7 @@
       </p:sp>
       <p:graphicFrame>
         <p:nvGraphicFramePr>
-          <p:cNvPr id="10" name="Table 9"/>
+          <p:cNvPr id="11" name="Table 10"/>
           <p:cNvGraphicFramePr>
             <a:graphicFrameLocks noGrp="1"/>
           </p:cNvGraphicFramePr>
@@ -8288,7 +8657,7 @@
                   </a:txBody>
                   <a:tcPr marT="38100" marB="38100" anchor="ctr">
                     <a:solidFill>
-                      <a:srgbClr val="003092"/>
+                      <a:srgbClr val="F59E0B"/>
                     </a:solidFill>
                   </a:tcPr>
                 </a:tc>
@@ -8310,7 +8679,7 @@
                   </a:txBody>
                   <a:tcPr marT="38100" marB="38100" anchor="ctr">
                     <a:solidFill>
-                      <a:srgbClr val="003092"/>
+                      <a:srgbClr val="F59E0B"/>
                     </a:solidFill>
                   </a:tcPr>
                 </a:tc>
@@ -8332,7 +8701,7 @@
                   </a:txBody>
                   <a:tcPr marT="38100" marB="38100" anchor="ctr">
                     <a:solidFill>
-                      <a:srgbClr val="003092"/>
+                      <a:srgbClr val="F59E0B"/>
                     </a:solidFill>
                   </a:tcPr>
                 </a:tc>
@@ -8354,7 +8723,7 @@
                   </a:txBody>
                   <a:tcPr marT="38100" marB="38100" anchor="ctr">
                     <a:solidFill>
-                      <a:srgbClr val="003092"/>
+                      <a:srgbClr val="F59E0B"/>
                     </a:solidFill>
                   </a:tcPr>
                 </a:tc>
@@ -8368,7 +8737,7 @@
                       <a:r>
                         <a:rPr sz="1150">
                           <a:solidFill>
-                            <a:srgbClr val="202433"/>
+                            <a:srgbClr val="F1F3FF"/>
                           </a:solidFill>
                           <a:latin typeface="Calibri"/>
                         </a:rPr>
@@ -8378,7 +8747,7 @@
                   </a:txBody>
                   <a:tcPr marT="38100" marB="38100" anchor="ctr">
                     <a:solidFill>
-                      <a:srgbClr val="FFFFFF"/>
+                      <a:srgbClr val="1A1D33"/>
                     </a:solidFill>
                   </a:tcPr>
                 </a:tc>
@@ -8390,7 +8759,7 @@
                       <a:r>
                         <a:rPr sz="1150">
                           <a:solidFill>
-                            <a:srgbClr val="202433"/>
+                            <a:srgbClr val="F1F3FF"/>
                           </a:solidFill>
                           <a:latin typeface="Calibri"/>
                         </a:rPr>
@@ -8400,7 +8769,7 @@
                   </a:txBody>
                   <a:tcPr marT="38100" marB="38100" anchor="ctr">
                     <a:solidFill>
-                      <a:srgbClr val="FFFFFF"/>
+                      <a:srgbClr val="1A1D33"/>
                     </a:solidFill>
                   </a:tcPr>
                 </a:tc>
@@ -8412,7 +8781,7 @@
                       <a:r>
                         <a:rPr sz="1150">
                           <a:solidFill>
-                            <a:srgbClr val="202433"/>
+                            <a:srgbClr val="F1F3FF"/>
                           </a:solidFill>
                           <a:latin typeface="Calibri"/>
                         </a:rPr>
@@ -8422,7 +8791,7 @@
                   </a:txBody>
                   <a:tcPr marT="38100" marB="38100" anchor="ctr">
                     <a:solidFill>
-                      <a:srgbClr val="FFFFFF"/>
+                      <a:srgbClr val="1A1D33"/>
                     </a:solidFill>
                   </a:tcPr>
                 </a:tc>
@@ -8434,7 +8803,7 @@
                       <a:r>
                         <a:rPr sz="1150">
                           <a:solidFill>
-                            <a:srgbClr val="202433"/>
+                            <a:srgbClr val="F1F3FF"/>
                           </a:solidFill>
                           <a:latin typeface="Calibri"/>
                         </a:rPr>
@@ -8444,7 +8813,7 @@
                   </a:txBody>
                   <a:tcPr marT="38100" marB="38100" anchor="ctr">
                     <a:solidFill>
-                      <a:srgbClr val="FFFFFF"/>
+                      <a:srgbClr val="1A1D33"/>
                     </a:solidFill>
                   </a:tcPr>
                 </a:tc>
@@ -8458,7 +8827,7 @@
                       <a:r>
                         <a:rPr sz="1150">
                           <a:solidFill>
-                            <a:srgbClr val="202433"/>
+                            <a:srgbClr val="F1F3FF"/>
                           </a:solidFill>
                           <a:latin typeface="Calibri"/>
                         </a:rPr>
@@ -8468,7 +8837,7 @@
                   </a:txBody>
                   <a:tcPr marT="38100" marB="38100" anchor="ctr">
                     <a:solidFill>
-                      <a:srgbClr val="EEF4FC"/>
+                      <a:srgbClr val="20233F"/>
                     </a:solidFill>
                   </a:tcPr>
                 </a:tc>
@@ -8480,7 +8849,7 @@
                       <a:r>
                         <a:rPr sz="1150">
                           <a:solidFill>
-                            <a:srgbClr val="202433"/>
+                            <a:srgbClr val="F1F3FF"/>
                           </a:solidFill>
                           <a:latin typeface="Calibri"/>
                         </a:rPr>
@@ -8490,7 +8859,7 @@
                   </a:txBody>
                   <a:tcPr marT="38100" marB="38100" anchor="ctr">
                     <a:solidFill>
-                      <a:srgbClr val="EEF4FC"/>
+                      <a:srgbClr val="20233F"/>
                     </a:solidFill>
                   </a:tcPr>
                 </a:tc>
@@ -8502,7 +8871,7 @@
                       <a:r>
                         <a:rPr sz="1150">
                           <a:solidFill>
-                            <a:srgbClr val="202433"/>
+                            <a:srgbClr val="F1F3FF"/>
                           </a:solidFill>
                           <a:latin typeface="Calibri"/>
                         </a:rPr>
@@ -8512,7 +8881,7 @@
                   </a:txBody>
                   <a:tcPr marT="38100" marB="38100" anchor="ctr">
                     <a:solidFill>
-                      <a:srgbClr val="EEF4FC"/>
+                      <a:srgbClr val="20233F"/>
                     </a:solidFill>
                   </a:tcPr>
                 </a:tc>
@@ -8524,7 +8893,7 @@
                       <a:r>
                         <a:rPr sz="1150">
                           <a:solidFill>
-                            <a:srgbClr val="202433"/>
+                            <a:srgbClr val="F1F3FF"/>
                           </a:solidFill>
                           <a:latin typeface="Calibri"/>
                         </a:rPr>
@@ -8534,7 +8903,7 @@
                   </a:txBody>
                   <a:tcPr marT="38100" marB="38100" anchor="ctr">
                     <a:solidFill>
-                      <a:srgbClr val="EEF4FC"/>
+                      <a:srgbClr val="20233F"/>
                     </a:solidFill>
                   </a:tcPr>
                 </a:tc>
@@ -8548,7 +8917,7 @@
                       <a:r>
                         <a:rPr sz="1150">
                           <a:solidFill>
-                            <a:srgbClr val="202433"/>
+                            <a:srgbClr val="F1F3FF"/>
                           </a:solidFill>
                           <a:latin typeface="Calibri"/>
                         </a:rPr>
@@ -8558,7 +8927,7 @@
                   </a:txBody>
                   <a:tcPr marT="38100" marB="38100" anchor="ctr">
                     <a:solidFill>
-                      <a:srgbClr val="FFFFFF"/>
+                      <a:srgbClr val="1A1D33"/>
                     </a:solidFill>
                   </a:tcPr>
                 </a:tc>
@@ -8570,7 +8939,7 @@
                       <a:r>
                         <a:rPr sz="1150">
                           <a:solidFill>
-                            <a:srgbClr val="202433"/>
+                            <a:srgbClr val="F1F3FF"/>
                           </a:solidFill>
                           <a:latin typeface="Calibri"/>
                         </a:rPr>
@@ -8580,7 +8949,7 @@
                   </a:txBody>
                   <a:tcPr marT="38100" marB="38100" anchor="ctr">
                     <a:solidFill>
-                      <a:srgbClr val="FFFFFF"/>
+                      <a:srgbClr val="1A1D33"/>
                     </a:solidFill>
                   </a:tcPr>
                 </a:tc>
@@ -8592,7 +8961,7 @@
                       <a:r>
                         <a:rPr sz="1150">
                           <a:solidFill>
-                            <a:srgbClr val="202433"/>
+                            <a:srgbClr val="F1F3FF"/>
                           </a:solidFill>
                           <a:latin typeface="Calibri"/>
                         </a:rPr>
@@ -8602,7 +8971,7 @@
                   </a:txBody>
                   <a:tcPr marT="38100" marB="38100" anchor="ctr">
                     <a:solidFill>
-                      <a:srgbClr val="FFFFFF"/>
+                      <a:srgbClr val="1A1D33"/>
                     </a:solidFill>
                   </a:tcPr>
                 </a:tc>
@@ -8614,7 +8983,7 @@
                       <a:r>
                         <a:rPr sz="1150">
                           <a:solidFill>
-                            <a:srgbClr val="202433"/>
+                            <a:srgbClr val="F1F3FF"/>
                           </a:solidFill>
                           <a:latin typeface="Calibri"/>
                         </a:rPr>
@@ -8624,7 +8993,7 @@
                   </a:txBody>
                   <a:tcPr marT="38100" marB="38100" anchor="ctr">
                     <a:solidFill>
-                      <a:srgbClr val="FFFFFF"/>
+                      <a:srgbClr val="1A1D33"/>
                     </a:solidFill>
                   </a:tcPr>
                 </a:tc>
@@ -8638,7 +9007,7 @@
                       <a:r>
                         <a:rPr sz="1150">
                           <a:solidFill>
-                            <a:srgbClr val="202433"/>
+                            <a:srgbClr val="F1F3FF"/>
                           </a:solidFill>
                           <a:latin typeface="Calibri"/>
                         </a:rPr>
@@ -8648,7 +9017,7 @@
                   </a:txBody>
                   <a:tcPr marT="38100" marB="38100" anchor="ctr">
                     <a:solidFill>
-                      <a:srgbClr val="EEF4FC"/>
+                      <a:srgbClr val="20233F"/>
                     </a:solidFill>
                   </a:tcPr>
                 </a:tc>
@@ -8660,7 +9029,7 @@
                       <a:r>
                         <a:rPr sz="1150">
                           <a:solidFill>
-                            <a:srgbClr val="202433"/>
+                            <a:srgbClr val="F1F3FF"/>
                           </a:solidFill>
                           <a:latin typeface="Calibri"/>
                         </a:rPr>
@@ -8670,7 +9039,7 @@
                   </a:txBody>
                   <a:tcPr marT="38100" marB="38100" anchor="ctr">
                     <a:solidFill>
-                      <a:srgbClr val="EEF4FC"/>
+                      <a:srgbClr val="20233F"/>
                     </a:solidFill>
                   </a:tcPr>
                 </a:tc>
@@ -8682,7 +9051,7 @@
                       <a:r>
                         <a:rPr sz="1150">
                           <a:solidFill>
-                            <a:srgbClr val="202433"/>
+                            <a:srgbClr val="F1F3FF"/>
                           </a:solidFill>
                           <a:latin typeface="Calibri"/>
                         </a:rPr>
@@ -8692,7 +9061,7 @@
                   </a:txBody>
                   <a:tcPr marT="38100" marB="38100" anchor="ctr">
                     <a:solidFill>
-                      <a:srgbClr val="EEF4FC"/>
+                      <a:srgbClr val="20233F"/>
                     </a:solidFill>
                   </a:tcPr>
                 </a:tc>
@@ -8704,7 +9073,7 @@
                       <a:r>
                         <a:rPr sz="1150">
                           <a:solidFill>
-                            <a:srgbClr val="202433"/>
+                            <a:srgbClr val="F1F3FF"/>
                           </a:solidFill>
                           <a:latin typeface="Calibri"/>
                         </a:rPr>
@@ -8714,7 +9083,7 @@
                   </a:txBody>
                   <a:tcPr marT="38100" marB="38100" anchor="ctr">
                     <a:solidFill>
-                      <a:srgbClr val="EEF4FC"/>
+                      <a:srgbClr val="20233F"/>
                     </a:solidFill>
                   </a:tcPr>
                 </a:tc>
@@ -8725,7 +9094,7 @@
       </p:graphicFrame>
       <p:sp>
         <p:nvSpPr>
-          <p:cNvPr id="11" name="Rounded Rectangle 10"/>
+          <p:cNvPr id="12" name="Rounded Rectangle 11"/>
           <p:cNvSpPr/>
           <p:nvPr/>
         </p:nvSpPr>
@@ -8736,11 +9105,11 @@
           </a:xfrm>
           <a:prstGeom prst="roundRect">
             <a:avLst>
-              <a:gd name="adj" fmla="val 20000"/>
+              <a:gd name="adj" fmla="val 40000"/>
             </a:avLst>
           </a:prstGeom>
           <a:solidFill>
-            <a:srgbClr val="003092"/>
+            <a:srgbClr val="22C55E"/>
           </a:solidFill>
           <a:ln>
             <a:noFill/>
@@ -8780,14 +9149,62 @@
       </p:sp>
       <p:sp>
         <p:nvSpPr>
-          <p:cNvPr id="12" name="TextBox 11"/>
+          <p:cNvPr id="13" name="Rounded Rectangle 12"/>
+          <p:cNvSpPr/>
+          <p:nvPr/>
+        </p:nvSpPr>
+        <p:spPr>
+          <a:xfrm>
+            <a:off x="502920" y="4434840"/>
+            <a:ext cx="5532120" cy="1874519"/>
+          </a:xfrm>
+          <a:prstGeom prst="roundRect">
+            <a:avLst>
+              <a:gd name="adj" fmla="val 5000"/>
+            </a:avLst>
+          </a:prstGeom>
+          <a:solidFill>
+            <a:srgbClr val="1A1D33"/>
+          </a:solidFill>
+          <a:ln w="12700">
+            <a:solidFill>
+              <a:srgbClr val="353A5C"/>
+            </a:solidFill>
+          </a:ln>
+          <a:effectLst/>
+        </p:spPr>
+        <p:style>
+          <a:lnRef idx="1">
+            <a:schemeClr val="accent1"/>
+          </a:lnRef>
+          <a:fillRef idx="3">
+            <a:schemeClr val="accent1"/>
+          </a:fillRef>
+          <a:effectRef idx="2">
+            <a:schemeClr val="accent1"/>
+          </a:effectRef>
+          <a:fontRef idx="minor">
+            <a:schemeClr val="lt1"/>
+          </a:fontRef>
+        </p:style>
+        <p:txBody>
+          <a:bodyPr rtlCol="0" anchor="ctr"/>
+          <a:lstStyle/>
+          <a:p>
+            <a:pPr algn="ctr"/>
+          </a:p>
+        </p:txBody>
+      </p:sp>
+      <p:sp>
+        <p:nvSpPr>
+          <p:cNvPr id="14" name="TextBox 13"/>
           <p:cNvSpPr txBox="1"/>
           <p:nvPr/>
         </p:nvSpPr>
         <p:spPr>
           <a:xfrm>
-            <a:off x="502920" y="4480560"/>
-            <a:ext cx="5532120" cy="1737360"/>
+            <a:off x="777240" y="4572000"/>
+            <a:ext cx="5029200" cy="1645920"/>
           </a:xfrm>
           <a:prstGeom prst="rect">
             <a:avLst/>
@@ -8808,7 +9225,7 @@
             <a:r>
               <a:rPr sz="1200" b="1">
                 <a:solidFill>
-                  <a:srgbClr val="003092"/>
+                  <a:srgbClr val="22C55E"/>
                 </a:solidFill>
                 <a:latin typeface="Calibri"/>
               </a:rPr>
@@ -8817,7 +9234,7 @@
             <a:r>
               <a:rPr sz="1200" b="0">
                 <a:solidFill>
-                  <a:srgbClr val="202433"/>
+                  <a:srgbClr val="9CA3C7"/>
                 </a:solidFill>
                 <a:latin typeface="Calibri"/>
               </a:rPr>
@@ -8833,7 +9250,7 @@
             <a:r>
               <a:rPr sz="1200" b="1">
                 <a:solidFill>
-                  <a:srgbClr val="003092"/>
+                  <a:srgbClr val="22C55E"/>
                 </a:solidFill>
                 <a:latin typeface="Calibri"/>
               </a:rPr>
@@ -8842,7 +9259,7 @@
             <a:r>
               <a:rPr sz="1200" b="0">
                 <a:solidFill>
-                  <a:srgbClr val="202433"/>
+                  <a:srgbClr val="9CA3C7"/>
                 </a:solidFill>
                 <a:latin typeface="Calibri"/>
               </a:rPr>
@@ -8858,7 +9275,7 @@
             <a:r>
               <a:rPr sz="1200" b="1">
                 <a:solidFill>
-                  <a:srgbClr val="003092"/>
+                  <a:srgbClr val="22C55E"/>
                 </a:solidFill>
                 <a:latin typeface="Calibri"/>
               </a:rPr>
@@ -8867,7 +9284,7 @@
             <a:r>
               <a:rPr sz="1200" b="0">
                 <a:solidFill>
-                  <a:srgbClr val="202433"/>
+                  <a:srgbClr val="9CA3C7"/>
                 </a:solidFill>
                 <a:latin typeface="Calibri"/>
               </a:rPr>
@@ -8883,7 +9300,7 @@
             <a:r>
               <a:rPr sz="1200" b="1">
                 <a:solidFill>
-                  <a:srgbClr val="003092"/>
+                  <a:srgbClr val="22C55E"/>
                 </a:solidFill>
                 <a:latin typeface="Calibri"/>
               </a:rPr>
@@ -8892,7 +9309,7 @@
             <a:r>
               <a:rPr sz="1200" b="0">
                 <a:solidFill>
-                  <a:srgbClr val="202433"/>
+                  <a:srgbClr val="9CA3C7"/>
                 </a:solidFill>
                 <a:latin typeface="Calibri"/>
               </a:rPr>
@@ -8903,7 +9320,7 @@
       </p:sp>
       <p:sp>
         <p:nvSpPr>
-          <p:cNvPr id="13" name="Rounded Rectangle 12"/>
+          <p:cNvPr id="15" name="Rounded Rectangle 14"/>
           <p:cNvSpPr/>
           <p:nvPr/>
         </p:nvSpPr>
@@ -8914,11 +9331,11 @@
           </a:xfrm>
           <a:prstGeom prst="roundRect">
             <a:avLst>
-              <a:gd name="adj" fmla="val 20000"/>
+              <a:gd name="adj" fmla="val 40000"/>
             </a:avLst>
           </a:prstGeom>
           <a:solidFill>
-            <a:srgbClr val="EF7F1B"/>
+            <a:srgbClr val="F59E0B"/>
           </a:solidFill>
           <a:ln>
             <a:noFill/>
@@ -8958,14 +9375,62 @@
       </p:sp>
       <p:sp>
         <p:nvSpPr>
-          <p:cNvPr id="14" name="TextBox 13"/>
+          <p:cNvPr id="16" name="Rounded Rectangle 15"/>
+          <p:cNvSpPr/>
+          <p:nvPr/>
+        </p:nvSpPr>
+        <p:spPr>
+          <a:xfrm>
+            <a:off x="6263640" y="4434840"/>
+            <a:ext cx="5440680" cy="1874519"/>
+          </a:xfrm>
+          <a:prstGeom prst="roundRect">
+            <a:avLst>
+              <a:gd name="adj" fmla="val 5000"/>
+            </a:avLst>
+          </a:prstGeom>
+          <a:solidFill>
+            <a:srgbClr val="1A1D33"/>
+          </a:solidFill>
+          <a:ln w="12700">
+            <a:solidFill>
+              <a:srgbClr val="353A5C"/>
+            </a:solidFill>
+          </a:ln>
+          <a:effectLst/>
+        </p:spPr>
+        <p:style>
+          <a:lnRef idx="1">
+            <a:schemeClr val="accent1"/>
+          </a:lnRef>
+          <a:fillRef idx="3">
+            <a:schemeClr val="accent1"/>
+          </a:fillRef>
+          <a:effectRef idx="2">
+            <a:schemeClr val="accent1"/>
+          </a:effectRef>
+          <a:fontRef idx="minor">
+            <a:schemeClr val="lt1"/>
+          </a:fontRef>
+        </p:style>
+        <p:txBody>
+          <a:bodyPr rtlCol="0" anchor="ctr"/>
+          <a:lstStyle/>
+          <a:p>
+            <a:pPr algn="ctr"/>
+          </a:p>
+        </p:txBody>
+      </p:sp>
+      <p:sp>
+        <p:nvSpPr>
+          <p:cNvPr id="17" name="TextBox 16"/>
           <p:cNvSpPr txBox="1"/>
           <p:nvPr/>
         </p:nvSpPr>
         <p:spPr>
           <a:xfrm>
-            <a:off x="6263640" y="4480560"/>
-            <a:ext cx="5440680" cy="1737360"/>
+            <a:off x="6537960" y="4572000"/>
+            <a:ext cx="4983480" cy="1645920"/>
           </a:xfrm>
           <a:prstGeom prst="rect">
             <a:avLst/>
@@ -8986,7 +9451,7 @@
             <a:r>
               <a:rPr sz="1200" b="1">
                 <a:solidFill>
-                  <a:srgbClr val="EF7F1B"/>
+                  <a:srgbClr val="F59E0B"/>
                 </a:solidFill>
                 <a:latin typeface="Calibri"/>
               </a:rPr>
@@ -8995,7 +9460,7 @@
             <a:r>
               <a:rPr sz="1200" b="0">
                 <a:solidFill>
-                  <a:srgbClr val="202433"/>
+                  <a:srgbClr val="9CA3C7"/>
                 </a:solidFill>
                 <a:latin typeface="Calibri"/>
               </a:rPr>
@@ -9011,7 +9476,7 @@
             <a:r>
               <a:rPr sz="1200" b="1">
                 <a:solidFill>
-                  <a:srgbClr val="EF7F1B"/>
+                  <a:srgbClr val="F59E0B"/>
                 </a:solidFill>
                 <a:latin typeface="Calibri"/>
               </a:rPr>
@@ -9020,7 +9485,7 @@
             <a:r>
               <a:rPr sz="1200" b="0">
                 <a:solidFill>
-                  <a:srgbClr val="202433"/>
+                  <a:srgbClr val="9CA3C7"/>
                 </a:solidFill>
                 <a:latin typeface="Calibri"/>
               </a:rPr>
@@ -9036,7 +9501,7 @@
             <a:r>
               <a:rPr sz="1200" b="1">
                 <a:solidFill>
-                  <a:srgbClr val="EF7F1B"/>
+                  <a:srgbClr val="F59E0B"/>
                 </a:solidFill>
                 <a:latin typeface="Calibri"/>
               </a:rPr>
@@ -9045,7 +9510,7 @@
             <a:r>
               <a:rPr sz="1200" b="0">
                 <a:solidFill>
-                  <a:srgbClr val="202433"/>
+                  <a:srgbClr val="9CA3C7"/>
                 </a:solidFill>
                 <a:latin typeface="Calibri"/>
               </a:rPr>
@@ -9061,7 +9526,7 @@
             <a:r>
               <a:rPr sz="1200" b="1">
                 <a:solidFill>
-                  <a:srgbClr val="EF7F1B"/>
+                  <a:srgbClr val="F59E0B"/>
                 </a:solidFill>
                 <a:latin typeface="Calibri"/>
               </a:rPr>
@@ -9070,7 +9535,7 @@
             <a:r>
               <a:rPr sz="1200" b="0">
                 <a:solidFill>
-                  <a:srgbClr val="202433"/>
+                  <a:srgbClr val="9CA3C7"/>
                 </a:solidFill>
                 <a:latin typeface="Calibri"/>
               </a:rPr>
@@ -9106,13 +9571,13 @@
         <p:spPr>
           <a:xfrm>
             <a:off x="0" y="0"/>
-            <a:ext cx="12191695" cy="1051560"/>
+            <a:ext cx="12191695" cy="6858000"/>
           </a:xfrm>
           <a:prstGeom prst="rect">
             <a:avLst/>
           </a:prstGeom>
           <a:solidFill>
-            <a:srgbClr val="003092"/>
+            <a:srgbClr val="0F1120"/>
           </a:solidFill>
           <a:ln>
             <a:noFill/>
@@ -9149,14 +9614,14 @@
         </p:nvSpPr>
         <p:spPr>
           <a:xfrm>
-            <a:off x="0" y="1051560"/>
-            <a:ext cx="12191695" cy="40233"/>
+            <a:off x="0" y="0"/>
+            <a:ext cx="12191695" cy="82296"/>
           </a:xfrm>
           <a:prstGeom prst="rect">
             <a:avLst/>
           </a:prstGeom>
           <a:solidFill>
-            <a:srgbClr val="EF7F1B"/>
+            <a:srgbClr val="6366F1"/>
           </a:solidFill>
           <a:ln>
             <a:noFill/>
@@ -9193,7 +9658,7 @@
         </p:nvSpPr>
         <p:spPr>
           <a:xfrm>
-            <a:off x="502920" y="118872"/>
+            <a:off x="502920" y="320040"/>
             <a:ext cx="8686800" cy="292608"/>
           </a:xfrm>
           <a:prstGeom prst="rect">
@@ -9211,7 +9676,7 @@
             <a:r>
               <a:rPr sz="1250" b="1">
                 <a:solidFill>
-                  <a:srgbClr val="01ADEF"/>
+                  <a:srgbClr val="6366F1"/>
                 </a:solidFill>
                 <a:latin typeface="Calibri"/>
               </a:rPr>
@@ -9228,8 +9693,8 @@
         </p:nvSpPr>
         <p:spPr>
           <a:xfrm>
-            <a:off x="502920" y="384048"/>
-            <a:ext cx="8778240" cy="621792"/>
+            <a:off x="502920" y="603504"/>
+            <a:ext cx="8778240" cy="548640"/>
           </a:xfrm>
           <a:prstGeom prst="rect">
             <a:avLst/>
@@ -9244,9 +9709,9 @@
           <a:p>
             <a:pPr algn="l"/>
             <a:r>
-              <a:rPr sz="2500" b="1">
-                <a:solidFill>
-                  <a:srgbClr val="FFFFFF"/>
+              <a:rPr sz="2400" b="1">
+                <a:solidFill>
+                  <a:srgbClr val="F1F3FF"/>
                 </a:solidFill>
                 <a:latin typeface="Calibri"/>
               </a:rPr>
@@ -9263,14 +9728,14 @@
         </p:nvSpPr>
         <p:spPr>
           <a:xfrm>
-            <a:off x="0" y="6547104"/>
-            <a:ext cx="12191695" cy="310896"/>
+            <a:off x="0" y="1261872"/>
+            <a:ext cx="12191695" cy="18288"/>
           </a:xfrm>
           <a:prstGeom prst="rect">
             <a:avLst/>
           </a:prstGeom>
           <a:solidFill>
-            <a:srgbClr val="001E5C"/>
+            <a:srgbClr val="353A5C"/>
           </a:solidFill>
           <a:ln>
             <a:noFill/>
@@ -9301,92 +9766,20 @@
       </p:sp>
       <p:sp>
         <p:nvSpPr>
-          <p:cNvPr id="7" name="TextBox 6"/>
-          <p:cNvSpPr txBox="1"/>
-          <p:nvPr/>
-        </p:nvSpPr>
-        <p:spPr>
-          <a:xfrm>
-            <a:off x="411480" y="6547104"/>
-            <a:ext cx="8686800" cy="238658"/>
+          <p:cNvPr id="7" name="Rectangle 6"/>
+          <p:cNvSpPr/>
+          <p:nvPr/>
+        </p:nvSpPr>
+        <p:spPr>
+          <a:xfrm>
+            <a:off x="0" y="6547104"/>
+            <a:ext cx="12191695" cy="310896"/>
           </a:xfrm>
           <a:prstGeom prst="rect">
             <a:avLst/>
           </a:prstGeom>
-          <a:noFill/>
-        </p:spPr>
-        <p:txBody>
-          <a:bodyPr wrap="square" lIns="0" rIns="0" tIns="0" bIns="0">
-            <a:spAutoFit/>
-          </a:bodyPr>
-          <a:lstStyle/>
-          <a:p>
-            <a:pPr algn="l"/>
-            <a:r>
-              <a:rPr sz="950" b="0">
-                <a:solidFill>
-                  <a:srgbClr val="C9D6EE"/>
-                </a:solidFill>
-                <a:latin typeface="Calibri"/>
-              </a:rPr>
-              <a:t>M.Tech Mini Project  |  [Student Name]  |  [College Name]</a:t>
-            </a:r>
-          </a:p>
-        </p:txBody>
-      </p:sp>
-      <p:sp>
-        <p:nvSpPr>
-          <p:cNvPr id="8" name="TextBox 7"/>
-          <p:cNvSpPr txBox="1"/>
-          <p:nvPr/>
-        </p:nvSpPr>
-        <p:spPr>
-          <a:xfrm>
-            <a:off x="11094415" y="6547104"/>
-            <a:ext cx="685800" cy="310896"/>
-          </a:xfrm>
-          <a:prstGeom prst="rect">
-            <a:avLst/>
-          </a:prstGeom>
-          <a:noFill/>
-        </p:spPr>
-        <p:txBody>
-          <a:bodyPr wrap="square" lIns="0" rIns="0" tIns="0" bIns="0">
-            <a:spAutoFit/>
-          </a:bodyPr>
-          <a:lstStyle/>
-          <a:p>
-            <a:pPr algn="r"/>
-            <a:r>
-              <a:rPr sz="950" b="1">
-                <a:solidFill>
-                  <a:srgbClr val="FFFFFF"/>
-                </a:solidFill>
-                <a:latin typeface="Calibri"/>
-              </a:rPr>
-              <a:t>7</a:t>
-            </a:r>
-          </a:p>
-        </p:txBody>
-      </p:sp>
-      <p:sp>
-        <p:nvSpPr>
-          <p:cNvPr id="9" name="Rounded Rectangle 8"/>
-          <p:cNvSpPr/>
-          <p:nvPr/>
-        </p:nvSpPr>
-        <p:spPr>
-          <a:xfrm>
-            <a:off x="502920" y="1298448"/>
-            <a:ext cx="5532120" cy="365760"/>
-          </a:xfrm>
-          <a:prstGeom prst="roundRect">
-            <a:avLst>
-              <a:gd name="adj" fmla="val 20000"/>
-            </a:avLst>
-          </a:prstGeom>
           <a:solidFill>
-            <a:srgbClr val="003092"/>
+            <a:srgbClr val="090A16"/>
           </a:solidFill>
           <a:ln>
             <a:noFill/>
@@ -9412,6 +9805,122 @@
           <a:lstStyle/>
           <a:p>
             <a:pPr algn="ctr"/>
+          </a:p>
+        </p:txBody>
+      </p:sp>
+      <p:sp>
+        <p:nvSpPr>
+          <p:cNvPr id="8" name="TextBox 7"/>
+          <p:cNvSpPr txBox="1"/>
+          <p:nvPr/>
+        </p:nvSpPr>
+        <p:spPr>
+          <a:xfrm>
+            <a:off x="411480" y="6547104"/>
+            <a:ext cx="8686800" cy="238658"/>
+          </a:xfrm>
+          <a:prstGeom prst="rect">
+            <a:avLst/>
+          </a:prstGeom>
+          <a:noFill/>
+        </p:spPr>
+        <p:txBody>
+          <a:bodyPr wrap="square" lIns="0" rIns="0" tIns="0" bIns="0">
+            <a:spAutoFit/>
+          </a:bodyPr>
+          <a:lstStyle/>
+          <a:p>
+            <a:pPr algn="l"/>
+            <a:r>
+              <a:rPr sz="950" b="0">
+                <a:solidFill>
+                  <a:srgbClr val="9CA3C7"/>
+                </a:solidFill>
+                <a:latin typeface="Calibri"/>
+              </a:rPr>
+              <a:t>FinGenius AI  •  M.Tech Mini Project  •  [Student Name]  •  [College Name]</a:t>
+            </a:r>
+          </a:p>
+        </p:txBody>
+      </p:sp>
+      <p:sp>
+        <p:nvSpPr>
+          <p:cNvPr id="9" name="TextBox 8"/>
+          <p:cNvSpPr txBox="1"/>
+          <p:nvPr/>
+        </p:nvSpPr>
+        <p:spPr>
+          <a:xfrm>
+            <a:off x="11094415" y="6547104"/>
+            <a:ext cx="685800" cy="310896"/>
+          </a:xfrm>
+          <a:prstGeom prst="rect">
+            <a:avLst/>
+          </a:prstGeom>
+          <a:noFill/>
+        </p:spPr>
+        <p:txBody>
+          <a:bodyPr wrap="square" lIns="0" rIns="0" tIns="0" bIns="0">
+            <a:spAutoFit/>
+          </a:bodyPr>
+          <a:lstStyle/>
+          <a:p>
+            <a:pPr algn="r"/>
+            <a:r>
+              <a:rPr sz="950" b="1">
+                <a:solidFill>
+                  <a:srgbClr val="6366F1"/>
+                </a:solidFill>
+                <a:latin typeface="Calibri"/>
+              </a:rPr>
+              <a:t>7</a:t>
+            </a:r>
+          </a:p>
+        </p:txBody>
+      </p:sp>
+      <p:sp>
+        <p:nvSpPr>
+          <p:cNvPr id="10" name="Rounded Rectangle 9"/>
+          <p:cNvSpPr/>
+          <p:nvPr/>
+        </p:nvSpPr>
+        <p:spPr>
+          <a:xfrm>
+            <a:off x="502920" y="1371600"/>
+            <a:ext cx="5532120" cy="365760"/>
+          </a:xfrm>
+          <a:prstGeom prst="roundRect">
+            <a:avLst>
+              <a:gd name="adj" fmla="val 40000"/>
+            </a:avLst>
+          </a:prstGeom>
+          <a:solidFill>
+            <a:srgbClr val="6366F1"/>
+          </a:solidFill>
+          <a:ln>
+            <a:noFill/>
+          </a:ln>
+          <a:effectLst/>
+        </p:spPr>
+        <p:style>
+          <a:lnRef idx="1">
+            <a:schemeClr val="accent1"/>
+          </a:lnRef>
+          <a:fillRef idx="3">
+            <a:schemeClr val="accent1"/>
+          </a:fillRef>
+          <a:effectRef idx="2">
+            <a:schemeClr val="accent1"/>
+          </a:effectRef>
+          <a:fontRef idx="minor">
+            <a:schemeClr val="lt1"/>
+          </a:fontRef>
+        </p:style>
+        <p:txBody>
+          <a:bodyPr rtlCol="0" anchor="ctr"/>
+          <a:lstStyle/>
+          <a:p>
+            <a:pPr algn="ctr"/>
             <a:r>
               <a:rPr sz="1300" b="1">
                 <a:solidFill>
@@ -9426,14 +9935,62 @@
       </p:sp>
       <p:sp>
         <p:nvSpPr>
-          <p:cNvPr id="10" name="TextBox 9"/>
+          <p:cNvPr id="11" name="Rounded Rectangle 10"/>
+          <p:cNvSpPr/>
+          <p:nvPr/>
+        </p:nvSpPr>
+        <p:spPr>
+          <a:xfrm>
+            <a:off x="502920" y="1828800"/>
+            <a:ext cx="5532120" cy="3931920"/>
+          </a:xfrm>
+          <a:prstGeom prst="roundRect">
+            <a:avLst>
+              <a:gd name="adj" fmla="val 5000"/>
+            </a:avLst>
+          </a:prstGeom>
+          <a:solidFill>
+            <a:srgbClr val="1A1D33"/>
+          </a:solidFill>
+          <a:ln w="12700">
+            <a:solidFill>
+              <a:srgbClr val="353A5C"/>
+            </a:solidFill>
+          </a:ln>
+          <a:effectLst/>
+        </p:spPr>
+        <p:style>
+          <a:lnRef idx="1">
+            <a:schemeClr val="accent1"/>
+          </a:lnRef>
+          <a:fillRef idx="3">
+            <a:schemeClr val="accent1"/>
+          </a:fillRef>
+          <a:effectRef idx="2">
+            <a:schemeClr val="accent1"/>
+          </a:effectRef>
+          <a:fontRef idx="minor">
+            <a:schemeClr val="lt1"/>
+          </a:fontRef>
+        </p:style>
+        <p:txBody>
+          <a:bodyPr rtlCol="0" anchor="ctr"/>
+          <a:lstStyle/>
+          <a:p>
+            <a:pPr algn="ctr"/>
+          </a:p>
+        </p:txBody>
+      </p:sp>
+      <p:sp>
+        <p:nvSpPr>
+          <p:cNvPr id="12" name="TextBox 11"/>
           <p:cNvSpPr txBox="1"/>
           <p:nvPr/>
         </p:nvSpPr>
         <p:spPr>
           <a:xfrm>
-            <a:off x="502920" y="1783080"/>
-            <a:ext cx="5532120" cy="4206240"/>
+            <a:off x="777240" y="2011680"/>
+            <a:ext cx="5029200" cy="3657600"/>
           </a:xfrm>
           <a:prstGeom prst="rect">
             <a:avLst/>
@@ -9454,7 +10011,7 @@
             <a:r>
               <a:rPr sz="1300" b="1">
                 <a:solidFill>
-                  <a:srgbClr val="003092"/>
+                  <a:srgbClr val="6366F1"/>
                 </a:solidFill>
                 <a:latin typeface="Calibri"/>
               </a:rPr>
@@ -9463,7 +10020,7 @@
             <a:r>
               <a:rPr sz="1300" b="0">
                 <a:solidFill>
-                  <a:srgbClr val="202433"/>
+                  <a:srgbClr val="9CA3C7"/>
                 </a:solidFill>
                 <a:latin typeface="Calibri"/>
               </a:rPr>
@@ -9479,7 +10036,7 @@
             <a:r>
               <a:rPr sz="1300" b="1">
                 <a:solidFill>
-                  <a:srgbClr val="003092"/>
+                  <a:srgbClr val="6366F1"/>
                 </a:solidFill>
                 <a:latin typeface="Calibri"/>
               </a:rPr>
@@ -9488,7 +10045,7 @@
             <a:r>
               <a:rPr sz="1300" b="0">
                 <a:solidFill>
-                  <a:srgbClr val="202433"/>
+                  <a:srgbClr val="9CA3C7"/>
                 </a:solidFill>
                 <a:latin typeface="Calibri"/>
               </a:rPr>
@@ -9504,7 +10061,7 @@
             <a:r>
               <a:rPr sz="1300" b="1">
                 <a:solidFill>
-                  <a:srgbClr val="003092"/>
+                  <a:srgbClr val="6366F1"/>
                 </a:solidFill>
                 <a:latin typeface="Calibri"/>
               </a:rPr>
@@ -9513,7 +10070,7 @@
             <a:r>
               <a:rPr sz="1300" b="0">
                 <a:solidFill>
-                  <a:srgbClr val="202433"/>
+                  <a:srgbClr val="9CA3C7"/>
                 </a:solidFill>
                 <a:latin typeface="Calibri"/>
               </a:rPr>
@@ -9529,7 +10086,7 @@
             <a:r>
               <a:rPr sz="1300" b="1">
                 <a:solidFill>
-                  <a:srgbClr val="003092"/>
+                  <a:srgbClr val="6366F1"/>
                 </a:solidFill>
                 <a:latin typeface="Calibri"/>
               </a:rPr>
@@ -9538,7 +10095,7 @@
             <a:r>
               <a:rPr sz="1300" b="0">
                 <a:solidFill>
-                  <a:srgbClr val="202433"/>
+                  <a:srgbClr val="9CA3C7"/>
                 </a:solidFill>
                 <a:latin typeface="Calibri"/>
               </a:rPr>
@@ -9554,7 +10111,7 @@
             <a:r>
               <a:rPr sz="1300" b="1">
                 <a:solidFill>
-                  <a:srgbClr val="003092"/>
+                  <a:srgbClr val="6366F1"/>
                 </a:solidFill>
                 <a:latin typeface="Calibri"/>
               </a:rPr>
@@ -9563,7 +10120,7 @@
             <a:r>
               <a:rPr sz="1300" b="0">
                 <a:solidFill>
-                  <a:srgbClr val="202433"/>
+                  <a:srgbClr val="9CA3C7"/>
                 </a:solidFill>
                 <a:latin typeface="Calibri"/>
               </a:rPr>
@@ -9574,22 +10131,22 @@
       </p:sp>
       <p:sp>
         <p:nvSpPr>
-          <p:cNvPr id="11" name="Rounded Rectangle 10"/>
+          <p:cNvPr id="13" name="Rounded Rectangle 12"/>
           <p:cNvSpPr/>
           <p:nvPr/>
         </p:nvSpPr>
         <p:spPr>
           <a:xfrm>
-            <a:off x="6263640" y="1298448"/>
+            <a:off x="6263640" y="1371600"/>
             <a:ext cx="5440680" cy="365760"/>
           </a:xfrm>
           <a:prstGeom prst="roundRect">
             <a:avLst>
-              <a:gd name="adj" fmla="val 20000"/>
+              <a:gd name="adj" fmla="val 40000"/>
             </a:avLst>
           </a:prstGeom>
           <a:solidFill>
-            <a:srgbClr val="EF7F1B"/>
+            <a:srgbClr val="22C55E"/>
           </a:solidFill>
           <a:ln>
             <a:noFill/>
@@ -9629,14 +10186,62 @@
       </p:sp>
       <p:sp>
         <p:nvSpPr>
-          <p:cNvPr id="12" name="TextBox 11"/>
+          <p:cNvPr id="14" name="Rounded Rectangle 13"/>
+          <p:cNvSpPr/>
+          <p:nvPr/>
+        </p:nvSpPr>
+        <p:spPr>
+          <a:xfrm>
+            <a:off x="6263640" y="1828800"/>
+            <a:ext cx="5440680" cy="3931920"/>
+          </a:xfrm>
+          <a:prstGeom prst="roundRect">
+            <a:avLst>
+              <a:gd name="adj" fmla="val 5000"/>
+            </a:avLst>
+          </a:prstGeom>
+          <a:solidFill>
+            <a:srgbClr val="1A1D33"/>
+          </a:solidFill>
+          <a:ln w="12700">
+            <a:solidFill>
+              <a:srgbClr val="353A5C"/>
+            </a:solidFill>
+          </a:ln>
+          <a:effectLst/>
+        </p:spPr>
+        <p:style>
+          <a:lnRef idx="1">
+            <a:schemeClr val="accent1"/>
+          </a:lnRef>
+          <a:fillRef idx="3">
+            <a:schemeClr val="accent1"/>
+          </a:fillRef>
+          <a:effectRef idx="2">
+            <a:schemeClr val="accent1"/>
+          </a:effectRef>
+          <a:fontRef idx="minor">
+            <a:schemeClr val="lt1"/>
+          </a:fontRef>
+        </p:style>
+        <p:txBody>
+          <a:bodyPr rtlCol="0" anchor="ctr"/>
+          <a:lstStyle/>
+          <a:p>
+            <a:pPr algn="ctr"/>
+          </a:p>
+        </p:txBody>
+      </p:sp>
+      <p:sp>
+        <p:nvSpPr>
+          <p:cNvPr id="15" name="TextBox 14"/>
           <p:cNvSpPr txBox="1"/>
           <p:nvPr/>
         </p:nvSpPr>
         <p:spPr>
           <a:xfrm>
-            <a:off x="6263640" y="1783080"/>
-            <a:ext cx="5440680" cy="4206240"/>
+            <a:off x="6537960" y="2011680"/>
+            <a:ext cx="4983480" cy="3657600"/>
           </a:xfrm>
           <a:prstGeom prst="rect">
             <a:avLst/>
@@ -9657,7 +10262,7 @@
             <a:r>
               <a:rPr sz="1300" b="1">
                 <a:solidFill>
-                  <a:srgbClr val="EF7F1B"/>
+                  <a:srgbClr val="22C55E"/>
                 </a:solidFill>
                 <a:latin typeface="Calibri"/>
               </a:rPr>
@@ -9666,7 +10271,7 @@
             <a:r>
               <a:rPr sz="1300" b="0">
                 <a:solidFill>
-                  <a:srgbClr val="202433"/>
+                  <a:srgbClr val="9CA3C7"/>
                 </a:solidFill>
                 <a:latin typeface="Calibri"/>
               </a:rPr>
@@ -9682,7 +10287,7 @@
             <a:r>
               <a:rPr sz="1300" b="1">
                 <a:solidFill>
-                  <a:srgbClr val="EF7F1B"/>
+                  <a:srgbClr val="22C55E"/>
                 </a:solidFill>
                 <a:latin typeface="Calibri"/>
               </a:rPr>
@@ -9691,7 +10296,7 @@
             <a:r>
               <a:rPr sz="1300" b="0">
                 <a:solidFill>
-                  <a:srgbClr val="202433"/>
+                  <a:srgbClr val="9CA3C7"/>
                 </a:solidFill>
                 <a:latin typeface="Calibri"/>
               </a:rPr>
@@ -9707,7 +10312,7 @@
             <a:r>
               <a:rPr sz="1300" b="1">
                 <a:solidFill>
-                  <a:srgbClr val="EF7F1B"/>
+                  <a:srgbClr val="22C55E"/>
                 </a:solidFill>
                 <a:latin typeface="Calibri"/>
               </a:rPr>
@@ -9716,7 +10321,7 @@
             <a:r>
               <a:rPr sz="1300" b="0">
                 <a:solidFill>
-                  <a:srgbClr val="202433"/>
+                  <a:srgbClr val="9CA3C7"/>
                 </a:solidFill>
                 <a:latin typeface="Calibri"/>
               </a:rPr>
@@ -9732,7 +10337,7 @@
             <a:r>
               <a:rPr sz="1300" b="1">
                 <a:solidFill>
-                  <a:srgbClr val="EF7F1B"/>
+                  <a:srgbClr val="22C55E"/>
                 </a:solidFill>
                 <a:latin typeface="Calibri"/>
               </a:rPr>
@@ -9741,7 +10346,7 @@
             <a:r>
               <a:rPr sz="1300" b="0">
                 <a:solidFill>
-                  <a:srgbClr val="202433"/>
+                  <a:srgbClr val="9CA3C7"/>
                 </a:solidFill>
                 <a:latin typeface="Calibri"/>
               </a:rPr>
@@ -9757,7 +10362,7 @@
             <a:r>
               <a:rPr sz="1300" b="1">
                 <a:solidFill>
-                  <a:srgbClr val="EF7F1B"/>
+                  <a:srgbClr val="22C55E"/>
                 </a:solidFill>
                 <a:latin typeface="Calibri"/>
               </a:rPr>
@@ -9766,7 +10371,7 @@
             <a:r>
               <a:rPr sz="1300" b="0">
                 <a:solidFill>
-                  <a:srgbClr val="202433"/>
+                  <a:srgbClr val="9CA3C7"/>
                 </a:solidFill>
                 <a:latin typeface="Calibri"/>
               </a:rPr>
@@ -9782,7 +10387,7 @@
             <a:r>
               <a:rPr sz="1300" b="1">
                 <a:solidFill>
-                  <a:srgbClr val="EF7F1B"/>
+                  <a:srgbClr val="22C55E"/>
                 </a:solidFill>
                 <a:latin typeface="Calibri"/>
               </a:rPr>
@@ -9791,7 +10396,7 @@
             <a:r>
               <a:rPr sz="1300" b="0">
                 <a:solidFill>
-                  <a:srgbClr val="202433"/>
+                  <a:srgbClr val="9CA3C7"/>
                 </a:solidFill>
                 <a:latin typeface="Calibri"/>
               </a:rPr>
@@ -9802,20 +10407,20 @@
       </p:sp>
       <p:sp>
         <p:nvSpPr>
-          <p:cNvPr id="13" name="Rectangle 12"/>
+          <p:cNvPr id="16" name="Rectangle 15"/>
           <p:cNvSpPr/>
           <p:nvPr/>
         </p:nvSpPr>
         <p:spPr>
           <a:xfrm>
-            <a:off x="0" y="5989320"/>
-            <a:ext cx="12191695" cy="557784"/>
+            <a:off x="0" y="5806440"/>
+            <a:ext cx="12191695" cy="685800"/>
           </a:xfrm>
           <a:prstGeom prst="rect">
             <a:avLst/>
           </a:prstGeom>
           <a:solidFill>
-            <a:srgbClr val="003092"/>
+            <a:srgbClr val="6366F1"/>
           </a:solidFill>
           <a:ln>
             <a:noFill/>
@@ -9846,14 +10451,14 @@
       </p:sp>
       <p:sp>
         <p:nvSpPr>
-          <p:cNvPr id="14" name="TextBox 13"/>
+          <p:cNvPr id="17" name="TextBox 16"/>
           <p:cNvSpPr txBox="1"/>
           <p:nvPr/>
         </p:nvSpPr>
         <p:spPr>
           <a:xfrm>
-            <a:off x="0" y="5989320"/>
-            <a:ext cx="12191695" cy="557784"/>
+            <a:off x="0" y="5806440"/>
+            <a:ext cx="12191695" cy="685800"/>
           </a:xfrm>
           <a:prstGeom prst="rect">
             <a:avLst/>

--- a/FinGenius_AI_Seminar_Presentation.pptx
+++ b/FinGenius_AI_Seminar_Presentation.pptx
@@ -3110,7 +3110,7 @@
             <a:avLst/>
           </a:prstGeom>
           <a:solidFill>
-            <a:srgbClr val="0F1120"/>
+            <a:srgbClr val="FFFFFF"/>
           </a:solidFill>
           <a:ln>
             <a:noFill/>
@@ -3148,13 +3148,13 @@
         <p:spPr>
           <a:xfrm>
             <a:off x="0" y="0"/>
-            <a:ext cx="12191695" cy="82296"/>
+            <a:ext cx="12191695" cy="4160520"/>
           </a:xfrm>
           <a:prstGeom prst="rect">
             <a:avLst/>
           </a:prstGeom>
           <a:solidFill>
-            <a:srgbClr val="6366F1"/>
+            <a:srgbClr val="EEF0FD"/>
           </a:solidFill>
           <a:ln>
             <a:noFill/>
@@ -3191,14 +3191,14 @@
         </p:nvSpPr>
         <p:spPr>
           <a:xfrm>
-            <a:off x="0" y="4160520"/>
-            <a:ext cx="12191695" cy="27432"/>
+            <a:off x="0" y="0"/>
+            <a:ext cx="12191695" cy="82296"/>
           </a:xfrm>
           <a:prstGeom prst="rect">
             <a:avLst/>
           </a:prstGeom>
           <a:solidFill>
-            <a:srgbClr val="22C55E"/>
+            <a:srgbClr val="4F46E5"/>
           </a:solidFill>
           <a:ln>
             <a:noFill/>
@@ -3229,7 +3229,51 @@
       </p:sp>
       <p:sp>
         <p:nvSpPr>
-          <p:cNvPr id="5" name="TextBox 4"/>
+          <p:cNvPr id="5" name="Rectangle 4"/>
+          <p:cNvSpPr/>
+          <p:nvPr/>
+        </p:nvSpPr>
+        <p:spPr>
+          <a:xfrm>
+            <a:off x="0" y="4160520"/>
+            <a:ext cx="12191695" cy="27432"/>
+          </a:xfrm>
+          <a:prstGeom prst="rect">
+            <a:avLst/>
+          </a:prstGeom>
+          <a:solidFill>
+            <a:srgbClr val="16A34A"/>
+          </a:solidFill>
+          <a:ln>
+            <a:noFill/>
+          </a:ln>
+          <a:effectLst/>
+        </p:spPr>
+        <p:style>
+          <a:lnRef idx="1">
+            <a:schemeClr val="accent1"/>
+          </a:lnRef>
+          <a:fillRef idx="3">
+            <a:schemeClr val="accent1"/>
+          </a:fillRef>
+          <a:effectRef idx="2">
+            <a:schemeClr val="accent1"/>
+          </a:effectRef>
+          <a:fontRef idx="minor">
+            <a:schemeClr val="lt1"/>
+          </a:fontRef>
+        </p:style>
+        <p:txBody>
+          <a:bodyPr rtlCol="0" anchor="ctr"/>
+          <a:lstStyle/>
+          <a:p>
+            <a:pPr algn="ctr"/>
+          </a:p>
+        </p:txBody>
+      </p:sp>
+      <p:sp>
+        <p:nvSpPr>
+          <p:cNvPr id="6" name="TextBox 5"/>
           <p:cNvSpPr txBox="1"/>
           <p:nvPr/>
         </p:nvSpPr>
@@ -3253,7 +3297,7 @@
             <a:r>
               <a:rPr sz="1500" b="1">
                 <a:solidFill>
-                  <a:srgbClr val="F59E0B"/>
+                  <a:srgbClr val="D97706"/>
                 </a:solidFill>
                 <a:latin typeface="Calibri"/>
               </a:rPr>
@@ -3264,7 +3308,7 @@
       </p:sp>
       <p:sp>
         <p:nvSpPr>
-          <p:cNvPr id="6" name="TextBox 5"/>
+          <p:cNvPr id="7" name="TextBox 6"/>
           <p:cNvSpPr txBox="1"/>
           <p:nvPr/>
         </p:nvSpPr>
@@ -3292,7 +3336,7 @@
             <a:r>
               <a:rPr sz="4000" b="1">
                 <a:solidFill>
-                  <a:srgbClr val="F1F3FF"/>
+                  <a:srgbClr val="4F46E5"/>
                 </a:solidFill>
                 <a:latin typeface="Calibri"/>
               </a:rPr>
@@ -3308,7 +3352,7 @@
             <a:r>
               <a:rPr sz="2200" b="1">
                 <a:solidFill>
-                  <a:srgbClr val="C7CCF5"/>
+                  <a:srgbClr val="1E2140"/>
                 </a:solidFill>
                 <a:latin typeface="Calibri"/>
               </a:rPr>
@@ -3319,7 +3363,7 @@
       </p:sp>
       <p:sp>
         <p:nvSpPr>
-          <p:cNvPr id="7" name="TextBox 6"/>
+          <p:cNvPr id="8" name="TextBox 7"/>
           <p:cNvSpPr txBox="1"/>
           <p:nvPr/>
         </p:nvSpPr>
@@ -3343,7 +3387,7 @@
             <a:r>
               <a:rPr sz="1500" b="0">
                 <a:solidFill>
-                  <a:srgbClr val="9CA3C7"/>
+                  <a:srgbClr val="64708A"/>
                 </a:solidFill>
                 <a:latin typeface="Calibri"/>
               </a:rPr>
@@ -3354,7 +3398,7 @@
       </p:sp>
       <p:sp>
         <p:nvSpPr>
-          <p:cNvPr id="8" name="Rounded Rectangle 7"/>
+          <p:cNvPr id="9" name="Rounded Rectangle 8"/>
           <p:cNvSpPr/>
           <p:nvPr/>
         </p:nvSpPr>
@@ -3369,11 +3413,11 @@
             </a:avLst>
           </a:prstGeom>
           <a:solidFill>
-            <a:srgbClr val="1A1D33"/>
+            <a:srgbClr val="F6F7FC"/>
           </a:solidFill>
           <a:ln w="12700">
             <a:solidFill>
-              <a:srgbClr val="353A5C"/>
+              <a:srgbClr val="DDE1F2"/>
             </a:solidFill>
           </a:ln>
           <a:effectLst/>
@@ -3402,7 +3446,7 @@
       </p:sp>
       <p:sp>
         <p:nvSpPr>
-          <p:cNvPr id="9" name="TextBox 8"/>
+          <p:cNvPr id="10" name="TextBox 9"/>
           <p:cNvSpPr txBox="1"/>
           <p:nvPr/>
         </p:nvSpPr>
@@ -3426,7 +3470,7 @@
             <a:r>
               <a:rPr sz="1200" b="1">
                 <a:solidFill>
-                  <a:srgbClr val="F59E0B"/>
+                  <a:srgbClr val="D97706"/>
                 </a:solidFill>
                 <a:latin typeface="Calibri"/>
               </a:rPr>
@@ -3437,7 +3481,7 @@
       </p:sp>
       <p:sp>
         <p:nvSpPr>
-          <p:cNvPr id="10" name="TextBox 9"/>
+          <p:cNvPr id="11" name="TextBox 10"/>
           <p:cNvSpPr txBox="1"/>
           <p:nvPr/>
         </p:nvSpPr>
@@ -3461,7 +3505,7 @@
             <a:r>
               <a:rPr sz="1900" b="1">
                 <a:solidFill>
-                  <a:srgbClr val="F1F3FF"/>
+                  <a:srgbClr val="1E2140"/>
                 </a:solidFill>
                 <a:latin typeface="Calibri"/>
               </a:rPr>
@@ -3472,7 +3516,7 @@
       </p:sp>
       <p:sp>
         <p:nvSpPr>
-          <p:cNvPr id="11" name="TextBox 10"/>
+          <p:cNvPr id="12" name="TextBox 11"/>
           <p:cNvSpPr txBox="1"/>
           <p:nvPr/>
         </p:nvSpPr>
@@ -3496,7 +3540,7 @@
             <a:r>
               <a:rPr sz="1400" b="0">
                 <a:solidFill>
-                  <a:srgbClr val="9CA3C7"/>
+                  <a:srgbClr val="64708A"/>
                 </a:solidFill>
                 <a:latin typeface="Calibri"/>
               </a:rPr>
@@ -3507,7 +3551,7 @@
       </p:sp>
       <p:sp>
         <p:nvSpPr>
-          <p:cNvPr id="12" name="TextBox 11"/>
+          <p:cNvPr id="13" name="TextBox 12"/>
           <p:cNvSpPr txBox="1"/>
           <p:nvPr/>
         </p:nvSpPr>
@@ -3531,7 +3575,7 @@
             <a:r>
               <a:rPr sz="1300" b="0">
                 <a:solidFill>
-                  <a:srgbClr val="9CA3C7"/>
+                  <a:srgbClr val="64708A"/>
                 </a:solidFill>
                 <a:latin typeface="Calibri"/>
               </a:rPr>
@@ -3542,7 +3586,7 @@
       </p:sp>
       <p:sp>
         <p:nvSpPr>
-          <p:cNvPr id="13" name="TextBox 12"/>
+          <p:cNvPr id="14" name="TextBox 13"/>
           <p:cNvSpPr txBox="1"/>
           <p:nvPr/>
         </p:nvSpPr>
@@ -3566,7 +3610,7 @@
             <a:r>
               <a:rPr sz="1300" b="0">
                 <a:solidFill>
-                  <a:srgbClr val="9CA3C7"/>
+                  <a:srgbClr val="64708A"/>
                 </a:solidFill>
                 <a:latin typeface="Calibri"/>
               </a:rPr>
@@ -3608,7 +3652,7 @@
             <a:avLst/>
           </a:prstGeom>
           <a:solidFill>
-            <a:srgbClr val="0F1120"/>
+            <a:srgbClr val="FFFFFF"/>
           </a:solidFill>
           <a:ln>
             <a:noFill/>
@@ -3652,7 +3696,7 @@
             <a:avLst/>
           </a:prstGeom>
           <a:solidFill>
-            <a:srgbClr val="6366F1"/>
+            <a:srgbClr val="4F46E5"/>
           </a:solidFill>
           <a:ln>
             <a:noFill/>
@@ -3707,7 +3751,7 @@
             <a:r>
               <a:rPr sz="1250" b="1">
                 <a:solidFill>
-                  <a:srgbClr val="6366F1"/>
+                  <a:srgbClr val="4F46E5"/>
                 </a:solidFill>
                 <a:latin typeface="Calibri"/>
               </a:rPr>
@@ -3742,7 +3786,7 @@
             <a:r>
               <a:rPr sz="2400" b="1">
                 <a:solidFill>
-                  <a:srgbClr val="F1F3FF"/>
+                  <a:srgbClr val="1E2140"/>
                 </a:solidFill>
                 <a:latin typeface="Calibri"/>
               </a:rPr>
@@ -3766,7 +3810,7 @@
             <a:avLst/>
           </a:prstGeom>
           <a:solidFill>
-            <a:srgbClr val="353A5C"/>
+            <a:srgbClr val="DDE1F2"/>
           </a:solidFill>
           <a:ln>
             <a:noFill/>
@@ -3810,7 +3854,7 @@
             <a:avLst/>
           </a:prstGeom>
           <a:solidFill>
-            <a:srgbClr val="090A16"/>
+            <a:srgbClr val="F1F2FA"/>
           </a:solidFill>
           <a:ln>
             <a:noFill/>
@@ -3841,97 +3885,23 @@
       </p:sp>
       <p:sp>
         <p:nvSpPr>
-          <p:cNvPr id="8" name="TextBox 7"/>
-          <p:cNvSpPr txBox="1"/>
-          <p:nvPr/>
-        </p:nvSpPr>
-        <p:spPr>
-          <a:xfrm>
-            <a:off x="411480" y="6547104"/>
-            <a:ext cx="8686800" cy="238658"/>
+          <p:cNvPr id="8" name="Rectangle 7"/>
+          <p:cNvSpPr/>
+          <p:nvPr/>
+        </p:nvSpPr>
+        <p:spPr>
+          <a:xfrm>
+            <a:off x="0" y="6547104"/>
+            <a:ext cx="12191695" cy="18288"/>
           </a:xfrm>
           <a:prstGeom prst="rect">
             <a:avLst/>
           </a:prstGeom>
-          <a:noFill/>
-        </p:spPr>
-        <p:txBody>
-          <a:bodyPr wrap="square" lIns="0" rIns="0" tIns="0" bIns="0">
-            <a:spAutoFit/>
-          </a:bodyPr>
-          <a:lstStyle/>
-          <a:p>
-            <a:pPr algn="l"/>
-            <a:r>
-              <a:rPr sz="950" b="0">
-                <a:solidFill>
-                  <a:srgbClr val="9CA3C7"/>
-                </a:solidFill>
-                <a:latin typeface="Calibri"/>
-              </a:rPr>
-              <a:t>FinGenius AI  •  M.Tech Mini Project  •  [Student Name]  •  [College Name]</a:t>
-            </a:r>
-          </a:p>
-        </p:txBody>
-      </p:sp>
-      <p:sp>
-        <p:nvSpPr>
-          <p:cNvPr id="9" name="TextBox 8"/>
-          <p:cNvSpPr txBox="1"/>
-          <p:nvPr/>
-        </p:nvSpPr>
-        <p:spPr>
-          <a:xfrm>
-            <a:off x="11094415" y="6547104"/>
-            <a:ext cx="685800" cy="310896"/>
-          </a:xfrm>
-          <a:prstGeom prst="rect">
-            <a:avLst/>
-          </a:prstGeom>
-          <a:noFill/>
-        </p:spPr>
-        <p:txBody>
-          <a:bodyPr wrap="square" lIns="0" rIns="0" tIns="0" bIns="0">
-            <a:spAutoFit/>
-          </a:bodyPr>
-          <a:lstStyle/>
-          <a:p>
-            <a:pPr algn="r"/>
-            <a:r>
-              <a:rPr sz="950" b="1">
-                <a:solidFill>
-                  <a:srgbClr val="6366F1"/>
-                </a:solidFill>
-                <a:latin typeface="Calibri"/>
-              </a:rPr>
-              <a:t>1</a:t>
-            </a:r>
-          </a:p>
-        </p:txBody>
-      </p:sp>
-      <p:sp>
-        <p:nvSpPr>
-          <p:cNvPr id="10" name="Rounded Rectangle 9"/>
-          <p:cNvSpPr/>
-          <p:nvPr/>
-        </p:nvSpPr>
-        <p:spPr>
-          <a:xfrm>
-            <a:off x="502920" y="1417320"/>
-            <a:ext cx="5623560" cy="4800600"/>
-          </a:xfrm>
-          <a:prstGeom prst="roundRect">
-            <a:avLst>
-              <a:gd name="adj" fmla="val 5000"/>
-            </a:avLst>
-          </a:prstGeom>
           <a:solidFill>
-            <a:srgbClr val="1A1D33"/>
+            <a:srgbClr val="DDE1F2"/>
           </a:solidFill>
-          <a:ln w="12700">
-            <a:solidFill>
-              <a:srgbClr val="353A5C"/>
-            </a:solidFill>
+          <a:ln>
+            <a:noFill/>
           </a:ln>
           <a:effectLst/>
         </p:spPr>
@@ -3959,14 +3929,14 @@
       </p:sp>
       <p:sp>
         <p:nvSpPr>
-          <p:cNvPr id="11" name="TextBox 10"/>
+          <p:cNvPr id="9" name="TextBox 8"/>
           <p:cNvSpPr txBox="1"/>
           <p:nvPr/>
         </p:nvSpPr>
         <p:spPr>
           <a:xfrm>
-            <a:off x="777240" y="1572768"/>
-            <a:ext cx="5120640" cy="365760"/>
+            <a:off x="411480" y="6574536"/>
+            <a:ext cx="8686800" cy="238658"/>
           </a:xfrm>
           <a:prstGeom prst="rect">
             <a:avLst/>
@@ -3981,9 +3951,127 @@
           <a:p>
             <a:pPr algn="l"/>
             <a:r>
+              <a:rPr sz="950" b="0">
+                <a:solidFill>
+                  <a:srgbClr val="64708A"/>
+                </a:solidFill>
+                <a:latin typeface="Calibri"/>
+              </a:rPr>
+              <a:t>FinGenius AI  •  M.Tech Mini Project  •  [Student Name]  •  [College Name]</a:t>
+            </a:r>
+          </a:p>
+        </p:txBody>
+      </p:sp>
+      <p:sp>
+        <p:nvSpPr>
+          <p:cNvPr id="10" name="TextBox 9"/>
+          <p:cNvSpPr txBox="1"/>
+          <p:nvPr/>
+        </p:nvSpPr>
+        <p:spPr>
+          <a:xfrm>
+            <a:off x="11094415" y="6574536"/>
+            <a:ext cx="685800" cy="256032"/>
+          </a:xfrm>
+          <a:prstGeom prst="rect">
+            <a:avLst/>
+          </a:prstGeom>
+          <a:noFill/>
+        </p:spPr>
+        <p:txBody>
+          <a:bodyPr wrap="square" lIns="0" rIns="0" tIns="0" bIns="0">
+            <a:spAutoFit/>
+          </a:bodyPr>
+          <a:lstStyle/>
+          <a:p>
+            <a:pPr algn="r"/>
+            <a:r>
+              <a:rPr sz="950" b="1">
+                <a:solidFill>
+                  <a:srgbClr val="4F46E5"/>
+                </a:solidFill>
+                <a:latin typeface="Calibri"/>
+              </a:rPr>
+              <a:t>1</a:t>
+            </a:r>
+          </a:p>
+        </p:txBody>
+      </p:sp>
+      <p:sp>
+        <p:nvSpPr>
+          <p:cNvPr id="11" name="Rounded Rectangle 10"/>
+          <p:cNvSpPr/>
+          <p:nvPr/>
+        </p:nvSpPr>
+        <p:spPr>
+          <a:xfrm>
+            <a:off x="502920" y="1417320"/>
+            <a:ext cx="5623560" cy="4800600"/>
+          </a:xfrm>
+          <a:prstGeom prst="roundRect">
+            <a:avLst>
+              <a:gd name="adj" fmla="val 5000"/>
+            </a:avLst>
+          </a:prstGeom>
+          <a:solidFill>
+            <a:srgbClr val="F6F7FC"/>
+          </a:solidFill>
+          <a:ln w="12700">
+            <a:solidFill>
+              <a:srgbClr val="DDE1F2"/>
+            </a:solidFill>
+          </a:ln>
+          <a:effectLst/>
+        </p:spPr>
+        <p:style>
+          <a:lnRef idx="1">
+            <a:schemeClr val="accent1"/>
+          </a:lnRef>
+          <a:fillRef idx="3">
+            <a:schemeClr val="accent1"/>
+          </a:fillRef>
+          <a:effectRef idx="2">
+            <a:schemeClr val="accent1"/>
+          </a:effectRef>
+          <a:fontRef idx="minor">
+            <a:schemeClr val="lt1"/>
+          </a:fontRef>
+        </p:style>
+        <p:txBody>
+          <a:bodyPr rtlCol="0" anchor="ctr"/>
+          <a:lstStyle/>
+          <a:p>
+            <a:pPr algn="ctr"/>
+          </a:p>
+        </p:txBody>
+      </p:sp>
+      <p:sp>
+        <p:nvSpPr>
+          <p:cNvPr id="12" name="TextBox 11"/>
+          <p:cNvSpPr txBox="1"/>
+          <p:nvPr/>
+        </p:nvSpPr>
+        <p:spPr>
+          <a:xfrm>
+            <a:off x="777240" y="1572768"/>
+            <a:ext cx="5120640" cy="365760"/>
+          </a:xfrm>
+          <a:prstGeom prst="rect">
+            <a:avLst/>
+          </a:prstGeom>
+          <a:noFill/>
+        </p:spPr>
+        <p:txBody>
+          <a:bodyPr wrap="square" lIns="0" rIns="0" tIns="0" bIns="0">
+            <a:spAutoFit/>
+          </a:bodyPr>
+          <a:lstStyle/>
+          <a:p>
+            <a:pPr algn="l"/>
+            <a:r>
               <a:rPr sz="1700" b="1">
                 <a:solidFill>
-                  <a:srgbClr val="F59E0B"/>
+                  <a:srgbClr val="D97706"/>
                 </a:solidFill>
                 <a:latin typeface="Calibri"/>
               </a:rPr>
@@ -3994,7 +4082,7 @@
       </p:sp>
       <p:sp>
         <p:nvSpPr>
-          <p:cNvPr id="12" name="TextBox 11"/>
+          <p:cNvPr id="13" name="TextBox 12"/>
           <p:cNvSpPr txBox="1"/>
           <p:nvPr/>
         </p:nvSpPr>
@@ -4022,7 +4110,7 @@
             <a:r>
               <a:rPr sz="1300" b="1">
                 <a:solidFill>
-                  <a:srgbClr val="F59E0B"/>
+                  <a:srgbClr val="D97706"/>
                 </a:solidFill>
                 <a:latin typeface="Calibri"/>
               </a:rPr>
@@ -4031,7 +4119,7 @@
             <a:r>
               <a:rPr sz="1300" b="1">
                 <a:solidFill>
-                  <a:srgbClr val="F1F3FF"/>
+                  <a:srgbClr val="1E2140"/>
                 </a:solidFill>
                 <a:latin typeface="Calibri"/>
               </a:rPr>
@@ -4040,7 +4128,7 @@
             <a:r>
               <a:rPr sz="1300" b="0">
                 <a:solidFill>
-                  <a:srgbClr val="9CA3C7"/>
+                  <a:srgbClr val="64708A"/>
                 </a:solidFill>
                 <a:latin typeface="Calibri"/>
               </a:rPr>
@@ -4056,7 +4144,7 @@
             <a:r>
               <a:rPr sz="1300" b="1">
                 <a:solidFill>
-                  <a:srgbClr val="F59E0B"/>
+                  <a:srgbClr val="D97706"/>
                 </a:solidFill>
                 <a:latin typeface="Calibri"/>
               </a:rPr>
@@ -4065,7 +4153,7 @@
             <a:r>
               <a:rPr sz="1300" b="1">
                 <a:solidFill>
-                  <a:srgbClr val="F1F3FF"/>
+                  <a:srgbClr val="1E2140"/>
                 </a:solidFill>
                 <a:latin typeface="Calibri"/>
               </a:rPr>
@@ -4074,7 +4162,7 @@
             <a:r>
               <a:rPr sz="1300" b="0">
                 <a:solidFill>
-                  <a:srgbClr val="9CA3C7"/>
+                  <a:srgbClr val="64708A"/>
                 </a:solidFill>
                 <a:latin typeface="Calibri"/>
               </a:rPr>
@@ -4090,7 +4178,7 @@
             <a:r>
               <a:rPr sz="1300" b="1">
                 <a:solidFill>
-                  <a:srgbClr val="F59E0B"/>
+                  <a:srgbClr val="D97706"/>
                 </a:solidFill>
                 <a:latin typeface="Calibri"/>
               </a:rPr>
@@ -4099,7 +4187,7 @@
             <a:r>
               <a:rPr sz="1300" b="1">
                 <a:solidFill>
-                  <a:srgbClr val="F1F3FF"/>
+                  <a:srgbClr val="1E2140"/>
                 </a:solidFill>
                 <a:latin typeface="Calibri"/>
               </a:rPr>
@@ -4108,7 +4196,7 @@
             <a:r>
               <a:rPr sz="1300" b="0">
                 <a:solidFill>
-                  <a:srgbClr val="9CA3C7"/>
+                  <a:srgbClr val="64708A"/>
                 </a:solidFill>
                 <a:latin typeface="Calibri"/>
               </a:rPr>
@@ -4124,7 +4212,7 @@
             <a:r>
               <a:rPr sz="1300" b="1">
                 <a:solidFill>
-                  <a:srgbClr val="F59E0B"/>
+                  <a:srgbClr val="D97706"/>
                 </a:solidFill>
                 <a:latin typeface="Calibri"/>
               </a:rPr>
@@ -4133,7 +4221,7 @@
             <a:r>
               <a:rPr sz="1300" b="1">
                 <a:solidFill>
-                  <a:srgbClr val="F1F3FF"/>
+                  <a:srgbClr val="1E2140"/>
                 </a:solidFill>
                 <a:latin typeface="Calibri"/>
               </a:rPr>
@@ -4142,7 +4230,7 @@
             <a:r>
               <a:rPr sz="1300" b="0">
                 <a:solidFill>
-                  <a:srgbClr val="9CA3C7"/>
+                  <a:srgbClr val="64708A"/>
                 </a:solidFill>
                 <a:latin typeface="Calibri"/>
               </a:rPr>
@@ -4158,7 +4246,7 @@
             <a:r>
               <a:rPr sz="1300" b="1">
                 <a:solidFill>
-                  <a:srgbClr val="F59E0B"/>
+                  <a:srgbClr val="D97706"/>
                 </a:solidFill>
                 <a:latin typeface="Calibri"/>
               </a:rPr>
@@ -4167,7 +4255,7 @@
             <a:r>
               <a:rPr sz="1300" b="1">
                 <a:solidFill>
-                  <a:srgbClr val="F1F3FF"/>
+                  <a:srgbClr val="1E2140"/>
                 </a:solidFill>
                 <a:latin typeface="Calibri"/>
               </a:rPr>
@@ -4176,7 +4264,7 @@
             <a:r>
               <a:rPr sz="1300" b="0">
                 <a:solidFill>
-                  <a:srgbClr val="9CA3C7"/>
+                  <a:srgbClr val="64708A"/>
                 </a:solidFill>
                 <a:latin typeface="Calibri"/>
               </a:rPr>
@@ -4187,7 +4275,7 @@
       </p:sp>
       <p:sp>
         <p:nvSpPr>
-          <p:cNvPr id="13" name="Rounded Rectangle 12"/>
+          <p:cNvPr id="14" name="Rounded Rectangle 13"/>
           <p:cNvSpPr/>
           <p:nvPr/>
         </p:nvSpPr>
@@ -4202,11 +4290,11 @@
             </a:avLst>
           </a:prstGeom>
           <a:solidFill>
-            <a:srgbClr val="1A1D33"/>
+            <a:srgbClr val="F6F7FC"/>
           </a:solidFill>
           <a:ln w="12700">
             <a:solidFill>
-              <a:srgbClr val="353A5C"/>
+              <a:srgbClr val="DDE1F2"/>
             </a:solidFill>
           </a:ln>
           <a:effectLst/>
@@ -4235,7 +4323,7 @@
       </p:sp>
       <p:sp>
         <p:nvSpPr>
-          <p:cNvPr id="14" name="TextBox 13"/>
+          <p:cNvPr id="15" name="TextBox 14"/>
           <p:cNvSpPr txBox="1"/>
           <p:nvPr/>
         </p:nvSpPr>
@@ -4259,7 +4347,7 @@
             <a:r>
               <a:rPr sz="1700" b="1">
                 <a:solidFill>
-                  <a:srgbClr val="22C55E"/>
+                  <a:srgbClr val="16A34A"/>
                 </a:solidFill>
                 <a:latin typeface="Calibri"/>
               </a:rPr>
@@ -4270,7 +4358,7 @@
       </p:sp>
       <p:sp>
         <p:nvSpPr>
-          <p:cNvPr id="15" name="TextBox 14"/>
+          <p:cNvPr id="16" name="TextBox 15"/>
           <p:cNvSpPr txBox="1"/>
           <p:nvPr/>
         </p:nvSpPr>
@@ -4298,7 +4386,7 @@
             <a:r>
               <a:rPr sz="1300" b="1">
                 <a:solidFill>
-                  <a:srgbClr val="22C55E"/>
+                  <a:srgbClr val="16A34A"/>
                 </a:solidFill>
                 <a:latin typeface="Calibri"/>
               </a:rPr>
@@ -4307,7 +4395,7 @@
             <a:r>
               <a:rPr sz="1300" b="1">
                 <a:solidFill>
-                  <a:srgbClr val="F1F3FF"/>
+                  <a:srgbClr val="1E2140"/>
                 </a:solidFill>
                 <a:latin typeface="Calibri"/>
               </a:rPr>
@@ -4316,7 +4404,7 @@
             <a:r>
               <a:rPr sz="1300" b="0">
                 <a:solidFill>
-                  <a:srgbClr val="9CA3C7"/>
+                  <a:srgbClr val="64708A"/>
                 </a:solidFill>
                 <a:latin typeface="Calibri"/>
               </a:rPr>
@@ -4332,7 +4420,7 @@
             <a:r>
               <a:rPr sz="1300" b="1">
                 <a:solidFill>
-                  <a:srgbClr val="22C55E"/>
+                  <a:srgbClr val="16A34A"/>
                 </a:solidFill>
                 <a:latin typeface="Calibri"/>
               </a:rPr>
@@ -4341,7 +4429,7 @@
             <a:r>
               <a:rPr sz="1300" b="1">
                 <a:solidFill>
-                  <a:srgbClr val="F1F3FF"/>
+                  <a:srgbClr val="1E2140"/>
                 </a:solidFill>
                 <a:latin typeface="Calibri"/>
               </a:rPr>
@@ -4350,7 +4438,7 @@
             <a:r>
               <a:rPr sz="1300" b="0">
                 <a:solidFill>
-                  <a:srgbClr val="9CA3C7"/>
+                  <a:srgbClr val="64708A"/>
                 </a:solidFill>
                 <a:latin typeface="Calibri"/>
               </a:rPr>
@@ -4366,7 +4454,7 @@
             <a:r>
               <a:rPr sz="1300" b="1">
                 <a:solidFill>
-                  <a:srgbClr val="22C55E"/>
+                  <a:srgbClr val="16A34A"/>
                 </a:solidFill>
                 <a:latin typeface="Calibri"/>
               </a:rPr>
@@ -4375,7 +4463,7 @@
             <a:r>
               <a:rPr sz="1300" b="1">
                 <a:solidFill>
-                  <a:srgbClr val="F1F3FF"/>
+                  <a:srgbClr val="1E2140"/>
                 </a:solidFill>
                 <a:latin typeface="Calibri"/>
               </a:rPr>
@@ -4384,7 +4472,7 @@
             <a:r>
               <a:rPr sz="1300" b="0">
                 <a:solidFill>
-                  <a:srgbClr val="9CA3C7"/>
+                  <a:srgbClr val="64708A"/>
                 </a:solidFill>
                 <a:latin typeface="Calibri"/>
               </a:rPr>
@@ -4400,7 +4488,7 @@
             <a:r>
               <a:rPr sz="1300" b="1">
                 <a:solidFill>
-                  <a:srgbClr val="22C55E"/>
+                  <a:srgbClr val="16A34A"/>
                 </a:solidFill>
                 <a:latin typeface="Calibri"/>
               </a:rPr>
@@ -4409,7 +4497,7 @@
             <a:r>
               <a:rPr sz="1300" b="1">
                 <a:solidFill>
-                  <a:srgbClr val="F1F3FF"/>
+                  <a:srgbClr val="1E2140"/>
                 </a:solidFill>
                 <a:latin typeface="Calibri"/>
               </a:rPr>
@@ -4418,7 +4506,7 @@
             <a:r>
               <a:rPr sz="1300" b="0">
                 <a:solidFill>
-                  <a:srgbClr val="9CA3C7"/>
+                  <a:srgbClr val="64708A"/>
                 </a:solidFill>
                 <a:latin typeface="Calibri"/>
               </a:rPr>
@@ -4434,7 +4522,7 @@
             <a:r>
               <a:rPr sz="1300" b="1">
                 <a:solidFill>
-                  <a:srgbClr val="22C55E"/>
+                  <a:srgbClr val="16A34A"/>
                 </a:solidFill>
                 <a:latin typeface="Calibri"/>
               </a:rPr>
@@ -4443,7 +4531,7 @@
             <a:r>
               <a:rPr sz="1300" b="1">
                 <a:solidFill>
-                  <a:srgbClr val="F1F3FF"/>
+                  <a:srgbClr val="1E2140"/>
                 </a:solidFill>
                 <a:latin typeface="Calibri"/>
               </a:rPr>
@@ -4452,7 +4540,7 @@
             <a:r>
               <a:rPr sz="1300" b="0">
                 <a:solidFill>
-                  <a:srgbClr val="9CA3C7"/>
+                  <a:srgbClr val="64708A"/>
                 </a:solidFill>
                 <a:latin typeface="Calibri"/>
               </a:rPr>
@@ -4494,7 +4582,7 @@
             <a:avLst/>
           </a:prstGeom>
           <a:solidFill>
-            <a:srgbClr val="0F1120"/>
+            <a:srgbClr val="FFFFFF"/>
           </a:solidFill>
           <a:ln>
             <a:noFill/>
@@ -4538,7 +4626,7 @@
             <a:avLst/>
           </a:prstGeom>
           <a:solidFill>
-            <a:srgbClr val="22C55E"/>
+            <a:srgbClr val="16A34A"/>
           </a:solidFill>
           <a:ln>
             <a:noFill/>
@@ -4593,7 +4681,7 @@
             <a:r>
               <a:rPr sz="1250" b="1">
                 <a:solidFill>
-                  <a:srgbClr val="22C55E"/>
+                  <a:srgbClr val="16A34A"/>
                 </a:solidFill>
                 <a:latin typeface="Calibri"/>
               </a:rPr>
@@ -4628,7 +4716,7 @@
             <a:r>
               <a:rPr sz="2400" b="1">
                 <a:solidFill>
-                  <a:srgbClr val="F1F3FF"/>
+                  <a:srgbClr val="1E2140"/>
                 </a:solidFill>
                 <a:latin typeface="Calibri"/>
               </a:rPr>
@@ -4652,7 +4740,7 @@
             <a:avLst/>
           </a:prstGeom>
           <a:solidFill>
-            <a:srgbClr val="353A5C"/>
+            <a:srgbClr val="DDE1F2"/>
           </a:solidFill>
           <a:ln>
             <a:noFill/>
@@ -4696,7 +4784,7 @@
             <a:avLst/>
           </a:prstGeom>
           <a:solidFill>
-            <a:srgbClr val="090A16"/>
+            <a:srgbClr val="F1F2FA"/>
           </a:solidFill>
           <a:ln>
             <a:noFill/>
@@ -4727,92 +4815,20 @@
       </p:sp>
       <p:sp>
         <p:nvSpPr>
-          <p:cNvPr id="8" name="TextBox 7"/>
-          <p:cNvSpPr txBox="1"/>
-          <p:nvPr/>
-        </p:nvSpPr>
-        <p:spPr>
-          <a:xfrm>
-            <a:off x="411480" y="6547104"/>
-            <a:ext cx="8686800" cy="238658"/>
+          <p:cNvPr id="8" name="Rectangle 7"/>
+          <p:cNvSpPr/>
+          <p:nvPr/>
+        </p:nvSpPr>
+        <p:spPr>
+          <a:xfrm>
+            <a:off x="0" y="6547104"/>
+            <a:ext cx="12191695" cy="18288"/>
           </a:xfrm>
           <a:prstGeom prst="rect">
             <a:avLst/>
           </a:prstGeom>
-          <a:noFill/>
-        </p:spPr>
-        <p:txBody>
-          <a:bodyPr wrap="square" lIns="0" rIns="0" tIns="0" bIns="0">
-            <a:spAutoFit/>
-          </a:bodyPr>
-          <a:lstStyle/>
-          <a:p>
-            <a:pPr algn="l"/>
-            <a:r>
-              <a:rPr sz="950" b="0">
-                <a:solidFill>
-                  <a:srgbClr val="9CA3C7"/>
-                </a:solidFill>
-                <a:latin typeface="Calibri"/>
-              </a:rPr>
-              <a:t>FinGenius AI  •  M.Tech Mini Project  •  [Student Name]  •  [College Name]</a:t>
-            </a:r>
-          </a:p>
-        </p:txBody>
-      </p:sp>
-      <p:sp>
-        <p:nvSpPr>
-          <p:cNvPr id="9" name="TextBox 8"/>
-          <p:cNvSpPr txBox="1"/>
-          <p:nvPr/>
-        </p:nvSpPr>
-        <p:spPr>
-          <a:xfrm>
-            <a:off x="11094415" y="6547104"/>
-            <a:ext cx="685800" cy="310896"/>
-          </a:xfrm>
-          <a:prstGeom prst="rect">
-            <a:avLst/>
-          </a:prstGeom>
-          <a:noFill/>
-        </p:spPr>
-        <p:txBody>
-          <a:bodyPr wrap="square" lIns="0" rIns="0" tIns="0" bIns="0">
-            <a:spAutoFit/>
-          </a:bodyPr>
-          <a:lstStyle/>
-          <a:p>
-            <a:pPr algn="r"/>
-            <a:r>
-              <a:rPr sz="950" b="1">
-                <a:solidFill>
-                  <a:srgbClr val="22C55E"/>
-                </a:solidFill>
-                <a:latin typeface="Calibri"/>
-              </a:rPr>
-              <a:t>2</a:t>
-            </a:r>
-          </a:p>
-        </p:txBody>
-      </p:sp>
-      <p:sp>
-        <p:nvSpPr>
-          <p:cNvPr id="10" name="Rounded Rectangle 9"/>
-          <p:cNvSpPr/>
-          <p:nvPr/>
-        </p:nvSpPr>
-        <p:spPr>
-          <a:xfrm>
-            <a:off x="457200" y="1371600"/>
-            <a:ext cx="5532120" cy="365760"/>
-          </a:xfrm>
-          <a:prstGeom prst="roundRect">
-            <a:avLst>
-              <a:gd name="adj" fmla="val 40000"/>
-            </a:avLst>
-          </a:prstGeom>
           <a:solidFill>
-            <a:srgbClr val="6366F1"/>
+            <a:srgbClr val="DDE1F2"/>
           </a:solidFill>
           <a:ln>
             <a:noFill/>
@@ -4838,14 +4854,75 @@
           <a:lstStyle/>
           <a:p>
             <a:pPr algn="ctr"/>
-            <a:r>
-              <a:rPr sz="1300" b="1">
-                <a:solidFill>
-                  <a:srgbClr val="FFFFFF"/>
-                </a:solidFill>
-                <a:latin typeface="Calibri"/>
-              </a:rPr>
-              <a:t>CLIENT SIDE  •  React.js Frontend</a:t>
+          </a:p>
+        </p:txBody>
+      </p:sp>
+      <p:sp>
+        <p:nvSpPr>
+          <p:cNvPr id="9" name="TextBox 8"/>
+          <p:cNvSpPr txBox="1"/>
+          <p:nvPr/>
+        </p:nvSpPr>
+        <p:spPr>
+          <a:xfrm>
+            <a:off x="411480" y="6574536"/>
+            <a:ext cx="8686800" cy="238658"/>
+          </a:xfrm>
+          <a:prstGeom prst="rect">
+            <a:avLst/>
+          </a:prstGeom>
+          <a:noFill/>
+        </p:spPr>
+        <p:txBody>
+          <a:bodyPr wrap="square" lIns="0" rIns="0" tIns="0" bIns="0">
+            <a:spAutoFit/>
+          </a:bodyPr>
+          <a:lstStyle/>
+          <a:p>
+            <a:pPr algn="l"/>
+            <a:r>
+              <a:rPr sz="950" b="0">
+                <a:solidFill>
+                  <a:srgbClr val="64708A"/>
+                </a:solidFill>
+                <a:latin typeface="Calibri"/>
+              </a:rPr>
+              <a:t>FinGenius AI  •  M.Tech Mini Project  •  [Student Name]  •  [College Name]</a:t>
+            </a:r>
+          </a:p>
+        </p:txBody>
+      </p:sp>
+      <p:sp>
+        <p:nvSpPr>
+          <p:cNvPr id="10" name="TextBox 9"/>
+          <p:cNvSpPr txBox="1"/>
+          <p:nvPr/>
+        </p:nvSpPr>
+        <p:spPr>
+          <a:xfrm>
+            <a:off x="11094415" y="6574536"/>
+            <a:ext cx="685800" cy="256032"/>
+          </a:xfrm>
+          <a:prstGeom prst="rect">
+            <a:avLst/>
+          </a:prstGeom>
+          <a:noFill/>
+        </p:spPr>
+        <p:txBody>
+          <a:bodyPr wrap="square" lIns="0" rIns="0" tIns="0" bIns="0">
+            <a:spAutoFit/>
+          </a:bodyPr>
+          <a:lstStyle/>
+          <a:p>
+            <a:pPr algn="r"/>
+            <a:r>
+              <a:rPr sz="950" b="1">
+                <a:solidFill>
+                  <a:srgbClr val="16A34A"/>
+                </a:solidFill>
+                <a:latin typeface="Calibri"/>
+              </a:rPr>
+              <a:t>2</a:t>
             </a:r>
           </a:p>
         </p:txBody>
@@ -4858,21 +4935,19 @@
         </p:nvSpPr>
         <p:spPr>
           <a:xfrm>
-            <a:off x="457200" y="1828800"/>
-            <a:ext cx="5532120" cy="4526280"/>
+            <a:off x="457200" y="1371600"/>
+            <a:ext cx="5532120" cy="365760"/>
           </a:xfrm>
           <a:prstGeom prst="roundRect">
             <a:avLst>
-              <a:gd name="adj" fmla="val 5000"/>
+              <a:gd name="adj" fmla="val 40000"/>
             </a:avLst>
           </a:prstGeom>
           <a:solidFill>
-            <a:srgbClr val="1A1D33"/>
+            <a:srgbClr val="4F46E5"/>
           </a:solidFill>
-          <a:ln w="12700">
-            <a:solidFill>
-              <a:srgbClr val="353A5C"/>
-            </a:solidFill>
+          <a:ln>
+            <a:noFill/>
           </a:ln>
           <a:effectLst/>
         </p:spPr>
@@ -4895,12 +4970,69 @@
           <a:lstStyle/>
           <a:p>
             <a:pPr algn="ctr"/>
-          </a:p>
-        </p:txBody>
-      </p:sp>
-      <p:sp>
-        <p:nvSpPr>
-          <p:cNvPr id="12" name="TextBox 11"/>
+            <a:r>
+              <a:rPr sz="1300" b="1">
+                <a:solidFill>
+                  <a:srgbClr val="FFFFFF"/>
+                </a:solidFill>
+                <a:latin typeface="Calibri"/>
+              </a:rPr>
+              <a:t>CLIENT SIDE  •  React.js Frontend</a:t>
+            </a:r>
+          </a:p>
+        </p:txBody>
+      </p:sp>
+      <p:sp>
+        <p:nvSpPr>
+          <p:cNvPr id="12" name="Rounded Rectangle 11"/>
+          <p:cNvSpPr/>
+          <p:nvPr/>
+        </p:nvSpPr>
+        <p:spPr>
+          <a:xfrm>
+            <a:off x="457200" y="1828800"/>
+            <a:ext cx="5532120" cy="4526280"/>
+          </a:xfrm>
+          <a:prstGeom prst="roundRect">
+            <a:avLst>
+              <a:gd name="adj" fmla="val 5000"/>
+            </a:avLst>
+          </a:prstGeom>
+          <a:solidFill>
+            <a:srgbClr val="F6F7FC"/>
+          </a:solidFill>
+          <a:ln w="12700">
+            <a:solidFill>
+              <a:srgbClr val="DDE1F2"/>
+            </a:solidFill>
+          </a:ln>
+          <a:effectLst/>
+        </p:spPr>
+        <p:style>
+          <a:lnRef idx="1">
+            <a:schemeClr val="accent1"/>
+          </a:lnRef>
+          <a:fillRef idx="3">
+            <a:schemeClr val="accent1"/>
+          </a:fillRef>
+          <a:effectRef idx="2">
+            <a:schemeClr val="accent1"/>
+          </a:effectRef>
+          <a:fontRef idx="minor">
+            <a:schemeClr val="lt1"/>
+          </a:fontRef>
+        </p:style>
+        <p:txBody>
+          <a:bodyPr rtlCol="0" anchor="ctr"/>
+          <a:lstStyle/>
+          <a:p>
+            <a:pPr algn="ctr"/>
+          </a:p>
+        </p:txBody>
+      </p:sp>
+      <p:sp>
+        <p:nvSpPr>
+          <p:cNvPr id="13" name="TextBox 12"/>
           <p:cNvSpPr txBox="1"/>
           <p:nvPr/>
         </p:nvSpPr>
@@ -4928,7 +5060,7 @@
             <a:r>
               <a:rPr sz="1250" b="1">
                 <a:solidFill>
-                  <a:srgbClr val="6366F1"/>
+                  <a:srgbClr val="4F46E5"/>
                 </a:solidFill>
                 <a:latin typeface="Calibri"/>
               </a:rPr>
@@ -4937,7 +5069,7 @@
             <a:r>
               <a:rPr sz="1250" b="1">
                 <a:solidFill>
-                  <a:srgbClr val="F1F3FF"/>
+                  <a:srgbClr val="1E2140"/>
                 </a:solidFill>
                 <a:latin typeface="Calibri"/>
               </a:rPr>
@@ -4946,7 +5078,7 @@
             <a:r>
               <a:rPr sz="1250" b="0">
                 <a:solidFill>
-                  <a:srgbClr val="9CA3C7"/>
+                  <a:srgbClr val="64708A"/>
                 </a:solidFill>
                 <a:latin typeface="Calibri"/>
               </a:rPr>
@@ -4962,7 +5094,7 @@
             <a:r>
               <a:rPr sz="1250" b="1">
                 <a:solidFill>
-                  <a:srgbClr val="6366F1"/>
+                  <a:srgbClr val="4F46E5"/>
                 </a:solidFill>
                 <a:latin typeface="Calibri"/>
               </a:rPr>
@@ -4971,7 +5103,7 @@
             <a:r>
               <a:rPr sz="1250" b="1">
                 <a:solidFill>
-                  <a:srgbClr val="F1F3FF"/>
+                  <a:srgbClr val="1E2140"/>
                 </a:solidFill>
                 <a:latin typeface="Calibri"/>
               </a:rPr>
@@ -4980,7 +5112,7 @@
             <a:r>
               <a:rPr sz="1250" b="0">
                 <a:solidFill>
-                  <a:srgbClr val="9CA3C7"/>
+                  <a:srgbClr val="64708A"/>
                 </a:solidFill>
                 <a:latin typeface="Calibri"/>
               </a:rPr>
@@ -4996,7 +5128,7 @@
             <a:r>
               <a:rPr sz="1250" b="1">
                 <a:solidFill>
-                  <a:srgbClr val="6366F1"/>
+                  <a:srgbClr val="4F46E5"/>
                 </a:solidFill>
                 <a:latin typeface="Calibri"/>
               </a:rPr>
@@ -5005,7 +5137,7 @@
             <a:r>
               <a:rPr sz="1250" b="1">
                 <a:solidFill>
-                  <a:srgbClr val="F1F3FF"/>
+                  <a:srgbClr val="1E2140"/>
                 </a:solidFill>
                 <a:latin typeface="Calibri"/>
               </a:rPr>
@@ -5014,7 +5146,7 @@
             <a:r>
               <a:rPr sz="1250" b="0">
                 <a:solidFill>
-                  <a:srgbClr val="9CA3C7"/>
+                  <a:srgbClr val="64708A"/>
                 </a:solidFill>
                 <a:latin typeface="Calibri"/>
               </a:rPr>
@@ -5030,7 +5162,7 @@
             <a:r>
               <a:rPr sz="1250" b="1">
                 <a:solidFill>
-                  <a:srgbClr val="6366F1"/>
+                  <a:srgbClr val="4F46E5"/>
                 </a:solidFill>
                 <a:latin typeface="Calibri"/>
               </a:rPr>
@@ -5039,7 +5171,7 @@
             <a:r>
               <a:rPr sz="1250" b="1">
                 <a:solidFill>
-                  <a:srgbClr val="F1F3FF"/>
+                  <a:srgbClr val="1E2140"/>
                 </a:solidFill>
                 <a:latin typeface="Calibri"/>
               </a:rPr>
@@ -5048,7 +5180,7 @@
             <a:r>
               <a:rPr sz="1250" b="0">
                 <a:solidFill>
-                  <a:srgbClr val="9CA3C7"/>
+                  <a:srgbClr val="64708A"/>
                 </a:solidFill>
                 <a:latin typeface="Calibri"/>
               </a:rPr>
@@ -5064,7 +5196,7 @@
             <a:r>
               <a:rPr sz="1250" b="1">
                 <a:solidFill>
-                  <a:srgbClr val="6366F1"/>
+                  <a:srgbClr val="4F46E5"/>
                 </a:solidFill>
                 <a:latin typeface="Calibri"/>
               </a:rPr>
@@ -5073,7 +5205,7 @@
             <a:r>
               <a:rPr sz="1250" b="1">
                 <a:solidFill>
-                  <a:srgbClr val="F1F3FF"/>
+                  <a:srgbClr val="1E2140"/>
                 </a:solidFill>
                 <a:latin typeface="Calibri"/>
               </a:rPr>
@@ -5082,7 +5214,7 @@
             <a:r>
               <a:rPr sz="1250" b="0">
                 <a:solidFill>
-                  <a:srgbClr val="9CA3C7"/>
+                  <a:srgbClr val="64708A"/>
                 </a:solidFill>
                 <a:latin typeface="Calibri"/>
               </a:rPr>
@@ -5098,7 +5230,7 @@
             <a:r>
               <a:rPr sz="1250" b="1">
                 <a:solidFill>
-                  <a:srgbClr val="6366F1"/>
+                  <a:srgbClr val="4F46E5"/>
                 </a:solidFill>
                 <a:latin typeface="Calibri"/>
               </a:rPr>
@@ -5107,7 +5239,7 @@
             <a:r>
               <a:rPr sz="1250" b="1">
                 <a:solidFill>
-                  <a:srgbClr val="F1F3FF"/>
+                  <a:srgbClr val="1E2140"/>
                 </a:solidFill>
                 <a:latin typeface="Calibri"/>
               </a:rPr>
@@ -5116,7 +5248,7 @@
             <a:r>
               <a:rPr sz="1250" b="0">
                 <a:solidFill>
-                  <a:srgbClr val="9CA3C7"/>
+                  <a:srgbClr val="64708A"/>
                 </a:solidFill>
                 <a:latin typeface="Calibri"/>
               </a:rPr>
@@ -5132,7 +5264,7 @@
             <a:r>
               <a:rPr sz="1250" b="1">
                 <a:solidFill>
-                  <a:srgbClr val="6366F1"/>
+                  <a:srgbClr val="4F46E5"/>
                 </a:solidFill>
                 <a:latin typeface="Calibri"/>
               </a:rPr>
@@ -5141,7 +5273,7 @@
             <a:r>
               <a:rPr sz="1250" b="1">
                 <a:solidFill>
-                  <a:srgbClr val="F1F3FF"/>
+                  <a:srgbClr val="1E2140"/>
                 </a:solidFill>
                 <a:latin typeface="Calibri"/>
               </a:rPr>
@@ -5150,7 +5282,7 @@
             <a:r>
               <a:rPr sz="1250" b="0">
                 <a:solidFill>
-                  <a:srgbClr val="9CA3C7"/>
+                  <a:srgbClr val="64708A"/>
                 </a:solidFill>
                 <a:latin typeface="Calibri"/>
               </a:rPr>
@@ -5161,7 +5293,7 @@
       </p:sp>
       <p:sp>
         <p:nvSpPr>
-          <p:cNvPr id="13" name="Rounded Rectangle 12"/>
+          <p:cNvPr id="14" name="Rounded Rectangle 13"/>
           <p:cNvSpPr/>
           <p:nvPr/>
         </p:nvSpPr>
@@ -5176,7 +5308,7 @@
             </a:avLst>
           </a:prstGeom>
           <a:solidFill>
-            <a:srgbClr val="22C55E"/>
+            <a:srgbClr val="16A34A"/>
           </a:solidFill>
           <a:ln>
             <a:noFill/>
@@ -5216,7 +5348,7 @@
       </p:sp>
       <p:sp>
         <p:nvSpPr>
-          <p:cNvPr id="14" name="Rounded Rectangle 13"/>
+          <p:cNvPr id="15" name="Rounded Rectangle 14"/>
           <p:cNvSpPr/>
           <p:nvPr/>
         </p:nvSpPr>
@@ -5231,11 +5363,11 @@
             </a:avLst>
           </a:prstGeom>
           <a:solidFill>
-            <a:srgbClr val="1A1D33"/>
+            <a:srgbClr val="F6F7FC"/>
           </a:solidFill>
           <a:ln w="12700">
             <a:solidFill>
-              <a:srgbClr val="353A5C"/>
+              <a:srgbClr val="DDE1F2"/>
             </a:solidFill>
           </a:ln>
           <a:effectLst/>
@@ -5264,7 +5396,7 @@
       </p:sp>
       <p:sp>
         <p:nvSpPr>
-          <p:cNvPr id="15" name="TextBox 14"/>
+          <p:cNvPr id="16" name="TextBox 15"/>
           <p:cNvSpPr txBox="1"/>
           <p:nvPr/>
         </p:nvSpPr>
@@ -5292,7 +5424,7 @@
             <a:r>
               <a:rPr sz="1250" b="1">
                 <a:solidFill>
-                  <a:srgbClr val="22C55E"/>
+                  <a:srgbClr val="16A34A"/>
                 </a:solidFill>
                 <a:latin typeface="Calibri"/>
               </a:rPr>
@@ -5301,7 +5433,7 @@
             <a:r>
               <a:rPr sz="1250" b="1">
                 <a:solidFill>
-                  <a:srgbClr val="F1F3FF"/>
+                  <a:srgbClr val="1E2140"/>
                 </a:solidFill>
                 <a:latin typeface="Calibri"/>
               </a:rPr>
@@ -5310,7 +5442,7 @@
             <a:r>
               <a:rPr sz="1250" b="0">
                 <a:solidFill>
-                  <a:srgbClr val="9CA3C7"/>
+                  <a:srgbClr val="64708A"/>
                 </a:solidFill>
                 <a:latin typeface="Calibri"/>
               </a:rPr>
@@ -5326,7 +5458,7 @@
             <a:r>
               <a:rPr sz="1250" b="1">
                 <a:solidFill>
-                  <a:srgbClr val="22C55E"/>
+                  <a:srgbClr val="16A34A"/>
                 </a:solidFill>
                 <a:latin typeface="Calibri"/>
               </a:rPr>
@@ -5335,7 +5467,7 @@
             <a:r>
               <a:rPr sz="1250" b="1">
                 <a:solidFill>
-                  <a:srgbClr val="F1F3FF"/>
+                  <a:srgbClr val="1E2140"/>
                 </a:solidFill>
                 <a:latin typeface="Calibri"/>
               </a:rPr>
@@ -5344,7 +5476,7 @@
             <a:r>
               <a:rPr sz="1250" b="0">
                 <a:solidFill>
-                  <a:srgbClr val="9CA3C7"/>
+                  <a:srgbClr val="64708A"/>
                 </a:solidFill>
                 <a:latin typeface="Calibri"/>
               </a:rPr>
@@ -5360,7 +5492,7 @@
             <a:r>
               <a:rPr sz="1250" b="1">
                 <a:solidFill>
-                  <a:srgbClr val="22C55E"/>
+                  <a:srgbClr val="16A34A"/>
                 </a:solidFill>
                 <a:latin typeface="Calibri"/>
               </a:rPr>
@@ -5369,7 +5501,7 @@
             <a:r>
               <a:rPr sz="1250" b="1">
                 <a:solidFill>
-                  <a:srgbClr val="F1F3FF"/>
+                  <a:srgbClr val="1E2140"/>
                 </a:solidFill>
                 <a:latin typeface="Calibri"/>
               </a:rPr>
@@ -5378,7 +5510,7 @@
             <a:r>
               <a:rPr sz="1250" b="0">
                 <a:solidFill>
-                  <a:srgbClr val="9CA3C7"/>
+                  <a:srgbClr val="64708A"/>
                 </a:solidFill>
                 <a:latin typeface="Calibri"/>
               </a:rPr>
@@ -5394,7 +5526,7 @@
             <a:r>
               <a:rPr sz="1250" b="1">
                 <a:solidFill>
-                  <a:srgbClr val="22C55E"/>
+                  <a:srgbClr val="16A34A"/>
                 </a:solidFill>
                 <a:latin typeface="Calibri"/>
               </a:rPr>
@@ -5403,7 +5535,7 @@
             <a:r>
               <a:rPr sz="1250" b="1">
                 <a:solidFill>
-                  <a:srgbClr val="F1F3FF"/>
+                  <a:srgbClr val="1E2140"/>
                 </a:solidFill>
                 <a:latin typeface="Calibri"/>
               </a:rPr>
@@ -5412,7 +5544,7 @@
             <a:r>
               <a:rPr sz="1250" b="0">
                 <a:solidFill>
-                  <a:srgbClr val="9CA3C7"/>
+                  <a:srgbClr val="64708A"/>
                 </a:solidFill>
                 <a:latin typeface="Calibri"/>
               </a:rPr>
@@ -5428,7 +5560,7 @@
             <a:r>
               <a:rPr sz="1250" b="1">
                 <a:solidFill>
-                  <a:srgbClr val="22C55E"/>
+                  <a:srgbClr val="16A34A"/>
                 </a:solidFill>
                 <a:latin typeface="Calibri"/>
               </a:rPr>
@@ -5437,7 +5569,7 @@
             <a:r>
               <a:rPr sz="1250" b="1">
                 <a:solidFill>
-                  <a:srgbClr val="F1F3FF"/>
+                  <a:srgbClr val="1E2140"/>
                 </a:solidFill>
                 <a:latin typeface="Calibri"/>
               </a:rPr>
@@ -5446,7 +5578,7 @@
             <a:r>
               <a:rPr sz="1250" b="0">
                 <a:solidFill>
-                  <a:srgbClr val="9CA3C7"/>
+                  <a:srgbClr val="64708A"/>
                 </a:solidFill>
                 <a:latin typeface="Calibri"/>
               </a:rPr>
@@ -5462,7 +5594,7 @@
             <a:r>
               <a:rPr sz="1250" b="1">
                 <a:solidFill>
-                  <a:srgbClr val="22C55E"/>
+                  <a:srgbClr val="16A34A"/>
                 </a:solidFill>
                 <a:latin typeface="Calibri"/>
               </a:rPr>
@@ -5471,7 +5603,7 @@
             <a:r>
               <a:rPr sz="1250" b="1">
                 <a:solidFill>
-                  <a:srgbClr val="F1F3FF"/>
+                  <a:srgbClr val="1E2140"/>
                 </a:solidFill>
                 <a:latin typeface="Calibri"/>
               </a:rPr>
@@ -5480,7 +5612,7 @@
             <a:r>
               <a:rPr sz="1250" b="0">
                 <a:solidFill>
-                  <a:srgbClr val="9CA3C7"/>
+                  <a:srgbClr val="64708A"/>
                 </a:solidFill>
                 <a:latin typeface="Calibri"/>
               </a:rPr>
@@ -5496,7 +5628,7 @@
             <a:r>
               <a:rPr sz="1250" b="1">
                 <a:solidFill>
-                  <a:srgbClr val="22C55E"/>
+                  <a:srgbClr val="16A34A"/>
                 </a:solidFill>
                 <a:latin typeface="Calibri"/>
               </a:rPr>
@@ -5505,7 +5637,7 @@
             <a:r>
               <a:rPr sz="1250" b="1">
                 <a:solidFill>
-                  <a:srgbClr val="F1F3FF"/>
+                  <a:srgbClr val="1E2140"/>
                 </a:solidFill>
                 <a:latin typeface="Calibri"/>
               </a:rPr>
@@ -5514,7 +5646,7 @@
             <a:r>
               <a:rPr sz="1250" b="0">
                 <a:solidFill>
-                  <a:srgbClr val="9CA3C7"/>
+                  <a:srgbClr val="64708A"/>
                 </a:solidFill>
                 <a:latin typeface="Calibri"/>
               </a:rPr>
@@ -5556,7 +5688,7 @@
             <a:avLst/>
           </a:prstGeom>
           <a:solidFill>
-            <a:srgbClr val="0F1120"/>
+            <a:srgbClr val="FFFFFF"/>
           </a:solidFill>
           <a:ln>
             <a:noFill/>
@@ -5600,7 +5732,7 @@
             <a:avLst/>
           </a:prstGeom>
           <a:solidFill>
-            <a:srgbClr val="F59E0B"/>
+            <a:srgbClr val="D97706"/>
           </a:solidFill>
           <a:ln>
             <a:noFill/>
@@ -5655,7 +5787,7 @@
             <a:r>
               <a:rPr sz="1250" b="1">
                 <a:solidFill>
-                  <a:srgbClr val="F59E0B"/>
+                  <a:srgbClr val="D97706"/>
                 </a:solidFill>
                 <a:latin typeface="Calibri"/>
               </a:rPr>
@@ -5690,7 +5822,7 @@
             <a:r>
               <a:rPr sz="2400" b="1">
                 <a:solidFill>
-                  <a:srgbClr val="F1F3FF"/>
+                  <a:srgbClr val="1E2140"/>
                 </a:solidFill>
                 <a:latin typeface="Calibri"/>
               </a:rPr>
@@ -5714,7 +5846,7 @@
             <a:avLst/>
           </a:prstGeom>
           <a:solidFill>
-            <a:srgbClr val="353A5C"/>
+            <a:srgbClr val="DDE1F2"/>
           </a:solidFill>
           <a:ln>
             <a:noFill/>
@@ -5758,7 +5890,7 @@
             <a:avLst/>
           </a:prstGeom>
           <a:solidFill>
-            <a:srgbClr val="090A16"/>
+            <a:srgbClr val="F1F2FA"/>
           </a:solidFill>
           <a:ln>
             <a:noFill/>
@@ -5789,92 +5921,20 @@
       </p:sp>
       <p:sp>
         <p:nvSpPr>
-          <p:cNvPr id="8" name="TextBox 7"/>
-          <p:cNvSpPr txBox="1"/>
-          <p:nvPr/>
-        </p:nvSpPr>
-        <p:spPr>
-          <a:xfrm>
-            <a:off x="411480" y="6547104"/>
-            <a:ext cx="8686800" cy="238658"/>
+          <p:cNvPr id="8" name="Rectangle 7"/>
+          <p:cNvSpPr/>
+          <p:nvPr/>
+        </p:nvSpPr>
+        <p:spPr>
+          <a:xfrm>
+            <a:off x="0" y="6547104"/>
+            <a:ext cx="12191695" cy="18288"/>
           </a:xfrm>
           <a:prstGeom prst="rect">
             <a:avLst/>
           </a:prstGeom>
-          <a:noFill/>
-        </p:spPr>
-        <p:txBody>
-          <a:bodyPr wrap="square" lIns="0" rIns="0" tIns="0" bIns="0">
-            <a:spAutoFit/>
-          </a:bodyPr>
-          <a:lstStyle/>
-          <a:p>
-            <a:pPr algn="l"/>
-            <a:r>
-              <a:rPr sz="950" b="0">
-                <a:solidFill>
-                  <a:srgbClr val="9CA3C7"/>
-                </a:solidFill>
-                <a:latin typeface="Calibri"/>
-              </a:rPr>
-              <a:t>FinGenius AI  •  M.Tech Mini Project  •  [Student Name]  •  [College Name]</a:t>
-            </a:r>
-          </a:p>
-        </p:txBody>
-      </p:sp>
-      <p:sp>
-        <p:nvSpPr>
-          <p:cNvPr id="9" name="TextBox 8"/>
-          <p:cNvSpPr txBox="1"/>
-          <p:nvPr/>
-        </p:nvSpPr>
-        <p:spPr>
-          <a:xfrm>
-            <a:off x="11094415" y="6547104"/>
-            <a:ext cx="685800" cy="310896"/>
-          </a:xfrm>
-          <a:prstGeom prst="rect">
-            <a:avLst/>
-          </a:prstGeom>
-          <a:noFill/>
-        </p:spPr>
-        <p:txBody>
-          <a:bodyPr wrap="square" lIns="0" rIns="0" tIns="0" bIns="0">
-            <a:spAutoFit/>
-          </a:bodyPr>
-          <a:lstStyle/>
-          <a:p>
-            <a:pPr algn="r"/>
-            <a:r>
-              <a:rPr sz="950" b="1">
-                <a:solidFill>
-                  <a:srgbClr val="F59E0B"/>
-                </a:solidFill>
-                <a:latin typeface="Calibri"/>
-              </a:rPr>
-              <a:t>3</a:t>
-            </a:r>
-          </a:p>
-        </p:txBody>
-      </p:sp>
-      <p:sp>
-        <p:nvSpPr>
-          <p:cNvPr id="10" name="Rounded Rectangle 9"/>
-          <p:cNvSpPr/>
-          <p:nvPr/>
-        </p:nvSpPr>
-        <p:spPr>
-          <a:xfrm>
-            <a:off x="966063" y="1417320"/>
-            <a:ext cx="1481328" cy="566928"/>
-          </a:xfrm>
-          <a:prstGeom prst="roundRect">
-            <a:avLst>
-              <a:gd name="adj" fmla="val 50000"/>
-            </a:avLst>
-          </a:prstGeom>
           <a:solidFill>
-            <a:srgbClr val="6366F1"/>
+            <a:srgbClr val="DDE1F2"/>
           </a:solidFill>
           <a:ln>
             <a:noFill/>
@@ -5896,51 +5956,101 @@
           </a:fontRef>
         </p:style>
         <p:txBody>
-          <a:bodyPr rtlCol="0" anchor="ctr" wrap="square" lIns="25400" rIns="25400"/>
+          <a:bodyPr rtlCol="0" anchor="ctr"/>
           <a:lstStyle/>
           <a:p>
             <a:pPr algn="ctr"/>
-            <a:r>
-              <a:rPr sz="1150" b="1">
-                <a:solidFill>
-                  <a:srgbClr val="FFFFFF"/>
-                </a:solidFill>
-                <a:latin typeface="Calibri"/>
-              </a:rPr>
-              <a:t>Register &amp;
-Login</a:t>
-            </a:r>
-          </a:p>
-          <a:p>
-            <a:pPr algn="ctr"/>
-            <a:r>
-              <a:rPr sz="950">
-                <a:solidFill>
-                  <a:srgbClr val="E4E7FF"/>
-                </a:solidFill>
-                <a:latin typeface="Calibri"/>
-              </a:rPr>
-              <a:t>JWT + bcrypt</a:t>
-            </a:r>
-          </a:p>
-        </p:txBody>
-      </p:sp>
-      <p:sp>
-        <p:nvSpPr>
-          <p:cNvPr id="11" name="Right Arrow 10"/>
+          </a:p>
+        </p:txBody>
+      </p:sp>
+      <p:sp>
+        <p:nvSpPr>
+          <p:cNvPr id="9" name="TextBox 8"/>
+          <p:cNvSpPr txBox="1"/>
+          <p:nvPr/>
+        </p:nvSpPr>
+        <p:spPr>
+          <a:xfrm>
+            <a:off x="411480" y="6574536"/>
+            <a:ext cx="8686800" cy="238658"/>
+          </a:xfrm>
+          <a:prstGeom prst="rect">
+            <a:avLst/>
+          </a:prstGeom>
+          <a:noFill/>
+        </p:spPr>
+        <p:txBody>
+          <a:bodyPr wrap="square" lIns="0" rIns="0" tIns="0" bIns="0">
+            <a:spAutoFit/>
+          </a:bodyPr>
+          <a:lstStyle/>
+          <a:p>
+            <a:pPr algn="l"/>
+            <a:r>
+              <a:rPr sz="950" b="0">
+                <a:solidFill>
+                  <a:srgbClr val="64708A"/>
+                </a:solidFill>
+                <a:latin typeface="Calibri"/>
+              </a:rPr>
+              <a:t>FinGenius AI  •  M.Tech Mini Project  •  [Student Name]  •  [College Name]</a:t>
+            </a:r>
+          </a:p>
+        </p:txBody>
+      </p:sp>
+      <p:sp>
+        <p:nvSpPr>
+          <p:cNvPr id="10" name="TextBox 9"/>
+          <p:cNvSpPr txBox="1"/>
+          <p:nvPr/>
+        </p:nvSpPr>
+        <p:spPr>
+          <a:xfrm>
+            <a:off x="11094415" y="6574536"/>
+            <a:ext cx="685800" cy="256032"/>
+          </a:xfrm>
+          <a:prstGeom prst="rect">
+            <a:avLst/>
+          </a:prstGeom>
+          <a:noFill/>
+        </p:spPr>
+        <p:txBody>
+          <a:bodyPr wrap="square" lIns="0" rIns="0" tIns="0" bIns="0">
+            <a:spAutoFit/>
+          </a:bodyPr>
+          <a:lstStyle/>
+          <a:p>
+            <a:pPr algn="r"/>
+            <a:r>
+              <a:rPr sz="950" b="1">
+                <a:solidFill>
+                  <a:srgbClr val="D97706"/>
+                </a:solidFill>
+                <a:latin typeface="Calibri"/>
+              </a:rPr>
+              <a:t>3</a:t>
+            </a:r>
+          </a:p>
+        </p:txBody>
+      </p:sp>
+      <p:sp>
+        <p:nvSpPr>
+          <p:cNvPr id="11" name="Rounded Rectangle 10"/>
           <p:cNvSpPr/>
           <p:nvPr/>
         </p:nvSpPr>
         <p:spPr>
           <a:xfrm>
-            <a:off x="2465679" y="1581912"/>
-            <a:ext cx="237744" cy="237744"/>
-          </a:xfrm>
-          <a:prstGeom prst="rightArrow">
-            <a:avLst/>
+            <a:off x="966063" y="1417320"/>
+            <a:ext cx="1481328" cy="566928"/>
+          </a:xfrm>
+          <a:prstGeom prst="roundRect">
+            <a:avLst>
+              <a:gd name="adj" fmla="val 50000"/>
+            </a:avLst>
           </a:prstGeom>
           <a:solidFill>
-            <a:srgbClr val="9CA3C7"/>
+            <a:srgbClr val="4F46E5"/>
           </a:solidFill>
           <a:ln>
             <a:noFill/>
@@ -5962,31 +6072,51 @@
           </a:fontRef>
         </p:style>
         <p:txBody>
-          <a:bodyPr rtlCol="0" anchor="ctr"/>
+          <a:bodyPr rtlCol="0" anchor="ctr" wrap="square" lIns="25400" rIns="25400"/>
           <a:lstStyle/>
           <a:p>
             <a:pPr algn="ctr"/>
-          </a:p>
-        </p:txBody>
-      </p:sp>
-      <p:sp>
-        <p:nvSpPr>
-          <p:cNvPr id="12" name="Rounded Rectangle 11"/>
+            <a:r>
+              <a:rPr sz="1150" b="1">
+                <a:solidFill>
+                  <a:srgbClr val="FFFFFF"/>
+                </a:solidFill>
+                <a:latin typeface="Calibri"/>
+              </a:rPr>
+              <a:t>Register &amp;
+Login</a:t>
+            </a:r>
+          </a:p>
+          <a:p>
+            <a:pPr algn="ctr"/>
+            <a:r>
+              <a:rPr sz="950">
+                <a:solidFill>
+                  <a:srgbClr val="E4E7FF"/>
+                </a:solidFill>
+                <a:latin typeface="Calibri"/>
+              </a:rPr>
+              <a:t>JWT + bcrypt</a:t>
+            </a:r>
+          </a:p>
+        </p:txBody>
+      </p:sp>
+      <p:sp>
+        <p:nvSpPr>
+          <p:cNvPr id="12" name="Right Arrow 11"/>
           <p:cNvSpPr/>
           <p:nvPr/>
         </p:nvSpPr>
         <p:spPr>
           <a:xfrm>
-            <a:off x="2721711" y="1417320"/>
-            <a:ext cx="1481328" cy="566928"/>
-          </a:xfrm>
-          <a:prstGeom prst="roundRect">
-            <a:avLst>
-              <a:gd name="adj" fmla="val 50000"/>
-            </a:avLst>
+            <a:off x="2465679" y="1581912"/>
+            <a:ext cx="237744" cy="237744"/>
+          </a:xfrm>
+          <a:prstGeom prst="rightArrow">
+            <a:avLst/>
           </a:prstGeom>
           <a:solidFill>
-            <a:srgbClr val="22C55E"/>
+            <a:srgbClr val="64708A"/>
           </a:solidFill>
           <a:ln>
             <a:noFill/>
@@ -6008,50 +6138,31 @@
           </a:fontRef>
         </p:style>
         <p:txBody>
-          <a:bodyPr rtlCol="0" anchor="ctr" wrap="square" lIns="25400" rIns="25400"/>
+          <a:bodyPr rtlCol="0" anchor="ctr"/>
           <a:lstStyle/>
           <a:p>
             <a:pPr algn="ctr"/>
-            <a:r>
-              <a:rPr sz="1150" b="1">
-                <a:solidFill>
-                  <a:srgbClr val="FFFFFF"/>
-                </a:solidFill>
-                <a:latin typeface="Calibri"/>
-              </a:rPr>
-              <a:t>Dashboard</a:t>
-            </a:r>
-          </a:p>
-          <a:p>
-            <a:pPr algn="ctr"/>
-            <a:r>
-              <a:rPr sz="950">
-                <a:solidFill>
-                  <a:srgbClr val="E4E7FF"/>
-                </a:solidFill>
-                <a:latin typeface="Calibri"/>
-              </a:rPr>
-              <a:t>Balance overview</a:t>
-            </a:r>
-          </a:p>
-        </p:txBody>
-      </p:sp>
-      <p:sp>
-        <p:nvSpPr>
-          <p:cNvPr id="13" name="Right Arrow 12"/>
+          </a:p>
+        </p:txBody>
+      </p:sp>
+      <p:sp>
+        <p:nvSpPr>
+          <p:cNvPr id="13" name="Rounded Rectangle 12"/>
           <p:cNvSpPr/>
           <p:nvPr/>
         </p:nvSpPr>
         <p:spPr>
           <a:xfrm>
-            <a:off x="4221327" y="1581912"/>
-            <a:ext cx="237744" cy="237744"/>
-          </a:xfrm>
-          <a:prstGeom prst="rightArrow">
-            <a:avLst/>
+            <a:off x="2721711" y="1417320"/>
+            <a:ext cx="1481328" cy="566928"/>
+          </a:xfrm>
+          <a:prstGeom prst="roundRect">
+            <a:avLst>
+              <a:gd name="adj" fmla="val 50000"/>
+            </a:avLst>
           </a:prstGeom>
           <a:solidFill>
-            <a:srgbClr val="9CA3C7"/>
+            <a:srgbClr val="16A34A"/>
           </a:solidFill>
           <a:ln>
             <a:noFill/>
@@ -6073,31 +6184,50 @@
           </a:fontRef>
         </p:style>
         <p:txBody>
-          <a:bodyPr rtlCol="0" anchor="ctr"/>
+          <a:bodyPr rtlCol="0" anchor="ctr" wrap="square" lIns="25400" rIns="25400"/>
           <a:lstStyle/>
           <a:p>
             <a:pPr algn="ctr"/>
-          </a:p>
-        </p:txBody>
-      </p:sp>
-      <p:sp>
-        <p:nvSpPr>
-          <p:cNvPr id="14" name="Rounded Rectangle 13"/>
+            <a:r>
+              <a:rPr sz="1150" b="1">
+                <a:solidFill>
+                  <a:srgbClr val="FFFFFF"/>
+                </a:solidFill>
+                <a:latin typeface="Calibri"/>
+              </a:rPr>
+              <a:t>Dashboard</a:t>
+            </a:r>
+          </a:p>
+          <a:p>
+            <a:pPr algn="ctr"/>
+            <a:r>
+              <a:rPr sz="950">
+                <a:solidFill>
+                  <a:srgbClr val="E4E7FF"/>
+                </a:solidFill>
+                <a:latin typeface="Calibri"/>
+              </a:rPr>
+              <a:t>Balance overview</a:t>
+            </a:r>
+          </a:p>
+        </p:txBody>
+      </p:sp>
+      <p:sp>
+        <p:nvSpPr>
+          <p:cNvPr id="14" name="Right Arrow 13"/>
           <p:cNvSpPr/>
           <p:nvPr/>
         </p:nvSpPr>
         <p:spPr>
           <a:xfrm>
-            <a:off x="4477359" y="1417320"/>
-            <a:ext cx="1481328" cy="566928"/>
-          </a:xfrm>
-          <a:prstGeom prst="roundRect">
-            <a:avLst>
-              <a:gd name="adj" fmla="val 50000"/>
-            </a:avLst>
+            <a:off x="4221327" y="1581912"/>
+            <a:ext cx="237744" cy="237744"/>
+          </a:xfrm>
+          <a:prstGeom prst="rightArrow">
+            <a:avLst/>
           </a:prstGeom>
           <a:solidFill>
-            <a:srgbClr val="F59E0B"/>
+            <a:srgbClr val="64708A"/>
           </a:solidFill>
           <a:ln>
             <a:noFill/>
@@ -6119,51 +6249,31 @@
           </a:fontRef>
         </p:style>
         <p:txBody>
-          <a:bodyPr rtlCol="0" anchor="ctr" wrap="square" lIns="25400" rIns="25400"/>
+          <a:bodyPr rtlCol="0" anchor="ctr"/>
           <a:lstStyle/>
           <a:p>
             <a:pPr algn="ctr"/>
-            <a:r>
-              <a:rPr sz="1150" b="1">
-                <a:solidFill>
-                  <a:srgbClr val="FFFFFF"/>
-                </a:solidFill>
-                <a:latin typeface="Calibri"/>
-              </a:rPr>
-              <a:t>Add
-Transaction</a:t>
-            </a:r>
-          </a:p>
-          <a:p>
-            <a:pPr algn="ctr"/>
-            <a:r>
-              <a:rPr sz="950">
-                <a:solidFill>
-                  <a:srgbClr val="E4E7FF"/>
-                </a:solidFill>
-                <a:latin typeface="Calibri"/>
-              </a:rPr>
-              <a:t>Manual/OCR/Voice</a:t>
-            </a:r>
-          </a:p>
-        </p:txBody>
-      </p:sp>
-      <p:sp>
-        <p:nvSpPr>
-          <p:cNvPr id="15" name="Right Arrow 14"/>
+          </a:p>
+        </p:txBody>
+      </p:sp>
+      <p:sp>
+        <p:nvSpPr>
+          <p:cNvPr id="15" name="Rounded Rectangle 14"/>
           <p:cNvSpPr/>
           <p:nvPr/>
         </p:nvSpPr>
         <p:spPr>
           <a:xfrm>
-            <a:off x="5976975" y="1581912"/>
-            <a:ext cx="237744" cy="237744"/>
-          </a:xfrm>
-          <a:prstGeom prst="rightArrow">
-            <a:avLst/>
+            <a:off x="4477359" y="1417320"/>
+            <a:ext cx="1481328" cy="566928"/>
+          </a:xfrm>
+          <a:prstGeom prst="roundRect">
+            <a:avLst>
+              <a:gd name="adj" fmla="val 50000"/>
+            </a:avLst>
           </a:prstGeom>
           <a:solidFill>
-            <a:srgbClr val="9CA3C7"/>
+            <a:srgbClr val="D97706"/>
           </a:solidFill>
           <a:ln>
             <a:noFill/>
@@ -6185,31 +6295,51 @@
           </a:fontRef>
         </p:style>
         <p:txBody>
-          <a:bodyPr rtlCol="0" anchor="ctr"/>
+          <a:bodyPr rtlCol="0" anchor="ctr" wrap="square" lIns="25400" rIns="25400"/>
           <a:lstStyle/>
           <a:p>
             <a:pPr algn="ctr"/>
-          </a:p>
-        </p:txBody>
-      </p:sp>
-      <p:sp>
-        <p:nvSpPr>
-          <p:cNvPr id="16" name="Rounded Rectangle 15"/>
+            <a:r>
+              <a:rPr sz="1150" b="1">
+                <a:solidFill>
+                  <a:srgbClr val="FFFFFF"/>
+                </a:solidFill>
+                <a:latin typeface="Calibri"/>
+              </a:rPr>
+              <a:t>Add
+Transaction</a:t>
+            </a:r>
+          </a:p>
+          <a:p>
+            <a:pPr algn="ctr"/>
+            <a:r>
+              <a:rPr sz="950">
+                <a:solidFill>
+                  <a:srgbClr val="E4E7FF"/>
+                </a:solidFill>
+                <a:latin typeface="Calibri"/>
+              </a:rPr>
+              <a:t>Manual/OCR/Voice</a:t>
+            </a:r>
+          </a:p>
+        </p:txBody>
+      </p:sp>
+      <p:sp>
+        <p:nvSpPr>
+          <p:cNvPr id="16" name="Right Arrow 15"/>
           <p:cNvSpPr/>
           <p:nvPr/>
         </p:nvSpPr>
         <p:spPr>
           <a:xfrm>
-            <a:off x="6233007" y="1417320"/>
-            <a:ext cx="1481328" cy="566928"/>
-          </a:xfrm>
-          <a:prstGeom prst="roundRect">
-            <a:avLst>
-              <a:gd name="adj" fmla="val 50000"/>
-            </a:avLst>
+            <a:off x="5976975" y="1581912"/>
+            <a:ext cx="237744" cy="237744"/>
+          </a:xfrm>
+          <a:prstGeom prst="rightArrow">
+            <a:avLst/>
           </a:prstGeom>
           <a:solidFill>
-            <a:srgbClr val="6366F1"/>
+            <a:srgbClr val="64708A"/>
           </a:solidFill>
           <a:ln>
             <a:noFill/>
@@ -6231,51 +6361,31 @@
           </a:fontRef>
         </p:style>
         <p:txBody>
-          <a:bodyPr rtlCol="0" anchor="ctr" wrap="square" lIns="25400" rIns="25400"/>
+          <a:bodyPr rtlCol="0" anchor="ctr"/>
           <a:lstStyle/>
           <a:p>
             <a:pPr algn="ctr"/>
-            <a:r>
-              <a:rPr sz="1150" b="1">
-                <a:solidFill>
-                  <a:srgbClr val="FFFFFF"/>
-                </a:solidFill>
-                <a:latin typeface="Calibri"/>
-              </a:rPr>
-              <a:t>Budget &amp;
-Goals</a:t>
-            </a:r>
-          </a:p>
-          <a:p>
-            <a:pPr algn="ctr"/>
-            <a:r>
-              <a:rPr sz="950">
-                <a:solidFill>
-                  <a:srgbClr val="E4E7FF"/>
-                </a:solidFill>
-                <a:latin typeface="Calibri"/>
-              </a:rPr>
-              <a:t>Category limits</a:t>
-            </a:r>
-          </a:p>
-        </p:txBody>
-      </p:sp>
-      <p:sp>
-        <p:nvSpPr>
-          <p:cNvPr id="17" name="Right Arrow 16"/>
+          </a:p>
+        </p:txBody>
+      </p:sp>
+      <p:sp>
+        <p:nvSpPr>
+          <p:cNvPr id="17" name="Rounded Rectangle 16"/>
           <p:cNvSpPr/>
           <p:nvPr/>
         </p:nvSpPr>
         <p:spPr>
           <a:xfrm>
-            <a:off x="7732623" y="1581912"/>
-            <a:ext cx="237744" cy="237744"/>
-          </a:xfrm>
-          <a:prstGeom prst="rightArrow">
-            <a:avLst/>
+            <a:off x="6233007" y="1417320"/>
+            <a:ext cx="1481328" cy="566928"/>
+          </a:xfrm>
+          <a:prstGeom prst="roundRect">
+            <a:avLst>
+              <a:gd name="adj" fmla="val 50000"/>
+            </a:avLst>
           </a:prstGeom>
           <a:solidFill>
-            <a:srgbClr val="9CA3C7"/>
+            <a:srgbClr val="4F46E5"/>
           </a:solidFill>
           <a:ln>
             <a:noFill/>
@@ -6297,31 +6407,51 @@
           </a:fontRef>
         </p:style>
         <p:txBody>
-          <a:bodyPr rtlCol="0" anchor="ctr"/>
+          <a:bodyPr rtlCol="0" anchor="ctr" wrap="square" lIns="25400" rIns="25400"/>
           <a:lstStyle/>
           <a:p>
             <a:pPr algn="ctr"/>
-          </a:p>
-        </p:txBody>
-      </p:sp>
-      <p:sp>
-        <p:nvSpPr>
-          <p:cNvPr id="18" name="Rounded Rectangle 17"/>
+            <a:r>
+              <a:rPr sz="1150" b="1">
+                <a:solidFill>
+                  <a:srgbClr val="FFFFFF"/>
+                </a:solidFill>
+                <a:latin typeface="Calibri"/>
+              </a:rPr>
+              <a:t>Budget &amp;
+Goals</a:t>
+            </a:r>
+          </a:p>
+          <a:p>
+            <a:pPr algn="ctr"/>
+            <a:r>
+              <a:rPr sz="950">
+                <a:solidFill>
+                  <a:srgbClr val="E4E7FF"/>
+                </a:solidFill>
+                <a:latin typeface="Calibri"/>
+              </a:rPr>
+              <a:t>Category limits</a:t>
+            </a:r>
+          </a:p>
+        </p:txBody>
+      </p:sp>
+      <p:sp>
+        <p:nvSpPr>
+          <p:cNvPr id="18" name="Right Arrow 17"/>
           <p:cNvSpPr/>
           <p:nvPr/>
         </p:nvSpPr>
         <p:spPr>
           <a:xfrm>
-            <a:off x="7988655" y="1417320"/>
-            <a:ext cx="1481328" cy="566928"/>
-          </a:xfrm>
-          <a:prstGeom prst="roundRect">
-            <a:avLst>
-              <a:gd name="adj" fmla="val 50000"/>
-            </a:avLst>
+            <a:off x="7732623" y="1581912"/>
+            <a:ext cx="237744" cy="237744"/>
+          </a:xfrm>
+          <a:prstGeom prst="rightArrow">
+            <a:avLst/>
           </a:prstGeom>
           <a:solidFill>
-            <a:srgbClr val="22C55E"/>
+            <a:srgbClr val="64708A"/>
           </a:solidFill>
           <a:ln>
             <a:noFill/>
@@ -6343,50 +6473,31 @@
           </a:fontRef>
         </p:style>
         <p:txBody>
-          <a:bodyPr rtlCol="0" anchor="ctr" wrap="square" lIns="25400" rIns="25400"/>
+          <a:bodyPr rtlCol="0" anchor="ctr"/>
           <a:lstStyle/>
           <a:p>
             <a:pPr algn="ctr"/>
-            <a:r>
-              <a:rPr sz="1150" b="1">
-                <a:solidFill>
-                  <a:srgbClr val="FFFFFF"/>
-                </a:solidFill>
-                <a:latin typeface="Calibri"/>
-              </a:rPr>
-              <a:t>Analytics</a:t>
-            </a:r>
-          </a:p>
-          <a:p>
-            <a:pPr algn="ctr"/>
-            <a:r>
-              <a:rPr sz="950">
-                <a:solidFill>
-                  <a:srgbClr val="E4E7FF"/>
-                </a:solidFill>
-                <a:latin typeface="Calibri"/>
-              </a:rPr>
-              <a:t>Recharts trends</a:t>
-            </a:r>
-          </a:p>
-        </p:txBody>
-      </p:sp>
-      <p:sp>
-        <p:nvSpPr>
-          <p:cNvPr id="19" name="Right Arrow 18"/>
+          </a:p>
+        </p:txBody>
+      </p:sp>
+      <p:sp>
+        <p:nvSpPr>
+          <p:cNvPr id="19" name="Rounded Rectangle 18"/>
           <p:cNvSpPr/>
           <p:nvPr/>
         </p:nvSpPr>
         <p:spPr>
           <a:xfrm>
-            <a:off x="9488271" y="1581912"/>
-            <a:ext cx="237744" cy="237744"/>
-          </a:xfrm>
-          <a:prstGeom prst="rightArrow">
-            <a:avLst/>
+            <a:off x="7988655" y="1417320"/>
+            <a:ext cx="1481328" cy="566928"/>
+          </a:xfrm>
+          <a:prstGeom prst="roundRect">
+            <a:avLst>
+              <a:gd name="adj" fmla="val 50000"/>
+            </a:avLst>
           </a:prstGeom>
           <a:solidFill>
-            <a:srgbClr val="9CA3C7"/>
+            <a:srgbClr val="16A34A"/>
           </a:solidFill>
           <a:ln>
             <a:noFill/>
@@ -6408,31 +6519,50 @@
           </a:fontRef>
         </p:style>
         <p:txBody>
-          <a:bodyPr rtlCol="0" anchor="ctr"/>
+          <a:bodyPr rtlCol="0" anchor="ctr" wrap="square" lIns="25400" rIns="25400"/>
           <a:lstStyle/>
           <a:p>
             <a:pPr algn="ctr"/>
-          </a:p>
-        </p:txBody>
-      </p:sp>
-      <p:sp>
-        <p:nvSpPr>
-          <p:cNvPr id="20" name="Rounded Rectangle 19"/>
+            <a:r>
+              <a:rPr sz="1150" b="1">
+                <a:solidFill>
+                  <a:srgbClr val="FFFFFF"/>
+                </a:solidFill>
+                <a:latin typeface="Calibri"/>
+              </a:rPr>
+              <a:t>Analytics</a:t>
+            </a:r>
+          </a:p>
+          <a:p>
+            <a:pPr algn="ctr"/>
+            <a:r>
+              <a:rPr sz="950">
+                <a:solidFill>
+                  <a:srgbClr val="E4E7FF"/>
+                </a:solidFill>
+                <a:latin typeface="Calibri"/>
+              </a:rPr>
+              <a:t>Recharts trends</a:t>
+            </a:r>
+          </a:p>
+        </p:txBody>
+      </p:sp>
+      <p:sp>
+        <p:nvSpPr>
+          <p:cNvPr id="20" name="Right Arrow 19"/>
           <p:cNvSpPr/>
           <p:nvPr/>
         </p:nvSpPr>
         <p:spPr>
           <a:xfrm>
-            <a:off x="9744303" y="1417320"/>
-            <a:ext cx="1481328" cy="566928"/>
-          </a:xfrm>
-          <a:prstGeom prst="roundRect">
-            <a:avLst>
-              <a:gd name="adj" fmla="val 50000"/>
-            </a:avLst>
+            <a:off x="9488271" y="1581912"/>
+            <a:ext cx="237744" cy="237744"/>
+          </a:xfrm>
+          <a:prstGeom prst="rightArrow">
+            <a:avLst/>
           </a:prstGeom>
           <a:solidFill>
-            <a:srgbClr val="F59E0B"/>
+            <a:srgbClr val="64708A"/>
           </a:solidFill>
           <a:ln>
             <a:noFill/>
@@ -6454,6 +6584,52 @@
           </a:fontRef>
         </p:style>
         <p:txBody>
+          <a:bodyPr rtlCol="0" anchor="ctr"/>
+          <a:lstStyle/>
+          <a:p>
+            <a:pPr algn="ctr"/>
+          </a:p>
+        </p:txBody>
+      </p:sp>
+      <p:sp>
+        <p:nvSpPr>
+          <p:cNvPr id="21" name="Rounded Rectangle 20"/>
+          <p:cNvSpPr/>
+          <p:nvPr/>
+        </p:nvSpPr>
+        <p:spPr>
+          <a:xfrm>
+            <a:off x="9744303" y="1417320"/>
+            <a:ext cx="1481328" cy="566928"/>
+          </a:xfrm>
+          <a:prstGeom prst="roundRect">
+            <a:avLst>
+              <a:gd name="adj" fmla="val 50000"/>
+            </a:avLst>
+          </a:prstGeom>
+          <a:solidFill>
+            <a:srgbClr val="D97706"/>
+          </a:solidFill>
+          <a:ln>
+            <a:noFill/>
+          </a:ln>
+          <a:effectLst/>
+        </p:spPr>
+        <p:style>
+          <a:lnRef idx="1">
+            <a:schemeClr val="accent1"/>
+          </a:lnRef>
+          <a:fillRef idx="3">
+            <a:schemeClr val="accent1"/>
+          </a:fillRef>
+          <a:effectRef idx="2">
+            <a:schemeClr val="accent1"/>
+          </a:effectRef>
+          <a:fontRef idx="minor">
+            <a:schemeClr val="lt1"/>
+          </a:fontRef>
+        </p:style>
+        <p:txBody>
           <a:bodyPr rtlCol="0" anchor="ctr" wrap="square" lIns="25400" rIns="25400"/>
           <a:lstStyle/>
           <a:p>
@@ -6484,7 +6660,7 @@
       </p:sp>
       <p:sp>
         <p:nvSpPr>
-          <p:cNvPr id="21" name="TextBox 20"/>
+          <p:cNvPr id="22" name="TextBox 21"/>
           <p:cNvSpPr txBox="1"/>
           <p:nvPr/>
         </p:nvSpPr>
@@ -6512,7 +6688,7 @@
             <a:r>
               <a:rPr sz="1400" b="1">
                 <a:solidFill>
-                  <a:srgbClr val="F59E0B"/>
+                  <a:srgbClr val="D97706"/>
                 </a:solidFill>
                 <a:latin typeface="Calibri"/>
               </a:rPr>
@@ -6521,7 +6697,7 @@
             <a:r>
               <a:rPr sz="1400" b="1">
                 <a:solidFill>
-                  <a:srgbClr val="F1F3FF"/>
+                  <a:srgbClr val="1E2140"/>
                 </a:solidFill>
                 <a:latin typeface="Calibri"/>
               </a:rPr>
@@ -6530,7 +6706,7 @@
             <a:r>
               <a:rPr sz="1400" b="0">
                 <a:solidFill>
-                  <a:srgbClr val="9CA3C7"/>
+                  <a:srgbClr val="64708A"/>
                 </a:solidFill>
                 <a:latin typeface="Calibri"/>
               </a:rPr>
@@ -6546,7 +6722,7 @@
             <a:r>
               <a:rPr sz="1400" b="1">
                 <a:solidFill>
-                  <a:srgbClr val="F59E0B"/>
+                  <a:srgbClr val="D97706"/>
                 </a:solidFill>
                 <a:latin typeface="Calibri"/>
               </a:rPr>
@@ -6555,7 +6731,7 @@
             <a:r>
               <a:rPr sz="1400" b="1">
                 <a:solidFill>
-                  <a:srgbClr val="F1F3FF"/>
+                  <a:srgbClr val="1E2140"/>
                 </a:solidFill>
                 <a:latin typeface="Calibri"/>
               </a:rPr>
@@ -6564,7 +6740,7 @@
             <a:r>
               <a:rPr sz="1400" b="0">
                 <a:solidFill>
-                  <a:srgbClr val="9CA3C7"/>
+                  <a:srgbClr val="64708A"/>
                 </a:solidFill>
                 <a:latin typeface="Calibri"/>
               </a:rPr>
@@ -6580,7 +6756,7 @@
             <a:r>
               <a:rPr sz="1400" b="1">
                 <a:solidFill>
-                  <a:srgbClr val="F59E0B"/>
+                  <a:srgbClr val="D97706"/>
                 </a:solidFill>
                 <a:latin typeface="Calibri"/>
               </a:rPr>
@@ -6589,7 +6765,7 @@
             <a:r>
               <a:rPr sz="1400" b="1">
                 <a:solidFill>
-                  <a:srgbClr val="F1F3FF"/>
+                  <a:srgbClr val="1E2140"/>
                 </a:solidFill>
                 <a:latin typeface="Calibri"/>
               </a:rPr>
@@ -6598,7 +6774,7 @@
             <a:r>
               <a:rPr sz="1400" b="0">
                 <a:solidFill>
-                  <a:srgbClr val="9CA3C7"/>
+                  <a:srgbClr val="64708A"/>
                 </a:solidFill>
                 <a:latin typeface="Calibri"/>
               </a:rPr>
@@ -6614,7 +6790,7 @@
             <a:r>
               <a:rPr sz="1400" b="1">
                 <a:solidFill>
-                  <a:srgbClr val="F59E0B"/>
+                  <a:srgbClr val="D97706"/>
                 </a:solidFill>
                 <a:latin typeface="Calibri"/>
               </a:rPr>
@@ -6623,7 +6799,7 @@
             <a:r>
               <a:rPr sz="1400" b="1">
                 <a:solidFill>
-                  <a:srgbClr val="F1F3FF"/>
+                  <a:srgbClr val="1E2140"/>
                 </a:solidFill>
                 <a:latin typeface="Calibri"/>
               </a:rPr>
@@ -6632,7 +6808,7 @@
             <a:r>
               <a:rPr sz="1400" b="0">
                 <a:solidFill>
-                  <a:srgbClr val="9CA3C7"/>
+                  <a:srgbClr val="64708A"/>
                 </a:solidFill>
                 <a:latin typeface="Calibri"/>
               </a:rPr>
@@ -6648,7 +6824,7 @@
             <a:r>
               <a:rPr sz="1400" b="1">
                 <a:solidFill>
-                  <a:srgbClr val="F59E0B"/>
+                  <a:srgbClr val="D97706"/>
                 </a:solidFill>
                 <a:latin typeface="Calibri"/>
               </a:rPr>
@@ -6657,7 +6833,7 @@
             <a:r>
               <a:rPr sz="1400" b="1">
                 <a:solidFill>
-                  <a:srgbClr val="F1F3FF"/>
+                  <a:srgbClr val="1E2140"/>
                 </a:solidFill>
                 <a:latin typeface="Calibri"/>
               </a:rPr>
@@ -6666,7 +6842,7 @@
             <a:r>
               <a:rPr sz="1400" b="0">
                 <a:solidFill>
-                  <a:srgbClr val="9CA3C7"/>
+                  <a:srgbClr val="64708A"/>
                 </a:solidFill>
                 <a:latin typeface="Calibri"/>
               </a:rPr>
@@ -6708,7 +6884,7 @@
             <a:avLst/>
           </a:prstGeom>
           <a:solidFill>
-            <a:srgbClr val="0F1120"/>
+            <a:srgbClr val="FFFFFF"/>
           </a:solidFill>
           <a:ln>
             <a:noFill/>
@@ -6752,7 +6928,7 @@
             <a:avLst/>
           </a:prstGeom>
           <a:solidFill>
-            <a:srgbClr val="6366F1"/>
+            <a:srgbClr val="4F46E5"/>
           </a:solidFill>
           <a:ln>
             <a:noFill/>
@@ -6807,7 +6983,7 @@
             <a:r>
               <a:rPr sz="1250" b="1">
                 <a:solidFill>
-                  <a:srgbClr val="6366F1"/>
+                  <a:srgbClr val="4F46E5"/>
                 </a:solidFill>
                 <a:latin typeface="Calibri"/>
               </a:rPr>
@@ -6842,7 +7018,7 @@
             <a:r>
               <a:rPr sz="2400" b="1">
                 <a:solidFill>
-                  <a:srgbClr val="F1F3FF"/>
+                  <a:srgbClr val="1E2140"/>
                 </a:solidFill>
                 <a:latin typeface="Calibri"/>
               </a:rPr>
@@ -6866,7 +7042,7 @@
             <a:avLst/>
           </a:prstGeom>
           <a:solidFill>
-            <a:srgbClr val="353A5C"/>
+            <a:srgbClr val="DDE1F2"/>
           </a:solidFill>
           <a:ln>
             <a:noFill/>
@@ -6910,7 +7086,7 @@
             <a:avLst/>
           </a:prstGeom>
           <a:solidFill>
-            <a:srgbClr val="090A16"/>
+            <a:srgbClr val="F1F2FA"/>
           </a:solidFill>
           <a:ln>
             <a:noFill/>
@@ -6941,13 +7117,57 @@
       </p:sp>
       <p:sp>
         <p:nvSpPr>
-          <p:cNvPr id="8" name="TextBox 7"/>
+          <p:cNvPr id="8" name="Rectangle 7"/>
+          <p:cNvSpPr/>
+          <p:nvPr/>
+        </p:nvSpPr>
+        <p:spPr>
+          <a:xfrm>
+            <a:off x="0" y="6547104"/>
+            <a:ext cx="12191695" cy="18288"/>
+          </a:xfrm>
+          <a:prstGeom prst="rect">
+            <a:avLst/>
+          </a:prstGeom>
+          <a:solidFill>
+            <a:srgbClr val="DDE1F2"/>
+          </a:solidFill>
+          <a:ln>
+            <a:noFill/>
+          </a:ln>
+          <a:effectLst/>
+        </p:spPr>
+        <p:style>
+          <a:lnRef idx="1">
+            <a:schemeClr val="accent1"/>
+          </a:lnRef>
+          <a:fillRef idx="3">
+            <a:schemeClr val="accent1"/>
+          </a:fillRef>
+          <a:effectRef idx="2">
+            <a:schemeClr val="accent1"/>
+          </a:effectRef>
+          <a:fontRef idx="minor">
+            <a:schemeClr val="lt1"/>
+          </a:fontRef>
+        </p:style>
+        <p:txBody>
+          <a:bodyPr rtlCol="0" anchor="ctr"/>
+          <a:lstStyle/>
+          <a:p>
+            <a:pPr algn="ctr"/>
+          </a:p>
+        </p:txBody>
+      </p:sp>
+      <p:sp>
+        <p:nvSpPr>
+          <p:cNvPr id="9" name="TextBox 8"/>
           <p:cNvSpPr txBox="1"/>
           <p:nvPr/>
         </p:nvSpPr>
         <p:spPr>
           <a:xfrm>
-            <a:off x="411480" y="6547104"/>
+            <a:off x="411480" y="6574536"/>
             <a:ext cx="8686800" cy="238658"/>
           </a:xfrm>
           <a:prstGeom prst="rect">
@@ -6965,7 +7185,7 @@
             <a:r>
               <a:rPr sz="950" b="0">
                 <a:solidFill>
-                  <a:srgbClr val="9CA3C7"/>
+                  <a:srgbClr val="64708A"/>
                 </a:solidFill>
                 <a:latin typeface="Calibri"/>
               </a:rPr>
@@ -6976,14 +7196,14 @@
       </p:sp>
       <p:sp>
         <p:nvSpPr>
-          <p:cNvPr id="9" name="TextBox 8"/>
+          <p:cNvPr id="10" name="TextBox 9"/>
           <p:cNvSpPr txBox="1"/>
           <p:nvPr/>
         </p:nvSpPr>
         <p:spPr>
           <a:xfrm>
-            <a:off x="11094415" y="6547104"/>
-            <a:ext cx="685800" cy="310896"/>
+            <a:off x="11094415" y="6574536"/>
+            <a:ext cx="685800" cy="256032"/>
           </a:xfrm>
           <a:prstGeom prst="rect">
             <a:avLst/>
@@ -7000,7 +7220,7 @@
             <a:r>
               <a:rPr sz="950" b="1">
                 <a:solidFill>
-                  <a:srgbClr val="6366F1"/>
+                  <a:srgbClr val="4F46E5"/>
                 </a:solidFill>
                 <a:latin typeface="Calibri"/>
               </a:rPr>
@@ -7011,7 +7231,7 @@
       </p:sp>
       <p:sp>
         <p:nvSpPr>
-          <p:cNvPr id="10" name="TextBox 9"/>
+          <p:cNvPr id="11" name="TextBox 10"/>
           <p:cNvSpPr txBox="1"/>
           <p:nvPr/>
         </p:nvSpPr>
@@ -7035,7 +7255,7 @@
             <a:r>
               <a:rPr sz="1400" b="1">
                 <a:solidFill>
-                  <a:srgbClr val="F1F3FF"/>
+                  <a:srgbClr val="1E2140"/>
                 </a:solidFill>
                 <a:latin typeface="Calibri"/>
               </a:rPr>
@@ -7046,7 +7266,7 @@
       </p:sp>
       <p:graphicFrame>
         <p:nvGraphicFramePr>
-          <p:cNvPr id="11" name="Table 10"/>
+          <p:cNvPr id="12" name="Table 11"/>
           <p:cNvGraphicFramePr>
             <a:graphicFrameLocks noGrp="1"/>
           </p:cNvGraphicFramePr>
@@ -7085,7 +7305,7 @@
                   </a:txBody>
                   <a:tcPr marT="38100" marB="38100" anchor="ctr">
                     <a:solidFill>
-                      <a:srgbClr val="6366F1"/>
+                      <a:srgbClr val="4F46E5"/>
                     </a:solidFill>
                   </a:tcPr>
                 </a:tc>
@@ -7107,7 +7327,7 @@
                   </a:txBody>
                   <a:tcPr marT="38100" marB="38100" anchor="ctr">
                     <a:solidFill>
-                      <a:srgbClr val="6366F1"/>
+                      <a:srgbClr val="4F46E5"/>
                     </a:solidFill>
                   </a:tcPr>
                 </a:tc>
@@ -7121,7 +7341,7 @@
                       <a:r>
                         <a:rPr sz="1150">
                           <a:solidFill>
-                            <a:srgbClr val="F1F3FF"/>
+                            <a:srgbClr val="1E2140"/>
                           </a:solidFill>
                           <a:latin typeface="Calibri"/>
                         </a:rPr>
@@ -7131,7 +7351,7 @@
                   </a:txBody>
                   <a:tcPr marT="38100" marB="38100" anchor="ctr">
                     <a:solidFill>
-                      <a:srgbClr val="1A1D33"/>
+                      <a:srgbClr val="F6F7FC"/>
                     </a:solidFill>
                   </a:tcPr>
                 </a:tc>
@@ -7143,7 +7363,7 @@
                       <a:r>
                         <a:rPr sz="1150">
                           <a:solidFill>
-                            <a:srgbClr val="F1F3FF"/>
+                            <a:srgbClr val="1E2140"/>
                           </a:solidFill>
                           <a:latin typeface="Calibri"/>
                         </a:rPr>
@@ -7153,7 +7373,7 @@
                   </a:txBody>
                   <a:tcPr marT="38100" marB="38100" anchor="ctr">
                     <a:solidFill>
-                      <a:srgbClr val="1A1D33"/>
+                      <a:srgbClr val="F6F7FC"/>
                     </a:solidFill>
                   </a:tcPr>
                 </a:tc>
@@ -7167,7 +7387,7 @@
                       <a:r>
                         <a:rPr sz="1150">
                           <a:solidFill>
-                            <a:srgbClr val="F1F3FF"/>
+                            <a:srgbClr val="1E2140"/>
                           </a:solidFill>
                           <a:latin typeface="Calibri"/>
                         </a:rPr>
@@ -7177,7 +7397,7 @@
                   </a:txBody>
                   <a:tcPr marT="38100" marB="38100" anchor="ctr">
                     <a:solidFill>
-                      <a:srgbClr val="20233F"/>
+                      <a:srgbClr val="ECEEFA"/>
                     </a:solidFill>
                   </a:tcPr>
                 </a:tc>
@@ -7189,7 +7409,7 @@
                       <a:r>
                         <a:rPr sz="1150">
                           <a:solidFill>
-                            <a:srgbClr val="F1F3FF"/>
+                            <a:srgbClr val="1E2140"/>
                           </a:solidFill>
                           <a:latin typeface="Calibri"/>
                         </a:rPr>
@@ -7199,7 +7419,7 @@
                   </a:txBody>
                   <a:tcPr marT="38100" marB="38100" anchor="ctr">
                     <a:solidFill>
-                      <a:srgbClr val="20233F"/>
+                      <a:srgbClr val="ECEEFA"/>
                     </a:solidFill>
                   </a:tcPr>
                 </a:tc>
@@ -7213,7 +7433,7 @@
                       <a:r>
                         <a:rPr sz="1150">
                           <a:solidFill>
-                            <a:srgbClr val="F1F3FF"/>
+                            <a:srgbClr val="1E2140"/>
                           </a:solidFill>
                           <a:latin typeface="Calibri"/>
                         </a:rPr>
@@ -7223,7 +7443,7 @@
                   </a:txBody>
                   <a:tcPr marT="38100" marB="38100" anchor="ctr">
                     <a:solidFill>
-                      <a:srgbClr val="1A1D33"/>
+                      <a:srgbClr val="F6F7FC"/>
                     </a:solidFill>
                   </a:tcPr>
                 </a:tc>
@@ -7235,7 +7455,7 @@
                       <a:r>
                         <a:rPr sz="1150">
                           <a:solidFill>
-                            <a:srgbClr val="F1F3FF"/>
+                            <a:srgbClr val="1E2140"/>
                           </a:solidFill>
                           <a:latin typeface="Calibri"/>
                         </a:rPr>
@@ -7245,7 +7465,7 @@
                   </a:txBody>
                   <a:tcPr marT="38100" marB="38100" anchor="ctr">
                     <a:solidFill>
-                      <a:srgbClr val="1A1D33"/>
+                      <a:srgbClr val="F6F7FC"/>
                     </a:solidFill>
                   </a:tcPr>
                 </a:tc>
@@ -7259,7 +7479,7 @@
                       <a:r>
                         <a:rPr sz="1150">
                           <a:solidFill>
-                            <a:srgbClr val="F1F3FF"/>
+                            <a:srgbClr val="1E2140"/>
                           </a:solidFill>
                           <a:latin typeface="Calibri"/>
                         </a:rPr>
@@ -7269,7 +7489,7 @@
                   </a:txBody>
                   <a:tcPr marT="38100" marB="38100" anchor="ctr">
                     <a:solidFill>
-                      <a:srgbClr val="20233F"/>
+                      <a:srgbClr val="ECEEFA"/>
                     </a:solidFill>
                   </a:tcPr>
                 </a:tc>
@@ -7281,7 +7501,7 @@
                       <a:r>
                         <a:rPr sz="1150">
                           <a:solidFill>
-                            <a:srgbClr val="F1F3FF"/>
+                            <a:srgbClr val="1E2140"/>
                           </a:solidFill>
                           <a:latin typeface="Calibri"/>
                         </a:rPr>
@@ -7291,7 +7511,7 @@
                   </a:txBody>
                   <a:tcPr marT="38100" marB="38100" anchor="ctr">
                     <a:solidFill>
-                      <a:srgbClr val="20233F"/>
+                      <a:srgbClr val="ECEEFA"/>
                     </a:solidFill>
                   </a:tcPr>
                 </a:tc>
@@ -7305,7 +7525,7 @@
                       <a:r>
                         <a:rPr sz="1150">
                           <a:solidFill>
-                            <a:srgbClr val="F1F3FF"/>
+                            <a:srgbClr val="1E2140"/>
                           </a:solidFill>
                           <a:latin typeface="Calibri"/>
                         </a:rPr>
@@ -7315,7 +7535,7 @@
                   </a:txBody>
                   <a:tcPr marT="38100" marB="38100" anchor="ctr">
                     <a:solidFill>
-                      <a:srgbClr val="1A1D33"/>
+                      <a:srgbClr val="F6F7FC"/>
                     </a:solidFill>
                   </a:tcPr>
                 </a:tc>
@@ -7327,7 +7547,7 @@
                       <a:r>
                         <a:rPr sz="1150">
                           <a:solidFill>
-                            <a:srgbClr val="F1F3FF"/>
+                            <a:srgbClr val="1E2140"/>
                           </a:solidFill>
                           <a:latin typeface="Calibri"/>
                         </a:rPr>
@@ -7337,7 +7557,7 @@
                   </a:txBody>
                   <a:tcPr marT="38100" marB="38100" anchor="ctr">
                     <a:solidFill>
-                      <a:srgbClr val="1A1D33"/>
+                      <a:srgbClr val="F6F7FC"/>
                     </a:solidFill>
                   </a:tcPr>
                 </a:tc>
@@ -7351,7 +7571,7 @@
                       <a:r>
                         <a:rPr sz="1150">
                           <a:solidFill>
-                            <a:srgbClr val="F1F3FF"/>
+                            <a:srgbClr val="1E2140"/>
                           </a:solidFill>
                           <a:latin typeface="Calibri"/>
                         </a:rPr>
@@ -7361,7 +7581,7 @@
                   </a:txBody>
                   <a:tcPr marT="38100" marB="38100" anchor="ctr">
                     <a:solidFill>
-                      <a:srgbClr val="20233F"/>
+                      <a:srgbClr val="ECEEFA"/>
                     </a:solidFill>
                   </a:tcPr>
                 </a:tc>
@@ -7373,7 +7593,7 @@
                       <a:r>
                         <a:rPr sz="1150">
                           <a:solidFill>
-                            <a:srgbClr val="F1F3FF"/>
+                            <a:srgbClr val="1E2140"/>
                           </a:solidFill>
                           <a:latin typeface="Calibri"/>
                         </a:rPr>
@@ -7383,7 +7603,7 @@
                   </a:txBody>
                   <a:tcPr marT="38100" marB="38100" anchor="ctr">
                     <a:solidFill>
-                      <a:srgbClr val="20233F"/>
+                      <a:srgbClr val="ECEEFA"/>
                     </a:solidFill>
                   </a:tcPr>
                 </a:tc>
@@ -7397,7 +7617,7 @@
                       <a:r>
                         <a:rPr sz="1150">
                           <a:solidFill>
-                            <a:srgbClr val="F1F3FF"/>
+                            <a:srgbClr val="1E2140"/>
                           </a:solidFill>
                           <a:latin typeface="Calibri"/>
                         </a:rPr>
@@ -7407,7 +7627,7 @@
                   </a:txBody>
                   <a:tcPr marT="38100" marB="38100" anchor="ctr">
                     <a:solidFill>
-                      <a:srgbClr val="1A1D33"/>
+                      <a:srgbClr val="F6F7FC"/>
                     </a:solidFill>
                   </a:tcPr>
                 </a:tc>
@@ -7419,7 +7639,7 @@
                       <a:r>
                         <a:rPr sz="1150">
                           <a:solidFill>
-                            <a:srgbClr val="F1F3FF"/>
+                            <a:srgbClr val="1E2140"/>
                           </a:solidFill>
                           <a:latin typeface="Calibri"/>
                         </a:rPr>
@@ -7429,7 +7649,7 @@
                   </a:txBody>
                   <a:tcPr marT="38100" marB="38100" anchor="ctr">
                     <a:solidFill>
-                      <a:srgbClr val="1A1D33"/>
+                      <a:srgbClr val="F6F7FC"/>
                     </a:solidFill>
                   </a:tcPr>
                 </a:tc>
@@ -7443,7 +7663,7 @@
                       <a:r>
                         <a:rPr sz="1150">
                           <a:solidFill>
-                            <a:srgbClr val="F1F3FF"/>
+                            <a:srgbClr val="1E2140"/>
                           </a:solidFill>
                           <a:latin typeface="Calibri"/>
                         </a:rPr>
@@ -7453,7 +7673,7 @@
                   </a:txBody>
                   <a:tcPr marT="38100" marB="38100" anchor="ctr">
                     <a:solidFill>
-                      <a:srgbClr val="20233F"/>
+                      <a:srgbClr val="ECEEFA"/>
                     </a:solidFill>
                   </a:tcPr>
                 </a:tc>
@@ -7465,7 +7685,7 @@
                       <a:r>
                         <a:rPr sz="1150">
                           <a:solidFill>
-                            <a:srgbClr val="F1F3FF"/>
+                            <a:srgbClr val="1E2140"/>
                           </a:solidFill>
                           <a:latin typeface="Calibri"/>
                         </a:rPr>
@@ -7475,7 +7695,7 @@
                   </a:txBody>
                   <a:tcPr marT="38100" marB="38100" anchor="ctr">
                     <a:solidFill>
-                      <a:srgbClr val="20233F"/>
+                      <a:srgbClr val="ECEEFA"/>
                     </a:solidFill>
                   </a:tcPr>
                 </a:tc>
@@ -7489,7 +7709,7 @@
                       <a:r>
                         <a:rPr sz="1150">
                           <a:solidFill>
-                            <a:srgbClr val="F1F3FF"/>
+                            <a:srgbClr val="1E2140"/>
                           </a:solidFill>
                           <a:latin typeface="Calibri"/>
                         </a:rPr>
@@ -7499,7 +7719,7 @@
                   </a:txBody>
                   <a:tcPr marT="38100" marB="38100" anchor="ctr">
                     <a:solidFill>
-                      <a:srgbClr val="1A1D33"/>
+                      <a:srgbClr val="F6F7FC"/>
                     </a:solidFill>
                   </a:tcPr>
                 </a:tc>
@@ -7511,7 +7731,7 @@
                       <a:r>
                         <a:rPr sz="1150">
                           <a:solidFill>
-                            <a:srgbClr val="F1F3FF"/>
+                            <a:srgbClr val="1E2140"/>
                           </a:solidFill>
                           <a:latin typeface="Calibri"/>
                         </a:rPr>
@@ -7521,7 +7741,7 @@
                   </a:txBody>
                   <a:tcPr marT="38100" marB="38100" anchor="ctr">
                     <a:solidFill>
-                      <a:srgbClr val="1A1D33"/>
+                      <a:srgbClr val="F6F7FC"/>
                     </a:solidFill>
                   </a:tcPr>
                 </a:tc>
@@ -7532,7 +7752,7 @@
       </p:graphicFrame>
       <p:sp>
         <p:nvSpPr>
-          <p:cNvPr id="12" name="Rounded Rectangle 11"/>
+          <p:cNvPr id="13" name="Rounded Rectangle 12"/>
           <p:cNvSpPr/>
           <p:nvPr/>
         </p:nvSpPr>
@@ -7547,11 +7767,11 @@
             </a:avLst>
           </a:prstGeom>
           <a:solidFill>
-            <a:srgbClr val="1A1D33"/>
+            <a:srgbClr val="F6F7FC"/>
           </a:solidFill>
           <a:ln w="12700">
             <a:solidFill>
-              <a:srgbClr val="353A5C"/>
+              <a:srgbClr val="DDE1F2"/>
             </a:solidFill>
           </a:ln>
           <a:effectLst/>
@@ -7580,7 +7800,7 @@
       </p:sp>
       <p:sp>
         <p:nvSpPr>
-          <p:cNvPr id="13" name="Rounded Rectangle 12"/>
+          <p:cNvPr id="14" name="Rounded Rectangle 13"/>
           <p:cNvSpPr/>
           <p:nvPr/>
         </p:nvSpPr>
@@ -7595,7 +7815,7 @@
             </a:avLst>
           </a:prstGeom>
           <a:solidFill>
-            <a:srgbClr val="6366F1"/>
+            <a:srgbClr val="4F46E5"/>
           </a:solidFill>
           <a:ln>
             <a:noFill/>
@@ -7635,7 +7855,7 @@
       </p:sp>
       <p:pic>
         <p:nvPicPr>
-          <p:cNvPr id="14" name="Picture 13" descr="Screenshot 2026-07-13 205528.png"/>
+          <p:cNvPr id="15" name="Picture 14" descr="Screenshot 2026-07-13 205528.png"/>
           <p:cNvPicPr>
             <a:picLocks noChangeAspect="1"/>
           </p:cNvPicPr>
@@ -7690,7 +7910,7 @@
             <a:avLst/>
           </a:prstGeom>
           <a:solidFill>
-            <a:srgbClr val="0F1120"/>
+            <a:srgbClr val="FFFFFF"/>
           </a:solidFill>
           <a:ln>
             <a:noFill/>
@@ -7734,7 +7954,7 @@
             <a:avLst/>
           </a:prstGeom>
           <a:solidFill>
-            <a:srgbClr val="22C55E"/>
+            <a:srgbClr val="16A34A"/>
           </a:solidFill>
           <a:ln>
             <a:noFill/>
@@ -7789,7 +8009,7 @@
             <a:r>
               <a:rPr sz="1250" b="1">
                 <a:solidFill>
-                  <a:srgbClr val="22C55E"/>
+                  <a:srgbClr val="16A34A"/>
                 </a:solidFill>
                 <a:latin typeface="Calibri"/>
               </a:rPr>
@@ -7824,7 +8044,7 @@
             <a:r>
               <a:rPr sz="2400" b="1">
                 <a:solidFill>
-                  <a:srgbClr val="F1F3FF"/>
+                  <a:srgbClr val="1E2140"/>
                 </a:solidFill>
                 <a:latin typeface="Calibri"/>
               </a:rPr>
@@ -7848,7 +8068,7 @@
             <a:avLst/>
           </a:prstGeom>
           <a:solidFill>
-            <a:srgbClr val="353A5C"/>
+            <a:srgbClr val="DDE1F2"/>
           </a:solidFill>
           <a:ln>
             <a:noFill/>
@@ -7892,7 +8112,7 @@
             <a:avLst/>
           </a:prstGeom>
           <a:solidFill>
-            <a:srgbClr val="090A16"/>
+            <a:srgbClr val="F1F2FA"/>
           </a:solidFill>
           <a:ln>
             <a:noFill/>
@@ -7923,97 +8143,23 @@
       </p:sp>
       <p:sp>
         <p:nvSpPr>
-          <p:cNvPr id="8" name="TextBox 7"/>
-          <p:cNvSpPr txBox="1"/>
-          <p:nvPr/>
-        </p:nvSpPr>
-        <p:spPr>
-          <a:xfrm>
-            <a:off x="411480" y="6547104"/>
-            <a:ext cx="8686800" cy="238658"/>
+          <p:cNvPr id="8" name="Rectangle 7"/>
+          <p:cNvSpPr/>
+          <p:nvPr/>
+        </p:nvSpPr>
+        <p:spPr>
+          <a:xfrm>
+            <a:off x="0" y="6547104"/>
+            <a:ext cx="12191695" cy="18288"/>
           </a:xfrm>
           <a:prstGeom prst="rect">
             <a:avLst/>
           </a:prstGeom>
-          <a:noFill/>
-        </p:spPr>
-        <p:txBody>
-          <a:bodyPr wrap="square" lIns="0" rIns="0" tIns="0" bIns="0">
-            <a:spAutoFit/>
-          </a:bodyPr>
-          <a:lstStyle/>
-          <a:p>
-            <a:pPr algn="l"/>
-            <a:r>
-              <a:rPr sz="950" b="0">
-                <a:solidFill>
-                  <a:srgbClr val="9CA3C7"/>
-                </a:solidFill>
-                <a:latin typeface="Calibri"/>
-              </a:rPr>
-              <a:t>FinGenius AI  •  M.Tech Mini Project  •  [Student Name]  •  [College Name]</a:t>
-            </a:r>
-          </a:p>
-        </p:txBody>
-      </p:sp>
-      <p:sp>
-        <p:nvSpPr>
-          <p:cNvPr id="9" name="TextBox 8"/>
-          <p:cNvSpPr txBox="1"/>
-          <p:nvPr/>
-        </p:nvSpPr>
-        <p:spPr>
-          <a:xfrm>
-            <a:off x="11094415" y="6547104"/>
-            <a:ext cx="685800" cy="310896"/>
-          </a:xfrm>
-          <a:prstGeom prst="rect">
-            <a:avLst/>
-          </a:prstGeom>
-          <a:noFill/>
-        </p:spPr>
-        <p:txBody>
-          <a:bodyPr wrap="square" lIns="0" rIns="0" tIns="0" bIns="0">
-            <a:spAutoFit/>
-          </a:bodyPr>
-          <a:lstStyle/>
-          <a:p>
-            <a:pPr algn="r"/>
-            <a:r>
-              <a:rPr sz="950" b="1">
-                <a:solidFill>
-                  <a:srgbClr val="22C55E"/>
-                </a:solidFill>
-                <a:latin typeface="Calibri"/>
-              </a:rPr>
-              <a:t>5</a:t>
-            </a:r>
-          </a:p>
-        </p:txBody>
-      </p:sp>
-      <p:sp>
-        <p:nvSpPr>
-          <p:cNvPr id="10" name="Rounded Rectangle 9"/>
-          <p:cNvSpPr/>
-          <p:nvPr/>
-        </p:nvSpPr>
-        <p:spPr>
-          <a:xfrm>
-            <a:off x="457200" y="1417320"/>
-            <a:ext cx="5394960" cy="4526280"/>
-          </a:xfrm>
-          <a:prstGeom prst="roundRect">
-            <a:avLst>
-              <a:gd name="adj" fmla="val 5000"/>
-            </a:avLst>
-          </a:prstGeom>
           <a:solidFill>
-            <a:srgbClr val="1A1D33"/>
+            <a:srgbClr val="DDE1F2"/>
           </a:solidFill>
-          <a:ln w="12700">
-            <a:solidFill>
-              <a:srgbClr val="353A5C"/>
-            </a:solidFill>
+          <a:ln>
+            <a:noFill/>
           </a:ln>
           <a:effectLst/>
         </p:spPr>
@@ -8041,7 +8187,125 @@
       </p:sp>
       <p:sp>
         <p:nvSpPr>
+          <p:cNvPr id="9" name="TextBox 8"/>
+          <p:cNvSpPr txBox="1"/>
+          <p:nvPr/>
+        </p:nvSpPr>
+        <p:spPr>
+          <a:xfrm>
+            <a:off x="411480" y="6574536"/>
+            <a:ext cx="8686800" cy="238658"/>
+          </a:xfrm>
+          <a:prstGeom prst="rect">
+            <a:avLst/>
+          </a:prstGeom>
+          <a:noFill/>
+        </p:spPr>
+        <p:txBody>
+          <a:bodyPr wrap="square" lIns="0" rIns="0" tIns="0" bIns="0">
+            <a:spAutoFit/>
+          </a:bodyPr>
+          <a:lstStyle/>
+          <a:p>
+            <a:pPr algn="l"/>
+            <a:r>
+              <a:rPr sz="950" b="0">
+                <a:solidFill>
+                  <a:srgbClr val="64708A"/>
+                </a:solidFill>
+                <a:latin typeface="Calibri"/>
+              </a:rPr>
+              <a:t>FinGenius AI  •  M.Tech Mini Project  •  [Student Name]  •  [College Name]</a:t>
+            </a:r>
+          </a:p>
+        </p:txBody>
+      </p:sp>
+      <p:sp>
+        <p:nvSpPr>
+          <p:cNvPr id="10" name="TextBox 9"/>
+          <p:cNvSpPr txBox="1"/>
+          <p:nvPr/>
+        </p:nvSpPr>
+        <p:spPr>
+          <a:xfrm>
+            <a:off x="11094415" y="6574536"/>
+            <a:ext cx="685800" cy="256032"/>
+          </a:xfrm>
+          <a:prstGeom prst="rect">
+            <a:avLst/>
+          </a:prstGeom>
+          <a:noFill/>
+        </p:spPr>
+        <p:txBody>
+          <a:bodyPr wrap="square" lIns="0" rIns="0" tIns="0" bIns="0">
+            <a:spAutoFit/>
+          </a:bodyPr>
+          <a:lstStyle/>
+          <a:p>
+            <a:pPr algn="r"/>
+            <a:r>
+              <a:rPr sz="950" b="1">
+                <a:solidFill>
+                  <a:srgbClr val="16A34A"/>
+                </a:solidFill>
+                <a:latin typeface="Calibri"/>
+              </a:rPr>
+              <a:t>5</a:t>
+            </a:r>
+          </a:p>
+        </p:txBody>
+      </p:sp>
+      <p:sp>
+        <p:nvSpPr>
           <p:cNvPr id="11" name="Rounded Rectangle 10"/>
+          <p:cNvSpPr/>
+          <p:nvPr/>
+        </p:nvSpPr>
+        <p:spPr>
+          <a:xfrm>
+            <a:off x="457200" y="1417320"/>
+            <a:ext cx="5394960" cy="4526280"/>
+          </a:xfrm>
+          <a:prstGeom prst="roundRect">
+            <a:avLst>
+              <a:gd name="adj" fmla="val 5000"/>
+            </a:avLst>
+          </a:prstGeom>
+          <a:solidFill>
+            <a:srgbClr val="F6F7FC"/>
+          </a:solidFill>
+          <a:ln w="12700">
+            <a:solidFill>
+              <a:srgbClr val="DDE1F2"/>
+            </a:solidFill>
+          </a:ln>
+          <a:effectLst/>
+        </p:spPr>
+        <p:style>
+          <a:lnRef idx="1">
+            <a:schemeClr val="accent1"/>
+          </a:lnRef>
+          <a:fillRef idx="3">
+            <a:schemeClr val="accent1"/>
+          </a:fillRef>
+          <a:effectRef idx="2">
+            <a:schemeClr val="accent1"/>
+          </a:effectRef>
+          <a:fontRef idx="minor">
+            <a:schemeClr val="lt1"/>
+          </a:fontRef>
+        </p:style>
+        <p:txBody>
+          <a:bodyPr rtlCol="0" anchor="ctr"/>
+          <a:lstStyle/>
+          <a:p>
+            <a:pPr algn="ctr"/>
+          </a:p>
+        </p:txBody>
+      </p:sp>
+      <p:sp>
+        <p:nvSpPr>
+          <p:cNvPr id="12" name="Rounded Rectangle 11"/>
           <p:cNvSpPr/>
           <p:nvPr/>
         </p:nvSpPr>
@@ -8056,7 +8320,7 @@
             </a:avLst>
           </a:prstGeom>
           <a:solidFill>
-            <a:srgbClr val="22C55E"/>
+            <a:srgbClr val="16A34A"/>
           </a:solidFill>
           <a:ln>
             <a:noFill/>
@@ -8096,7 +8360,7 @@
       </p:sp>
       <p:pic>
         <p:nvPicPr>
-          <p:cNvPr id="12" name="Picture 11" descr="Screenshot 2026-07-13 205600.png"/>
+          <p:cNvPr id="13" name="Picture 12" descr="Screenshot 2026-07-13 205600.png"/>
           <p:cNvPicPr>
             <a:picLocks noChangeAspect="1"/>
           </p:cNvPicPr>
@@ -8120,7 +8384,7 @@
       </p:pic>
       <p:sp>
         <p:nvSpPr>
-          <p:cNvPr id="13" name="Rounded Rectangle 12"/>
+          <p:cNvPr id="14" name="Rounded Rectangle 13"/>
           <p:cNvSpPr/>
           <p:nvPr/>
         </p:nvSpPr>
@@ -8135,11 +8399,11 @@
             </a:avLst>
           </a:prstGeom>
           <a:solidFill>
-            <a:srgbClr val="1A1D33"/>
+            <a:srgbClr val="F6F7FC"/>
           </a:solidFill>
           <a:ln w="12700">
             <a:solidFill>
-              <a:srgbClr val="353A5C"/>
+              <a:srgbClr val="DDE1F2"/>
             </a:solidFill>
           </a:ln>
           <a:effectLst/>
@@ -8168,7 +8432,7 @@
       </p:sp>
       <p:sp>
         <p:nvSpPr>
-          <p:cNvPr id="14" name="Rounded Rectangle 13"/>
+          <p:cNvPr id="15" name="Rounded Rectangle 14"/>
           <p:cNvSpPr/>
           <p:nvPr/>
         </p:nvSpPr>
@@ -8183,7 +8447,7 @@
             </a:avLst>
           </a:prstGeom>
           <a:solidFill>
-            <a:srgbClr val="F59E0B"/>
+            <a:srgbClr val="D97706"/>
           </a:solidFill>
           <a:ln>
             <a:noFill/>
@@ -8223,7 +8487,7 @@
       </p:sp>
       <p:pic>
         <p:nvPicPr>
-          <p:cNvPr id="15" name="Picture 14" descr="Screenshot 2026-07-13 205745.png"/>
+          <p:cNvPr id="16" name="Picture 15" descr="Screenshot 2026-07-13 205745.png"/>
           <p:cNvPicPr>
             <a:picLocks noChangeAspect="1"/>
           </p:cNvPicPr>
@@ -8278,7 +8542,7 @@
             <a:avLst/>
           </a:prstGeom>
           <a:solidFill>
-            <a:srgbClr val="0F1120"/>
+            <a:srgbClr val="FFFFFF"/>
           </a:solidFill>
           <a:ln>
             <a:noFill/>
@@ -8322,7 +8586,7 @@
             <a:avLst/>
           </a:prstGeom>
           <a:solidFill>
-            <a:srgbClr val="F59E0B"/>
+            <a:srgbClr val="D97706"/>
           </a:solidFill>
           <a:ln>
             <a:noFill/>
@@ -8377,7 +8641,7 @@
             <a:r>
               <a:rPr sz="1250" b="1">
                 <a:solidFill>
-                  <a:srgbClr val="F59E0B"/>
+                  <a:srgbClr val="D97706"/>
                 </a:solidFill>
                 <a:latin typeface="Calibri"/>
               </a:rPr>
@@ -8412,7 +8676,7 @@
             <a:r>
               <a:rPr sz="2400" b="1">
                 <a:solidFill>
-                  <a:srgbClr val="F1F3FF"/>
+                  <a:srgbClr val="1E2140"/>
                 </a:solidFill>
                 <a:latin typeface="Calibri"/>
               </a:rPr>
@@ -8436,7 +8700,7 @@
             <a:avLst/>
           </a:prstGeom>
           <a:solidFill>
-            <a:srgbClr val="353A5C"/>
+            <a:srgbClr val="DDE1F2"/>
           </a:solidFill>
           <a:ln>
             <a:noFill/>
@@ -8480,7 +8744,7 @@
             <a:avLst/>
           </a:prstGeom>
           <a:solidFill>
-            <a:srgbClr val="090A16"/>
+            <a:srgbClr val="F1F2FA"/>
           </a:solidFill>
           <a:ln>
             <a:noFill/>
@@ -8511,13 +8775,57 @@
       </p:sp>
       <p:sp>
         <p:nvSpPr>
-          <p:cNvPr id="8" name="TextBox 7"/>
+          <p:cNvPr id="8" name="Rectangle 7"/>
+          <p:cNvSpPr/>
+          <p:nvPr/>
+        </p:nvSpPr>
+        <p:spPr>
+          <a:xfrm>
+            <a:off x="0" y="6547104"/>
+            <a:ext cx="12191695" cy="18288"/>
+          </a:xfrm>
+          <a:prstGeom prst="rect">
+            <a:avLst/>
+          </a:prstGeom>
+          <a:solidFill>
+            <a:srgbClr val="DDE1F2"/>
+          </a:solidFill>
+          <a:ln>
+            <a:noFill/>
+          </a:ln>
+          <a:effectLst/>
+        </p:spPr>
+        <p:style>
+          <a:lnRef idx="1">
+            <a:schemeClr val="accent1"/>
+          </a:lnRef>
+          <a:fillRef idx="3">
+            <a:schemeClr val="accent1"/>
+          </a:fillRef>
+          <a:effectRef idx="2">
+            <a:schemeClr val="accent1"/>
+          </a:effectRef>
+          <a:fontRef idx="minor">
+            <a:schemeClr val="lt1"/>
+          </a:fontRef>
+        </p:style>
+        <p:txBody>
+          <a:bodyPr rtlCol="0" anchor="ctr"/>
+          <a:lstStyle/>
+          <a:p>
+            <a:pPr algn="ctr"/>
+          </a:p>
+        </p:txBody>
+      </p:sp>
+      <p:sp>
+        <p:nvSpPr>
+          <p:cNvPr id="9" name="TextBox 8"/>
           <p:cNvSpPr txBox="1"/>
           <p:nvPr/>
         </p:nvSpPr>
         <p:spPr>
           <a:xfrm>
-            <a:off x="411480" y="6547104"/>
+            <a:off x="411480" y="6574536"/>
             <a:ext cx="8686800" cy="238658"/>
           </a:xfrm>
           <a:prstGeom prst="rect">
@@ -8535,7 +8843,7 @@
             <a:r>
               <a:rPr sz="950" b="0">
                 <a:solidFill>
-                  <a:srgbClr val="9CA3C7"/>
+                  <a:srgbClr val="64708A"/>
                 </a:solidFill>
                 <a:latin typeface="Calibri"/>
               </a:rPr>
@@ -8546,14 +8854,14 @@
       </p:sp>
       <p:sp>
         <p:nvSpPr>
-          <p:cNvPr id="9" name="TextBox 8"/>
+          <p:cNvPr id="10" name="TextBox 9"/>
           <p:cNvSpPr txBox="1"/>
           <p:nvPr/>
         </p:nvSpPr>
         <p:spPr>
           <a:xfrm>
-            <a:off x="11094415" y="6547104"/>
-            <a:ext cx="685800" cy="310896"/>
+            <a:off x="11094415" y="6574536"/>
+            <a:ext cx="685800" cy="256032"/>
           </a:xfrm>
           <a:prstGeom prst="rect">
             <a:avLst/>
@@ -8570,7 +8878,7 @@
             <a:r>
               <a:rPr sz="950" b="1">
                 <a:solidFill>
-                  <a:srgbClr val="F59E0B"/>
+                  <a:srgbClr val="D97706"/>
                 </a:solidFill>
                 <a:latin typeface="Calibri"/>
               </a:rPr>
@@ -8581,7 +8889,7 @@
       </p:sp>
       <p:sp>
         <p:nvSpPr>
-          <p:cNvPr id="10" name="TextBox 9"/>
+          <p:cNvPr id="11" name="TextBox 10"/>
           <p:cNvSpPr txBox="1"/>
           <p:nvPr/>
         </p:nvSpPr>
@@ -8605,7 +8913,7 @@
             <a:r>
               <a:rPr sz="1400" b="1">
                 <a:solidFill>
-                  <a:srgbClr val="F1F3FF"/>
+                  <a:srgbClr val="1E2140"/>
                 </a:solidFill>
                 <a:latin typeface="Calibri"/>
               </a:rPr>
@@ -8616,7 +8924,7 @@
       </p:sp>
       <p:graphicFrame>
         <p:nvGraphicFramePr>
-          <p:cNvPr id="11" name="Table 10"/>
+          <p:cNvPr id="12" name="Table 11"/>
           <p:cNvGraphicFramePr>
             <a:graphicFrameLocks noGrp="1"/>
           </p:cNvGraphicFramePr>
@@ -8657,7 +8965,7 @@
                   </a:txBody>
                   <a:tcPr marT="38100" marB="38100" anchor="ctr">
                     <a:solidFill>
-                      <a:srgbClr val="F59E0B"/>
+                      <a:srgbClr val="D97706"/>
                     </a:solidFill>
                   </a:tcPr>
                 </a:tc>
@@ -8679,7 +8987,7 @@
                   </a:txBody>
                   <a:tcPr marT="38100" marB="38100" anchor="ctr">
                     <a:solidFill>
-                      <a:srgbClr val="F59E0B"/>
+                      <a:srgbClr val="D97706"/>
                     </a:solidFill>
                   </a:tcPr>
                 </a:tc>
@@ -8701,7 +9009,7 @@
                   </a:txBody>
                   <a:tcPr marT="38100" marB="38100" anchor="ctr">
                     <a:solidFill>
-                      <a:srgbClr val="F59E0B"/>
+                      <a:srgbClr val="D97706"/>
                     </a:solidFill>
                   </a:tcPr>
                 </a:tc>
@@ -8723,7 +9031,7 @@
                   </a:txBody>
                   <a:tcPr marT="38100" marB="38100" anchor="ctr">
                     <a:solidFill>
-                      <a:srgbClr val="F59E0B"/>
+                      <a:srgbClr val="D97706"/>
                     </a:solidFill>
                   </a:tcPr>
                 </a:tc>
@@ -8737,7 +9045,7 @@
                       <a:r>
                         <a:rPr sz="1150">
                           <a:solidFill>
-                            <a:srgbClr val="F1F3FF"/>
+                            <a:srgbClr val="1E2140"/>
                           </a:solidFill>
                           <a:latin typeface="Calibri"/>
                         </a:rPr>
@@ -8747,7 +9055,7 @@
                   </a:txBody>
                   <a:tcPr marT="38100" marB="38100" anchor="ctr">
                     <a:solidFill>
-                      <a:srgbClr val="1A1D33"/>
+                      <a:srgbClr val="F6F7FC"/>
                     </a:solidFill>
                   </a:tcPr>
                 </a:tc>
@@ -8759,7 +9067,7 @@
                       <a:r>
                         <a:rPr sz="1150">
                           <a:solidFill>
-                            <a:srgbClr val="F1F3FF"/>
+                            <a:srgbClr val="1E2140"/>
                           </a:solidFill>
                           <a:latin typeface="Calibri"/>
                         </a:rPr>
@@ -8769,7 +9077,7 @@
                   </a:txBody>
                   <a:tcPr marT="38100" marB="38100" anchor="ctr">
                     <a:solidFill>
-                      <a:srgbClr val="1A1D33"/>
+                      <a:srgbClr val="F6F7FC"/>
                     </a:solidFill>
                   </a:tcPr>
                 </a:tc>
@@ -8781,7 +9089,7 @@
                       <a:r>
                         <a:rPr sz="1150">
                           <a:solidFill>
-                            <a:srgbClr val="F1F3FF"/>
+                            <a:srgbClr val="1E2140"/>
                           </a:solidFill>
                           <a:latin typeface="Calibri"/>
                         </a:rPr>
@@ -8791,7 +9099,7 @@
                   </a:txBody>
                   <a:tcPr marT="38100" marB="38100" anchor="ctr">
                     <a:solidFill>
-                      <a:srgbClr val="1A1D33"/>
+                      <a:srgbClr val="F6F7FC"/>
                     </a:solidFill>
                   </a:tcPr>
                 </a:tc>
@@ -8803,7 +9111,7 @@
                       <a:r>
                         <a:rPr sz="1150">
                           <a:solidFill>
-                            <a:srgbClr val="F1F3FF"/>
+                            <a:srgbClr val="1E2140"/>
                           </a:solidFill>
                           <a:latin typeface="Calibri"/>
                         </a:rPr>
@@ -8813,7 +9121,7 @@
                   </a:txBody>
                   <a:tcPr marT="38100" marB="38100" anchor="ctr">
                     <a:solidFill>
-                      <a:srgbClr val="1A1D33"/>
+                      <a:srgbClr val="F6F7FC"/>
                     </a:solidFill>
                   </a:tcPr>
                 </a:tc>
@@ -8827,7 +9135,7 @@
                       <a:r>
                         <a:rPr sz="1150">
                           <a:solidFill>
-                            <a:srgbClr val="F1F3FF"/>
+                            <a:srgbClr val="1E2140"/>
                           </a:solidFill>
                           <a:latin typeface="Calibri"/>
                         </a:rPr>
@@ -8837,7 +9145,7 @@
                   </a:txBody>
                   <a:tcPr marT="38100" marB="38100" anchor="ctr">
                     <a:solidFill>
-                      <a:srgbClr val="20233F"/>
+                      <a:srgbClr val="ECEEFA"/>
                     </a:solidFill>
                   </a:tcPr>
                 </a:tc>
@@ -8849,7 +9157,7 @@
                       <a:r>
                         <a:rPr sz="1150">
                           <a:solidFill>
-                            <a:srgbClr val="F1F3FF"/>
+                            <a:srgbClr val="1E2140"/>
                           </a:solidFill>
                           <a:latin typeface="Calibri"/>
                         </a:rPr>
@@ -8859,7 +9167,7 @@
                   </a:txBody>
                   <a:tcPr marT="38100" marB="38100" anchor="ctr">
                     <a:solidFill>
-                      <a:srgbClr val="20233F"/>
+                      <a:srgbClr val="ECEEFA"/>
                     </a:solidFill>
                   </a:tcPr>
                 </a:tc>
@@ -8871,7 +9179,7 @@
                       <a:r>
                         <a:rPr sz="1150">
                           <a:solidFill>
-                            <a:srgbClr val="F1F3FF"/>
+                            <a:srgbClr val="1E2140"/>
                           </a:solidFill>
                           <a:latin typeface="Calibri"/>
                         </a:rPr>
@@ -8881,7 +9189,7 @@
                   </a:txBody>
                   <a:tcPr marT="38100" marB="38100" anchor="ctr">
                     <a:solidFill>
-                      <a:srgbClr val="20233F"/>
+                      <a:srgbClr val="ECEEFA"/>
                     </a:solidFill>
                   </a:tcPr>
                 </a:tc>
@@ -8893,7 +9201,7 @@
                       <a:r>
                         <a:rPr sz="1150">
                           <a:solidFill>
-                            <a:srgbClr val="F1F3FF"/>
+                            <a:srgbClr val="1E2140"/>
                           </a:solidFill>
                           <a:latin typeface="Calibri"/>
                         </a:rPr>
@@ -8903,7 +9211,7 @@
                   </a:txBody>
                   <a:tcPr marT="38100" marB="38100" anchor="ctr">
                     <a:solidFill>
-                      <a:srgbClr val="20233F"/>
+                      <a:srgbClr val="ECEEFA"/>
                     </a:solidFill>
                   </a:tcPr>
                 </a:tc>
@@ -8917,7 +9225,7 @@
                       <a:r>
                         <a:rPr sz="1150">
                           <a:solidFill>
-                            <a:srgbClr val="F1F3FF"/>
+                            <a:srgbClr val="1E2140"/>
                           </a:solidFill>
                           <a:latin typeface="Calibri"/>
                         </a:rPr>
@@ -8927,7 +9235,7 @@
                   </a:txBody>
                   <a:tcPr marT="38100" marB="38100" anchor="ctr">
                     <a:solidFill>
-                      <a:srgbClr val="1A1D33"/>
+                      <a:srgbClr val="F6F7FC"/>
                     </a:solidFill>
                   </a:tcPr>
                 </a:tc>
@@ -8939,7 +9247,7 @@
                       <a:r>
                         <a:rPr sz="1150">
                           <a:solidFill>
-                            <a:srgbClr val="F1F3FF"/>
+                            <a:srgbClr val="1E2140"/>
                           </a:solidFill>
                           <a:latin typeface="Calibri"/>
                         </a:rPr>
@@ -8949,7 +9257,7 @@
                   </a:txBody>
                   <a:tcPr marT="38100" marB="38100" anchor="ctr">
                     <a:solidFill>
-                      <a:srgbClr val="1A1D33"/>
+                      <a:srgbClr val="F6F7FC"/>
                     </a:solidFill>
                   </a:tcPr>
                 </a:tc>
@@ -8961,7 +9269,7 @@
                       <a:r>
                         <a:rPr sz="1150">
                           <a:solidFill>
-                            <a:srgbClr val="F1F3FF"/>
+                            <a:srgbClr val="1E2140"/>
                           </a:solidFill>
                           <a:latin typeface="Calibri"/>
                         </a:rPr>
@@ -8971,7 +9279,7 @@
                   </a:txBody>
                   <a:tcPr marT="38100" marB="38100" anchor="ctr">
                     <a:solidFill>
-                      <a:srgbClr val="1A1D33"/>
+                      <a:srgbClr val="F6F7FC"/>
                     </a:solidFill>
                   </a:tcPr>
                 </a:tc>
@@ -8983,7 +9291,7 @@
                       <a:r>
                         <a:rPr sz="1150">
                           <a:solidFill>
-                            <a:srgbClr val="F1F3FF"/>
+                            <a:srgbClr val="1E2140"/>
                           </a:solidFill>
                           <a:latin typeface="Calibri"/>
                         </a:rPr>
@@ -8993,7 +9301,7 @@
                   </a:txBody>
                   <a:tcPr marT="38100" marB="38100" anchor="ctr">
                     <a:solidFill>
-                      <a:srgbClr val="1A1D33"/>
+                      <a:srgbClr val="F6F7FC"/>
                     </a:solidFill>
                   </a:tcPr>
                 </a:tc>
@@ -9007,7 +9315,7 @@
                       <a:r>
                         <a:rPr sz="1150">
                           <a:solidFill>
-                            <a:srgbClr val="F1F3FF"/>
+                            <a:srgbClr val="1E2140"/>
                           </a:solidFill>
                           <a:latin typeface="Calibri"/>
                         </a:rPr>
@@ -9017,7 +9325,7 @@
                   </a:txBody>
                   <a:tcPr marT="38100" marB="38100" anchor="ctr">
                     <a:solidFill>
-                      <a:srgbClr val="20233F"/>
+                      <a:srgbClr val="ECEEFA"/>
                     </a:solidFill>
                   </a:tcPr>
                 </a:tc>
@@ -9029,7 +9337,7 @@
                       <a:r>
                         <a:rPr sz="1150">
                           <a:solidFill>
-                            <a:srgbClr val="F1F3FF"/>
+                            <a:srgbClr val="1E2140"/>
                           </a:solidFill>
                           <a:latin typeface="Calibri"/>
                         </a:rPr>
@@ -9039,7 +9347,7 @@
                   </a:txBody>
                   <a:tcPr marT="38100" marB="38100" anchor="ctr">
                     <a:solidFill>
-                      <a:srgbClr val="20233F"/>
+                      <a:srgbClr val="ECEEFA"/>
                     </a:solidFill>
                   </a:tcPr>
                 </a:tc>
@@ -9051,7 +9359,7 @@
                       <a:r>
                         <a:rPr sz="1150">
                           <a:solidFill>
-                            <a:srgbClr val="F1F3FF"/>
+                            <a:srgbClr val="1E2140"/>
                           </a:solidFill>
                           <a:latin typeface="Calibri"/>
                         </a:rPr>
@@ -9061,7 +9369,7 @@
                   </a:txBody>
                   <a:tcPr marT="38100" marB="38100" anchor="ctr">
                     <a:solidFill>
-                      <a:srgbClr val="20233F"/>
+                      <a:srgbClr val="ECEEFA"/>
                     </a:solidFill>
                   </a:tcPr>
                 </a:tc>
@@ -9073,7 +9381,7 @@
                       <a:r>
                         <a:rPr sz="1150">
                           <a:solidFill>
-                            <a:srgbClr val="F1F3FF"/>
+                            <a:srgbClr val="1E2140"/>
                           </a:solidFill>
                           <a:latin typeface="Calibri"/>
                         </a:rPr>
@@ -9083,7 +9391,7 @@
                   </a:txBody>
                   <a:tcPr marT="38100" marB="38100" anchor="ctr">
                     <a:solidFill>
-                      <a:srgbClr val="20233F"/>
+                      <a:srgbClr val="ECEEFA"/>
                     </a:solidFill>
                   </a:tcPr>
                 </a:tc>
@@ -9094,7 +9402,7 @@
       </p:graphicFrame>
       <p:sp>
         <p:nvSpPr>
-          <p:cNvPr id="12" name="Rounded Rectangle 11"/>
+          <p:cNvPr id="13" name="Rounded Rectangle 12"/>
           <p:cNvSpPr/>
           <p:nvPr/>
         </p:nvSpPr>
@@ -9109,7 +9417,7 @@
             </a:avLst>
           </a:prstGeom>
           <a:solidFill>
-            <a:srgbClr val="22C55E"/>
+            <a:srgbClr val="16A34A"/>
           </a:solidFill>
           <a:ln>
             <a:noFill/>
@@ -9149,7 +9457,7 @@
       </p:sp>
       <p:sp>
         <p:nvSpPr>
-          <p:cNvPr id="13" name="Rounded Rectangle 12"/>
+          <p:cNvPr id="14" name="Rounded Rectangle 13"/>
           <p:cNvSpPr/>
           <p:nvPr/>
         </p:nvSpPr>
@@ -9164,11 +9472,11 @@
             </a:avLst>
           </a:prstGeom>
           <a:solidFill>
-            <a:srgbClr val="1A1D33"/>
+            <a:srgbClr val="F6F7FC"/>
           </a:solidFill>
           <a:ln w="12700">
             <a:solidFill>
-              <a:srgbClr val="353A5C"/>
+              <a:srgbClr val="DDE1F2"/>
             </a:solidFill>
           </a:ln>
           <a:effectLst/>
@@ -9197,7 +9505,7 @@
       </p:sp>
       <p:sp>
         <p:nvSpPr>
-          <p:cNvPr id="14" name="TextBox 13"/>
+          <p:cNvPr id="15" name="TextBox 14"/>
           <p:cNvSpPr txBox="1"/>
           <p:nvPr/>
         </p:nvSpPr>
@@ -9225,7 +9533,7 @@
             <a:r>
               <a:rPr sz="1200" b="1">
                 <a:solidFill>
-                  <a:srgbClr val="22C55E"/>
+                  <a:srgbClr val="16A34A"/>
                 </a:solidFill>
                 <a:latin typeface="Calibri"/>
               </a:rPr>
@@ -9234,7 +9542,7 @@
             <a:r>
               <a:rPr sz="1200" b="0">
                 <a:solidFill>
-                  <a:srgbClr val="9CA3C7"/>
+                  <a:srgbClr val="64708A"/>
                 </a:solidFill>
                 <a:latin typeface="Calibri"/>
               </a:rPr>
@@ -9250,7 +9558,7 @@
             <a:r>
               <a:rPr sz="1200" b="1">
                 <a:solidFill>
-                  <a:srgbClr val="22C55E"/>
+                  <a:srgbClr val="16A34A"/>
                 </a:solidFill>
                 <a:latin typeface="Calibri"/>
               </a:rPr>
@@ -9259,7 +9567,7 @@
             <a:r>
               <a:rPr sz="1200" b="0">
                 <a:solidFill>
-                  <a:srgbClr val="9CA3C7"/>
+                  <a:srgbClr val="64708A"/>
                 </a:solidFill>
                 <a:latin typeface="Calibri"/>
               </a:rPr>
@@ -9275,7 +9583,7 @@
             <a:r>
               <a:rPr sz="1200" b="1">
                 <a:solidFill>
-                  <a:srgbClr val="22C55E"/>
+                  <a:srgbClr val="16A34A"/>
                 </a:solidFill>
                 <a:latin typeface="Calibri"/>
               </a:rPr>
@@ -9284,7 +9592,7 @@
             <a:r>
               <a:rPr sz="1200" b="0">
                 <a:solidFill>
-                  <a:srgbClr val="9CA3C7"/>
+                  <a:srgbClr val="64708A"/>
                 </a:solidFill>
                 <a:latin typeface="Calibri"/>
               </a:rPr>
@@ -9300,7 +9608,7 @@
             <a:r>
               <a:rPr sz="1200" b="1">
                 <a:solidFill>
-                  <a:srgbClr val="22C55E"/>
+                  <a:srgbClr val="16A34A"/>
                 </a:solidFill>
                 <a:latin typeface="Calibri"/>
               </a:rPr>
@@ -9309,7 +9617,7 @@
             <a:r>
               <a:rPr sz="1200" b="0">
                 <a:solidFill>
-                  <a:srgbClr val="9CA3C7"/>
+                  <a:srgbClr val="64708A"/>
                 </a:solidFill>
                 <a:latin typeface="Calibri"/>
               </a:rPr>
@@ -9320,7 +9628,7 @@
       </p:sp>
       <p:sp>
         <p:nvSpPr>
-          <p:cNvPr id="15" name="Rounded Rectangle 14"/>
+          <p:cNvPr id="16" name="Rounded Rectangle 15"/>
           <p:cNvSpPr/>
           <p:nvPr/>
         </p:nvSpPr>
@@ -9335,7 +9643,7 @@
             </a:avLst>
           </a:prstGeom>
           <a:solidFill>
-            <a:srgbClr val="F59E0B"/>
+            <a:srgbClr val="D97706"/>
           </a:solidFill>
           <a:ln>
             <a:noFill/>
@@ -9375,7 +9683,7 @@
       </p:sp>
       <p:sp>
         <p:nvSpPr>
-          <p:cNvPr id="16" name="Rounded Rectangle 15"/>
+          <p:cNvPr id="17" name="Rounded Rectangle 16"/>
           <p:cNvSpPr/>
           <p:nvPr/>
         </p:nvSpPr>
@@ -9390,11 +9698,11 @@
             </a:avLst>
           </a:prstGeom>
           <a:solidFill>
-            <a:srgbClr val="1A1D33"/>
+            <a:srgbClr val="F6F7FC"/>
           </a:solidFill>
           <a:ln w="12700">
             <a:solidFill>
-              <a:srgbClr val="353A5C"/>
+              <a:srgbClr val="DDE1F2"/>
             </a:solidFill>
           </a:ln>
           <a:effectLst/>
@@ -9423,7 +9731,7 @@
       </p:sp>
       <p:sp>
         <p:nvSpPr>
-          <p:cNvPr id="17" name="TextBox 16"/>
+          <p:cNvPr id="18" name="TextBox 17"/>
           <p:cNvSpPr txBox="1"/>
           <p:nvPr/>
         </p:nvSpPr>
@@ -9451,7 +9759,7 @@
             <a:r>
               <a:rPr sz="1200" b="1">
                 <a:solidFill>
-                  <a:srgbClr val="F59E0B"/>
+                  <a:srgbClr val="D97706"/>
                 </a:solidFill>
                 <a:latin typeface="Calibri"/>
               </a:rPr>
@@ -9460,7 +9768,7 @@
             <a:r>
               <a:rPr sz="1200" b="0">
                 <a:solidFill>
-                  <a:srgbClr val="9CA3C7"/>
+                  <a:srgbClr val="64708A"/>
                 </a:solidFill>
                 <a:latin typeface="Calibri"/>
               </a:rPr>
@@ -9476,7 +9784,7 @@
             <a:r>
               <a:rPr sz="1200" b="1">
                 <a:solidFill>
-                  <a:srgbClr val="F59E0B"/>
+                  <a:srgbClr val="D97706"/>
                 </a:solidFill>
                 <a:latin typeface="Calibri"/>
               </a:rPr>
@@ -9485,7 +9793,7 @@
             <a:r>
               <a:rPr sz="1200" b="0">
                 <a:solidFill>
-                  <a:srgbClr val="9CA3C7"/>
+                  <a:srgbClr val="64708A"/>
                 </a:solidFill>
                 <a:latin typeface="Calibri"/>
               </a:rPr>
@@ -9501,7 +9809,7 @@
             <a:r>
               <a:rPr sz="1200" b="1">
                 <a:solidFill>
-                  <a:srgbClr val="F59E0B"/>
+                  <a:srgbClr val="D97706"/>
                 </a:solidFill>
                 <a:latin typeface="Calibri"/>
               </a:rPr>
@@ -9510,7 +9818,7 @@
             <a:r>
               <a:rPr sz="1200" b="0">
                 <a:solidFill>
-                  <a:srgbClr val="9CA3C7"/>
+                  <a:srgbClr val="64708A"/>
                 </a:solidFill>
                 <a:latin typeface="Calibri"/>
               </a:rPr>
@@ -9526,7 +9834,7 @@
             <a:r>
               <a:rPr sz="1200" b="1">
                 <a:solidFill>
-                  <a:srgbClr val="F59E0B"/>
+                  <a:srgbClr val="D97706"/>
                 </a:solidFill>
                 <a:latin typeface="Calibri"/>
               </a:rPr>
@@ -9535,7 +9843,7 @@
             <a:r>
               <a:rPr sz="1200" b="0">
                 <a:solidFill>
-                  <a:srgbClr val="9CA3C7"/>
+                  <a:srgbClr val="64708A"/>
                 </a:solidFill>
                 <a:latin typeface="Calibri"/>
               </a:rPr>
@@ -9577,7 +9885,7 @@
             <a:avLst/>
           </a:prstGeom>
           <a:solidFill>
-            <a:srgbClr val="0F1120"/>
+            <a:srgbClr val="FFFFFF"/>
           </a:solidFill>
           <a:ln>
             <a:noFill/>
@@ -9621,7 +9929,7 @@
             <a:avLst/>
           </a:prstGeom>
           <a:solidFill>
-            <a:srgbClr val="6366F1"/>
+            <a:srgbClr val="4F46E5"/>
           </a:solidFill>
           <a:ln>
             <a:noFill/>
@@ -9676,7 +9984,7 @@
             <a:r>
               <a:rPr sz="1250" b="1">
                 <a:solidFill>
-                  <a:srgbClr val="6366F1"/>
+                  <a:srgbClr val="4F46E5"/>
                 </a:solidFill>
                 <a:latin typeface="Calibri"/>
               </a:rPr>
@@ -9711,7 +10019,7 @@
             <a:r>
               <a:rPr sz="2400" b="1">
                 <a:solidFill>
-                  <a:srgbClr val="F1F3FF"/>
+                  <a:srgbClr val="1E2140"/>
                 </a:solidFill>
                 <a:latin typeface="Calibri"/>
               </a:rPr>
@@ -9735,7 +10043,7 @@
             <a:avLst/>
           </a:prstGeom>
           <a:solidFill>
-            <a:srgbClr val="353A5C"/>
+            <a:srgbClr val="DDE1F2"/>
           </a:solidFill>
           <a:ln>
             <a:noFill/>
@@ -9779,7 +10087,7 @@
             <a:avLst/>
           </a:prstGeom>
           <a:solidFill>
-            <a:srgbClr val="090A16"/>
+            <a:srgbClr val="F1F2FA"/>
           </a:solidFill>
           <a:ln>
             <a:noFill/>
@@ -9810,92 +10118,20 @@
       </p:sp>
       <p:sp>
         <p:nvSpPr>
-          <p:cNvPr id="8" name="TextBox 7"/>
-          <p:cNvSpPr txBox="1"/>
-          <p:nvPr/>
-        </p:nvSpPr>
-        <p:spPr>
-          <a:xfrm>
-            <a:off x="411480" y="6547104"/>
-            <a:ext cx="8686800" cy="238658"/>
+          <p:cNvPr id="8" name="Rectangle 7"/>
+          <p:cNvSpPr/>
+          <p:nvPr/>
+        </p:nvSpPr>
+        <p:spPr>
+          <a:xfrm>
+            <a:off x="0" y="6547104"/>
+            <a:ext cx="12191695" cy="18288"/>
           </a:xfrm>
           <a:prstGeom prst="rect">
             <a:avLst/>
           </a:prstGeom>
-          <a:noFill/>
-        </p:spPr>
-        <p:txBody>
-          <a:bodyPr wrap="square" lIns="0" rIns="0" tIns="0" bIns="0">
-            <a:spAutoFit/>
-          </a:bodyPr>
-          <a:lstStyle/>
-          <a:p>
-            <a:pPr algn="l"/>
-            <a:r>
-              <a:rPr sz="950" b="0">
-                <a:solidFill>
-                  <a:srgbClr val="9CA3C7"/>
-                </a:solidFill>
-                <a:latin typeface="Calibri"/>
-              </a:rPr>
-              <a:t>FinGenius AI  •  M.Tech Mini Project  •  [Student Name]  •  [College Name]</a:t>
-            </a:r>
-          </a:p>
-        </p:txBody>
-      </p:sp>
-      <p:sp>
-        <p:nvSpPr>
-          <p:cNvPr id="9" name="TextBox 8"/>
-          <p:cNvSpPr txBox="1"/>
-          <p:nvPr/>
-        </p:nvSpPr>
-        <p:spPr>
-          <a:xfrm>
-            <a:off x="11094415" y="6547104"/>
-            <a:ext cx="685800" cy="310896"/>
-          </a:xfrm>
-          <a:prstGeom prst="rect">
-            <a:avLst/>
-          </a:prstGeom>
-          <a:noFill/>
-        </p:spPr>
-        <p:txBody>
-          <a:bodyPr wrap="square" lIns="0" rIns="0" tIns="0" bIns="0">
-            <a:spAutoFit/>
-          </a:bodyPr>
-          <a:lstStyle/>
-          <a:p>
-            <a:pPr algn="r"/>
-            <a:r>
-              <a:rPr sz="950" b="1">
-                <a:solidFill>
-                  <a:srgbClr val="6366F1"/>
-                </a:solidFill>
-                <a:latin typeface="Calibri"/>
-              </a:rPr>
-              <a:t>7</a:t>
-            </a:r>
-          </a:p>
-        </p:txBody>
-      </p:sp>
-      <p:sp>
-        <p:nvSpPr>
-          <p:cNvPr id="10" name="Rounded Rectangle 9"/>
-          <p:cNvSpPr/>
-          <p:nvPr/>
-        </p:nvSpPr>
-        <p:spPr>
-          <a:xfrm>
-            <a:off x="502920" y="1371600"/>
-            <a:ext cx="5532120" cy="365760"/>
-          </a:xfrm>
-          <a:prstGeom prst="roundRect">
-            <a:avLst>
-              <a:gd name="adj" fmla="val 40000"/>
-            </a:avLst>
-          </a:prstGeom>
           <a:solidFill>
-            <a:srgbClr val="6366F1"/>
+            <a:srgbClr val="DDE1F2"/>
           </a:solidFill>
           <a:ln>
             <a:noFill/>
@@ -9921,14 +10157,75 @@
           <a:lstStyle/>
           <a:p>
             <a:pPr algn="ctr"/>
-            <a:r>
-              <a:rPr sz="1300" b="1">
-                <a:solidFill>
-                  <a:srgbClr val="FFFFFF"/>
-                </a:solidFill>
-                <a:latin typeface="Calibri"/>
-              </a:rPr>
-              <a:t>Conclusion</a:t>
+          </a:p>
+        </p:txBody>
+      </p:sp>
+      <p:sp>
+        <p:nvSpPr>
+          <p:cNvPr id="9" name="TextBox 8"/>
+          <p:cNvSpPr txBox="1"/>
+          <p:nvPr/>
+        </p:nvSpPr>
+        <p:spPr>
+          <a:xfrm>
+            <a:off x="411480" y="6574536"/>
+            <a:ext cx="8686800" cy="238658"/>
+          </a:xfrm>
+          <a:prstGeom prst="rect">
+            <a:avLst/>
+          </a:prstGeom>
+          <a:noFill/>
+        </p:spPr>
+        <p:txBody>
+          <a:bodyPr wrap="square" lIns="0" rIns="0" tIns="0" bIns="0">
+            <a:spAutoFit/>
+          </a:bodyPr>
+          <a:lstStyle/>
+          <a:p>
+            <a:pPr algn="l"/>
+            <a:r>
+              <a:rPr sz="950" b="0">
+                <a:solidFill>
+                  <a:srgbClr val="64708A"/>
+                </a:solidFill>
+                <a:latin typeface="Calibri"/>
+              </a:rPr>
+              <a:t>FinGenius AI  •  M.Tech Mini Project  •  [Student Name]  •  [College Name]</a:t>
+            </a:r>
+          </a:p>
+        </p:txBody>
+      </p:sp>
+      <p:sp>
+        <p:nvSpPr>
+          <p:cNvPr id="10" name="TextBox 9"/>
+          <p:cNvSpPr txBox="1"/>
+          <p:nvPr/>
+        </p:nvSpPr>
+        <p:spPr>
+          <a:xfrm>
+            <a:off x="11094415" y="6574536"/>
+            <a:ext cx="685800" cy="256032"/>
+          </a:xfrm>
+          <a:prstGeom prst="rect">
+            <a:avLst/>
+          </a:prstGeom>
+          <a:noFill/>
+        </p:spPr>
+        <p:txBody>
+          <a:bodyPr wrap="square" lIns="0" rIns="0" tIns="0" bIns="0">
+            <a:spAutoFit/>
+          </a:bodyPr>
+          <a:lstStyle/>
+          <a:p>
+            <a:pPr algn="r"/>
+            <a:r>
+              <a:rPr sz="950" b="1">
+                <a:solidFill>
+                  <a:srgbClr val="4F46E5"/>
+                </a:solidFill>
+                <a:latin typeface="Calibri"/>
+              </a:rPr>
+              <a:t>7</a:t>
             </a:r>
           </a:p>
         </p:txBody>
@@ -9941,21 +10238,19 @@
         </p:nvSpPr>
         <p:spPr>
           <a:xfrm>
-            <a:off x="502920" y="1828800"/>
-            <a:ext cx="5532120" cy="3931920"/>
+            <a:off x="502920" y="1371600"/>
+            <a:ext cx="5532120" cy="365760"/>
           </a:xfrm>
           <a:prstGeom prst="roundRect">
             <a:avLst>
-              <a:gd name="adj" fmla="val 5000"/>
+              <a:gd name="adj" fmla="val 40000"/>
             </a:avLst>
           </a:prstGeom>
           <a:solidFill>
-            <a:srgbClr val="1A1D33"/>
+            <a:srgbClr val="4F46E5"/>
           </a:solidFill>
-          <a:ln w="12700">
-            <a:solidFill>
-              <a:srgbClr val="353A5C"/>
-            </a:solidFill>
+          <a:ln>
+            <a:noFill/>
           </a:ln>
           <a:effectLst/>
         </p:spPr>
@@ -9978,12 +10273,69 @@
           <a:lstStyle/>
           <a:p>
             <a:pPr algn="ctr"/>
-          </a:p>
-        </p:txBody>
-      </p:sp>
-      <p:sp>
-        <p:nvSpPr>
-          <p:cNvPr id="12" name="TextBox 11"/>
+            <a:r>
+              <a:rPr sz="1300" b="1">
+                <a:solidFill>
+                  <a:srgbClr val="FFFFFF"/>
+                </a:solidFill>
+                <a:latin typeface="Calibri"/>
+              </a:rPr>
+              <a:t>Conclusion</a:t>
+            </a:r>
+          </a:p>
+        </p:txBody>
+      </p:sp>
+      <p:sp>
+        <p:nvSpPr>
+          <p:cNvPr id="12" name="Rounded Rectangle 11"/>
+          <p:cNvSpPr/>
+          <p:nvPr/>
+        </p:nvSpPr>
+        <p:spPr>
+          <a:xfrm>
+            <a:off x="502920" y="1828800"/>
+            <a:ext cx="5532120" cy="3931920"/>
+          </a:xfrm>
+          <a:prstGeom prst="roundRect">
+            <a:avLst>
+              <a:gd name="adj" fmla="val 5000"/>
+            </a:avLst>
+          </a:prstGeom>
+          <a:solidFill>
+            <a:srgbClr val="F6F7FC"/>
+          </a:solidFill>
+          <a:ln w="12700">
+            <a:solidFill>
+              <a:srgbClr val="DDE1F2"/>
+            </a:solidFill>
+          </a:ln>
+          <a:effectLst/>
+        </p:spPr>
+        <p:style>
+          <a:lnRef idx="1">
+            <a:schemeClr val="accent1"/>
+          </a:lnRef>
+          <a:fillRef idx="3">
+            <a:schemeClr val="accent1"/>
+          </a:fillRef>
+          <a:effectRef idx="2">
+            <a:schemeClr val="accent1"/>
+          </a:effectRef>
+          <a:fontRef idx="minor">
+            <a:schemeClr val="lt1"/>
+          </a:fontRef>
+        </p:style>
+        <p:txBody>
+          <a:bodyPr rtlCol="0" anchor="ctr"/>
+          <a:lstStyle/>
+          <a:p>
+            <a:pPr algn="ctr"/>
+          </a:p>
+        </p:txBody>
+      </p:sp>
+      <p:sp>
+        <p:nvSpPr>
+          <p:cNvPr id="13" name="TextBox 12"/>
           <p:cNvSpPr txBox="1"/>
           <p:nvPr/>
         </p:nvSpPr>
@@ -10011,7 +10363,7 @@
             <a:r>
               <a:rPr sz="1300" b="1">
                 <a:solidFill>
-                  <a:srgbClr val="6366F1"/>
+                  <a:srgbClr val="4F46E5"/>
                 </a:solidFill>
                 <a:latin typeface="Calibri"/>
               </a:rPr>
@@ -10020,7 +10372,7 @@
             <a:r>
               <a:rPr sz="1300" b="0">
                 <a:solidFill>
-                  <a:srgbClr val="9CA3C7"/>
+                  <a:srgbClr val="64708A"/>
                 </a:solidFill>
                 <a:latin typeface="Calibri"/>
               </a:rPr>
@@ -10036,7 +10388,7 @@
             <a:r>
               <a:rPr sz="1300" b="1">
                 <a:solidFill>
-                  <a:srgbClr val="6366F1"/>
+                  <a:srgbClr val="4F46E5"/>
                 </a:solidFill>
                 <a:latin typeface="Calibri"/>
               </a:rPr>
@@ -10045,7 +10397,7 @@
             <a:r>
               <a:rPr sz="1300" b="0">
                 <a:solidFill>
-                  <a:srgbClr val="9CA3C7"/>
+                  <a:srgbClr val="64708A"/>
                 </a:solidFill>
                 <a:latin typeface="Calibri"/>
               </a:rPr>
@@ -10061,7 +10413,7 @@
             <a:r>
               <a:rPr sz="1300" b="1">
                 <a:solidFill>
-                  <a:srgbClr val="6366F1"/>
+                  <a:srgbClr val="4F46E5"/>
                 </a:solidFill>
                 <a:latin typeface="Calibri"/>
               </a:rPr>
@@ -10070,7 +10422,7 @@
             <a:r>
               <a:rPr sz="1300" b="0">
                 <a:solidFill>
-                  <a:srgbClr val="9CA3C7"/>
+                  <a:srgbClr val="64708A"/>
                 </a:solidFill>
                 <a:latin typeface="Calibri"/>
               </a:rPr>
@@ -10086,7 +10438,7 @@
             <a:r>
               <a:rPr sz="1300" b="1">
                 <a:solidFill>
-                  <a:srgbClr val="6366F1"/>
+                  <a:srgbClr val="4F46E5"/>
                 </a:solidFill>
                 <a:latin typeface="Calibri"/>
               </a:rPr>
@@ -10095,7 +10447,7 @@
             <a:r>
               <a:rPr sz="1300" b="0">
                 <a:solidFill>
-                  <a:srgbClr val="9CA3C7"/>
+                  <a:srgbClr val="64708A"/>
                 </a:solidFill>
                 <a:latin typeface="Calibri"/>
               </a:rPr>
@@ -10111,7 +10463,7 @@
             <a:r>
               <a:rPr sz="1300" b="1">
                 <a:solidFill>
-                  <a:srgbClr val="6366F1"/>
+                  <a:srgbClr val="4F46E5"/>
                 </a:solidFill>
                 <a:latin typeface="Calibri"/>
               </a:rPr>
@@ -10120,7 +10472,7 @@
             <a:r>
               <a:rPr sz="1300" b="0">
                 <a:solidFill>
-                  <a:srgbClr val="9CA3C7"/>
+                  <a:srgbClr val="64708A"/>
                 </a:solidFill>
                 <a:latin typeface="Calibri"/>
               </a:rPr>
@@ -10131,7 +10483,7 @@
       </p:sp>
       <p:sp>
         <p:nvSpPr>
-          <p:cNvPr id="13" name="Rounded Rectangle 12"/>
+          <p:cNvPr id="14" name="Rounded Rectangle 13"/>
           <p:cNvSpPr/>
           <p:nvPr/>
         </p:nvSpPr>
@@ -10146,7 +10498,7 @@
             </a:avLst>
           </a:prstGeom>
           <a:solidFill>
-            <a:srgbClr val="22C55E"/>
+            <a:srgbClr val="16A34A"/>
           </a:solidFill>
           <a:ln>
             <a:noFill/>
@@ -10186,7 +10538,7 @@
       </p:sp>
       <p:sp>
         <p:nvSpPr>
-          <p:cNvPr id="14" name="Rounded Rectangle 13"/>
+          <p:cNvPr id="15" name="Rounded Rectangle 14"/>
           <p:cNvSpPr/>
           <p:nvPr/>
         </p:nvSpPr>
@@ -10201,11 +10553,11 @@
             </a:avLst>
           </a:prstGeom>
           <a:solidFill>
-            <a:srgbClr val="1A1D33"/>
+            <a:srgbClr val="F6F7FC"/>
           </a:solidFill>
           <a:ln w="12700">
             <a:solidFill>
-              <a:srgbClr val="353A5C"/>
+              <a:srgbClr val="DDE1F2"/>
             </a:solidFill>
           </a:ln>
           <a:effectLst/>
@@ -10234,7 +10586,7 @@
       </p:sp>
       <p:sp>
         <p:nvSpPr>
-          <p:cNvPr id="15" name="TextBox 14"/>
+          <p:cNvPr id="16" name="TextBox 15"/>
           <p:cNvSpPr txBox="1"/>
           <p:nvPr/>
         </p:nvSpPr>
@@ -10262,7 +10614,7 @@
             <a:r>
               <a:rPr sz="1300" b="1">
                 <a:solidFill>
-                  <a:srgbClr val="22C55E"/>
+                  <a:srgbClr val="16A34A"/>
                 </a:solidFill>
                 <a:latin typeface="Calibri"/>
               </a:rPr>
@@ -10271,7 +10623,7 @@
             <a:r>
               <a:rPr sz="1300" b="0">
                 <a:solidFill>
-                  <a:srgbClr val="9CA3C7"/>
+                  <a:srgbClr val="64708A"/>
                 </a:solidFill>
                 <a:latin typeface="Calibri"/>
               </a:rPr>
@@ -10287,7 +10639,7 @@
             <a:r>
               <a:rPr sz="1300" b="1">
                 <a:solidFill>
-                  <a:srgbClr val="22C55E"/>
+                  <a:srgbClr val="16A34A"/>
                 </a:solidFill>
                 <a:latin typeface="Calibri"/>
               </a:rPr>
@@ -10296,7 +10648,7 @@
             <a:r>
               <a:rPr sz="1300" b="0">
                 <a:solidFill>
-                  <a:srgbClr val="9CA3C7"/>
+                  <a:srgbClr val="64708A"/>
                 </a:solidFill>
                 <a:latin typeface="Calibri"/>
               </a:rPr>
@@ -10312,7 +10664,7 @@
             <a:r>
               <a:rPr sz="1300" b="1">
                 <a:solidFill>
-                  <a:srgbClr val="22C55E"/>
+                  <a:srgbClr val="16A34A"/>
                 </a:solidFill>
                 <a:latin typeface="Calibri"/>
               </a:rPr>
@@ -10321,7 +10673,7 @@
             <a:r>
               <a:rPr sz="1300" b="0">
                 <a:solidFill>
-                  <a:srgbClr val="9CA3C7"/>
+                  <a:srgbClr val="64708A"/>
                 </a:solidFill>
                 <a:latin typeface="Calibri"/>
               </a:rPr>
@@ -10337,7 +10689,7 @@
             <a:r>
               <a:rPr sz="1300" b="1">
                 <a:solidFill>
-                  <a:srgbClr val="22C55E"/>
+                  <a:srgbClr val="16A34A"/>
                 </a:solidFill>
                 <a:latin typeface="Calibri"/>
               </a:rPr>
@@ -10346,7 +10698,7 @@
             <a:r>
               <a:rPr sz="1300" b="0">
                 <a:solidFill>
-                  <a:srgbClr val="9CA3C7"/>
+                  <a:srgbClr val="64708A"/>
                 </a:solidFill>
                 <a:latin typeface="Calibri"/>
               </a:rPr>
@@ -10362,7 +10714,7 @@
             <a:r>
               <a:rPr sz="1300" b="1">
                 <a:solidFill>
-                  <a:srgbClr val="22C55E"/>
+                  <a:srgbClr val="16A34A"/>
                 </a:solidFill>
                 <a:latin typeface="Calibri"/>
               </a:rPr>
@@ -10371,7 +10723,7 @@
             <a:r>
               <a:rPr sz="1300" b="0">
                 <a:solidFill>
-                  <a:srgbClr val="9CA3C7"/>
+                  <a:srgbClr val="64708A"/>
                 </a:solidFill>
                 <a:latin typeface="Calibri"/>
               </a:rPr>
@@ -10387,7 +10739,7 @@
             <a:r>
               <a:rPr sz="1300" b="1">
                 <a:solidFill>
-                  <a:srgbClr val="22C55E"/>
+                  <a:srgbClr val="16A34A"/>
                 </a:solidFill>
                 <a:latin typeface="Calibri"/>
               </a:rPr>
@@ -10396,7 +10748,7 @@
             <a:r>
               <a:rPr sz="1300" b="0">
                 <a:solidFill>
-                  <a:srgbClr val="9CA3C7"/>
+                  <a:srgbClr val="64708A"/>
                 </a:solidFill>
                 <a:latin typeface="Calibri"/>
               </a:rPr>
@@ -10407,7 +10759,7 @@
       </p:sp>
       <p:sp>
         <p:nvSpPr>
-          <p:cNvPr id="16" name="Rectangle 15"/>
+          <p:cNvPr id="17" name="Rectangle 16"/>
           <p:cNvSpPr/>
           <p:nvPr/>
         </p:nvSpPr>
@@ -10420,7 +10772,7 @@
             <a:avLst/>
           </a:prstGeom>
           <a:solidFill>
-            <a:srgbClr val="6366F1"/>
+            <a:srgbClr val="4F46E5"/>
           </a:solidFill>
           <a:ln>
             <a:noFill/>
@@ -10451,7 +10803,7 @@
       </p:sp>
       <p:sp>
         <p:nvSpPr>
-          <p:cNvPr id="17" name="TextBox 16"/>
+          <p:cNvPr id="18" name="TextBox 17"/>
           <p:cNvSpPr txBox="1"/>
           <p:nvPr/>
         </p:nvSpPr>
